--- a/assets/docs/Tema2_Aritmetica_conteo_y_casos.pptx
+++ b/assets/docs/Tema2_Aritmetica_conteo_y_casos.pptx
@@ -20,9 +20,19 @@
     <p:sldId id="268" r:id="rId14"/>
     <p:sldId id="269" r:id="rId15"/>
     <p:sldId id="270" r:id="rId16"/>
+    <p:sldId id="271" r:id="rId17"/>
+    <p:sldId id="272" r:id="rId18"/>
+    <p:sldId id="273" r:id="rId19"/>
+    <p:sldId id="274" r:id="rId20"/>
+    <p:sldId id="275" r:id="rId21"/>
+    <p:sldId id="276" r:id="rId22"/>
+    <p:sldId id="277" r:id="rId23"/>
+    <p:sldId id="278" r:id="rId24"/>
+    <p:sldId id="279" r:id="rId25"/>
+    <p:sldId id="280" r:id="rId26"/>
   </p:sldIdLst>
   <p:notesMasterIdLst>
-    <p:notesMasterId r:id="rId17"/>
+    <p:notesMasterId r:id="rId27"/>
   </p:notesMasterIdLst>
   <p:sldSz cx="9144000" cy="5143500"/>
   <p:notesSz cx="5143500" cy="9144000"/>
@@ -1086,6 +1096,358 @@
 </p:notes>
 </file>
 
+<file path=ppt/notesSlides/notesSlide16.xml><?xml version="1.0" encoding="utf-8"?>
+<p:notes xmlns:a="http://schemas.openxmlformats.org/drawingml/2006/main" xmlns:r="http://schemas.openxmlformats.org/officeDocument/2006/relationships" xmlns:p="http://schemas.openxmlformats.org/presentationml/2006/main">
+  <p:cSld>
+    <p:spTree>
+      <p:nvGrpSpPr>
+        <p:cNvPr id="1" name=""/>
+        <p:cNvGrpSpPr/>
+        <p:nvPr/>
+      </p:nvGrpSpPr>
+      <p:grpSpPr>
+        <a:xfrm>
+          <a:off x="0" y="0"/>
+          <a:ext cx="0" cy="0"/>
+          <a:chOff x="0" y="0"/>
+          <a:chExt cx="0" cy="0"/>
+        </a:xfrm>
+      </p:grpSpPr>
+      <p:sp>
+        <p:nvSpPr>
+          <p:cNvPr id="2" name="Slide Image Placeholder 1"/>
+          <p:cNvSpPr>
+            <a:spLocks noGrp="1" noRot="1" noChangeAspect="1"/>
+          </p:cNvSpPr>
+          <p:nvPr>
+            <p:ph type="sldImg"/>
+          </p:nvPr>
+        </p:nvSpPr>
+        <p:spPr/>
+      </p:sp>
+      <p:sp>
+        <p:nvSpPr>
+          <p:cNvPr id="3" name="Notes Placeholder 2"/>
+          <p:cNvSpPr>
+            <a:spLocks noGrp="1"/>
+          </p:cNvSpPr>
+          <p:nvPr>
+            <p:ph type="body" idx="1"/>
+          </p:nvPr>
+        </p:nvSpPr>
+        <p:spPr/>
+        <p:txBody>
+          <a:bodyPr/>
+          <a:lstStyle/>
+          <a:p>
+            <a:r>
+              <a:rPr lang="en-US" dirty="0"/>
+              <a:t/>
+            </a:r>
+            <a:endParaRPr lang="en-US" dirty="0"/>
+          </a:p>
+        </p:txBody>
+      </p:sp>
+      <p:sp>
+        <p:nvSpPr>
+          <p:cNvPr id="4" name="Slide Number Placeholder 3"/>
+          <p:cNvSpPr>
+            <a:spLocks noGrp="1"/>
+          </p:cNvSpPr>
+          <p:nvPr>
+            <p:ph type="sldNum" sz="quarter" idx="10"/>
+          </p:nvPr>
+        </p:nvSpPr>
+        <p:spPr/>
+        <p:txBody>
+          <a:bodyPr/>
+          <a:lstStyle/>
+          <a:p>
+            <a:fld id="{F7021451-1387-4CA6-816F-3879F97B5CBC}" type="slidenum">
+              <a:rPr lang="en-US"/>
+              <a:t>16</a:t>
+            </a:fld>
+            <a:endParaRPr lang="en-US"/>
+          </a:p>
+        </p:txBody>
+      </p:sp>
+    </p:spTree>
+    <p:extLst>
+      <p:ext uri="{BB962C8B-B14F-4D97-AF65-F5344CB8AC3E}">
+        <p14:creationId xmlns:p14="http://schemas.microsoft.com/office/powerpoint/2010/main" val="1024086991"/>
+      </p:ext>
+    </p:extLst>
+  </p:cSld>
+  <p:clrMapOvr>
+    <a:masterClrMapping/>
+  </p:clrMapOvr>
+</p:notes>
+</file>
+
+<file path=ppt/notesSlides/notesSlide17.xml><?xml version="1.0" encoding="utf-8"?>
+<p:notes xmlns:a="http://schemas.openxmlformats.org/drawingml/2006/main" xmlns:r="http://schemas.openxmlformats.org/officeDocument/2006/relationships" xmlns:p="http://schemas.openxmlformats.org/presentationml/2006/main">
+  <p:cSld>
+    <p:spTree>
+      <p:nvGrpSpPr>
+        <p:cNvPr id="1" name=""/>
+        <p:cNvGrpSpPr/>
+        <p:nvPr/>
+      </p:nvGrpSpPr>
+      <p:grpSpPr>
+        <a:xfrm>
+          <a:off x="0" y="0"/>
+          <a:ext cx="0" cy="0"/>
+          <a:chOff x="0" y="0"/>
+          <a:chExt cx="0" cy="0"/>
+        </a:xfrm>
+      </p:grpSpPr>
+      <p:sp>
+        <p:nvSpPr>
+          <p:cNvPr id="2" name="Slide Image Placeholder 1"/>
+          <p:cNvSpPr>
+            <a:spLocks noGrp="1" noRot="1" noChangeAspect="1"/>
+          </p:cNvSpPr>
+          <p:nvPr>
+            <p:ph type="sldImg"/>
+          </p:nvPr>
+        </p:nvSpPr>
+        <p:spPr/>
+      </p:sp>
+      <p:sp>
+        <p:nvSpPr>
+          <p:cNvPr id="3" name="Notes Placeholder 2"/>
+          <p:cNvSpPr>
+            <a:spLocks noGrp="1"/>
+          </p:cNvSpPr>
+          <p:nvPr>
+            <p:ph type="body" idx="1"/>
+          </p:nvPr>
+        </p:nvSpPr>
+        <p:spPr/>
+        <p:txBody>
+          <a:bodyPr/>
+          <a:lstStyle/>
+          <a:p>
+            <a:r>
+              <a:rPr lang="en-US" dirty="0"/>
+              <a:t/>
+            </a:r>
+            <a:endParaRPr lang="en-US" dirty="0"/>
+          </a:p>
+        </p:txBody>
+      </p:sp>
+      <p:sp>
+        <p:nvSpPr>
+          <p:cNvPr id="4" name="Slide Number Placeholder 3"/>
+          <p:cNvSpPr>
+            <a:spLocks noGrp="1"/>
+          </p:cNvSpPr>
+          <p:nvPr>
+            <p:ph type="sldNum" sz="quarter" idx="10"/>
+          </p:nvPr>
+        </p:nvSpPr>
+        <p:spPr/>
+        <p:txBody>
+          <a:bodyPr/>
+          <a:lstStyle/>
+          <a:p>
+            <a:fld id="{F7021451-1387-4CA6-816F-3879F97B5CBC}" type="slidenum">
+              <a:rPr lang="en-US"/>
+              <a:t>17</a:t>
+            </a:fld>
+            <a:endParaRPr lang="en-US"/>
+          </a:p>
+        </p:txBody>
+      </p:sp>
+    </p:spTree>
+    <p:extLst>
+      <p:ext uri="{BB962C8B-B14F-4D97-AF65-F5344CB8AC3E}">
+        <p14:creationId xmlns:p14="http://schemas.microsoft.com/office/powerpoint/2010/main" val="1024086991"/>
+      </p:ext>
+    </p:extLst>
+  </p:cSld>
+  <p:clrMapOvr>
+    <a:masterClrMapping/>
+  </p:clrMapOvr>
+</p:notes>
+</file>
+
+<file path=ppt/notesSlides/notesSlide18.xml><?xml version="1.0" encoding="utf-8"?>
+<p:notes xmlns:a="http://schemas.openxmlformats.org/drawingml/2006/main" xmlns:r="http://schemas.openxmlformats.org/officeDocument/2006/relationships" xmlns:p="http://schemas.openxmlformats.org/presentationml/2006/main">
+  <p:cSld>
+    <p:spTree>
+      <p:nvGrpSpPr>
+        <p:cNvPr id="1" name=""/>
+        <p:cNvGrpSpPr/>
+        <p:nvPr/>
+      </p:nvGrpSpPr>
+      <p:grpSpPr>
+        <a:xfrm>
+          <a:off x="0" y="0"/>
+          <a:ext cx="0" cy="0"/>
+          <a:chOff x="0" y="0"/>
+          <a:chExt cx="0" cy="0"/>
+        </a:xfrm>
+      </p:grpSpPr>
+      <p:sp>
+        <p:nvSpPr>
+          <p:cNvPr id="2" name="Slide Image Placeholder 1"/>
+          <p:cNvSpPr>
+            <a:spLocks noGrp="1" noRot="1" noChangeAspect="1"/>
+          </p:cNvSpPr>
+          <p:nvPr>
+            <p:ph type="sldImg"/>
+          </p:nvPr>
+        </p:nvSpPr>
+        <p:spPr/>
+      </p:sp>
+      <p:sp>
+        <p:nvSpPr>
+          <p:cNvPr id="3" name="Notes Placeholder 2"/>
+          <p:cNvSpPr>
+            <a:spLocks noGrp="1"/>
+          </p:cNvSpPr>
+          <p:nvPr>
+            <p:ph type="body" idx="1"/>
+          </p:nvPr>
+        </p:nvSpPr>
+        <p:spPr/>
+        <p:txBody>
+          <a:bodyPr/>
+          <a:lstStyle/>
+          <a:p>
+            <a:r>
+              <a:rPr lang="en-US" dirty="0"/>
+              <a:t/>
+            </a:r>
+            <a:endParaRPr lang="en-US" dirty="0"/>
+          </a:p>
+        </p:txBody>
+      </p:sp>
+      <p:sp>
+        <p:nvSpPr>
+          <p:cNvPr id="4" name="Slide Number Placeholder 3"/>
+          <p:cNvSpPr>
+            <a:spLocks noGrp="1"/>
+          </p:cNvSpPr>
+          <p:nvPr>
+            <p:ph type="sldNum" sz="quarter" idx="10"/>
+          </p:nvPr>
+        </p:nvSpPr>
+        <p:spPr/>
+        <p:txBody>
+          <a:bodyPr/>
+          <a:lstStyle/>
+          <a:p>
+            <a:fld id="{F7021451-1387-4CA6-816F-3879F97B5CBC}" type="slidenum">
+              <a:rPr lang="en-US"/>
+              <a:t>18</a:t>
+            </a:fld>
+            <a:endParaRPr lang="en-US"/>
+          </a:p>
+        </p:txBody>
+      </p:sp>
+    </p:spTree>
+    <p:extLst>
+      <p:ext uri="{BB962C8B-B14F-4D97-AF65-F5344CB8AC3E}">
+        <p14:creationId xmlns:p14="http://schemas.microsoft.com/office/powerpoint/2010/main" val="1024086991"/>
+      </p:ext>
+    </p:extLst>
+  </p:cSld>
+  <p:clrMapOvr>
+    <a:masterClrMapping/>
+  </p:clrMapOvr>
+</p:notes>
+</file>
+
+<file path=ppt/notesSlides/notesSlide19.xml><?xml version="1.0" encoding="utf-8"?>
+<p:notes xmlns:a="http://schemas.openxmlformats.org/drawingml/2006/main" xmlns:r="http://schemas.openxmlformats.org/officeDocument/2006/relationships" xmlns:p="http://schemas.openxmlformats.org/presentationml/2006/main">
+  <p:cSld>
+    <p:spTree>
+      <p:nvGrpSpPr>
+        <p:cNvPr id="1" name=""/>
+        <p:cNvGrpSpPr/>
+        <p:nvPr/>
+      </p:nvGrpSpPr>
+      <p:grpSpPr>
+        <a:xfrm>
+          <a:off x="0" y="0"/>
+          <a:ext cx="0" cy="0"/>
+          <a:chOff x="0" y="0"/>
+          <a:chExt cx="0" cy="0"/>
+        </a:xfrm>
+      </p:grpSpPr>
+      <p:sp>
+        <p:nvSpPr>
+          <p:cNvPr id="2" name="Slide Image Placeholder 1"/>
+          <p:cNvSpPr>
+            <a:spLocks noGrp="1" noRot="1" noChangeAspect="1"/>
+          </p:cNvSpPr>
+          <p:nvPr>
+            <p:ph type="sldImg"/>
+          </p:nvPr>
+        </p:nvSpPr>
+        <p:spPr/>
+      </p:sp>
+      <p:sp>
+        <p:nvSpPr>
+          <p:cNvPr id="3" name="Notes Placeholder 2"/>
+          <p:cNvSpPr>
+            <a:spLocks noGrp="1"/>
+          </p:cNvSpPr>
+          <p:nvPr>
+            <p:ph type="body" idx="1"/>
+          </p:nvPr>
+        </p:nvSpPr>
+        <p:spPr/>
+        <p:txBody>
+          <a:bodyPr/>
+          <a:lstStyle/>
+          <a:p>
+            <a:r>
+              <a:rPr lang="en-US" dirty="0"/>
+              <a:t/>
+            </a:r>
+            <a:endParaRPr lang="en-US" dirty="0"/>
+          </a:p>
+        </p:txBody>
+      </p:sp>
+      <p:sp>
+        <p:nvSpPr>
+          <p:cNvPr id="4" name="Slide Number Placeholder 3"/>
+          <p:cNvSpPr>
+            <a:spLocks noGrp="1"/>
+          </p:cNvSpPr>
+          <p:nvPr>
+            <p:ph type="sldNum" sz="quarter" idx="10"/>
+          </p:nvPr>
+        </p:nvSpPr>
+        <p:spPr/>
+        <p:txBody>
+          <a:bodyPr/>
+          <a:lstStyle/>
+          <a:p>
+            <a:fld id="{F7021451-1387-4CA6-816F-3879F97B5CBC}" type="slidenum">
+              <a:rPr lang="en-US"/>
+              <a:t>19</a:t>
+            </a:fld>
+            <a:endParaRPr lang="en-US"/>
+          </a:p>
+        </p:txBody>
+      </p:sp>
+    </p:spTree>
+    <p:extLst>
+      <p:ext uri="{BB962C8B-B14F-4D97-AF65-F5344CB8AC3E}">
+        <p14:creationId xmlns:p14="http://schemas.microsoft.com/office/powerpoint/2010/main" val="1024086991"/>
+      </p:ext>
+    </p:extLst>
+  </p:cSld>
+  <p:clrMapOvr>
+    <a:masterClrMapping/>
+  </p:clrMapOvr>
+</p:notes>
+</file>
+
 <file path=ppt/notesSlides/notesSlide2.xml><?xml version="1.0" encoding="utf-8"?>
 <p:notes xmlns:a="http://schemas.openxmlformats.org/drawingml/2006/main" xmlns:r="http://schemas.openxmlformats.org/officeDocument/2006/relationships" xmlns:p="http://schemas.openxmlformats.org/presentationml/2006/main">
   <p:cSld>
@@ -1156,6 +1518,534 @@
             <a:fld id="{F7021451-1387-4CA6-816F-3879F97B5CBC}" type="slidenum">
               <a:rPr lang="en-US"/>
               <a:t>2</a:t>
+            </a:fld>
+            <a:endParaRPr lang="en-US"/>
+          </a:p>
+        </p:txBody>
+      </p:sp>
+    </p:spTree>
+    <p:extLst>
+      <p:ext uri="{BB962C8B-B14F-4D97-AF65-F5344CB8AC3E}">
+        <p14:creationId xmlns:p14="http://schemas.microsoft.com/office/powerpoint/2010/main" val="1024086991"/>
+      </p:ext>
+    </p:extLst>
+  </p:cSld>
+  <p:clrMapOvr>
+    <a:masterClrMapping/>
+  </p:clrMapOvr>
+</p:notes>
+</file>
+
+<file path=ppt/notesSlides/notesSlide20.xml><?xml version="1.0" encoding="utf-8"?>
+<p:notes xmlns:a="http://schemas.openxmlformats.org/drawingml/2006/main" xmlns:r="http://schemas.openxmlformats.org/officeDocument/2006/relationships" xmlns:p="http://schemas.openxmlformats.org/presentationml/2006/main">
+  <p:cSld>
+    <p:spTree>
+      <p:nvGrpSpPr>
+        <p:cNvPr id="1" name=""/>
+        <p:cNvGrpSpPr/>
+        <p:nvPr/>
+      </p:nvGrpSpPr>
+      <p:grpSpPr>
+        <a:xfrm>
+          <a:off x="0" y="0"/>
+          <a:ext cx="0" cy="0"/>
+          <a:chOff x="0" y="0"/>
+          <a:chExt cx="0" cy="0"/>
+        </a:xfrm>
+      </p:grpSpPr>
+      <p:sp>
+        <p:nvSpPr>
+          <p:cNvPr id="2" name="Slide Image Placeholder 1"/>
+          <p:cNvSpPr>
+            <a:spLocks noGrp="1" noRot="1" noChangeAspect="1"/>
+          </p:cNvSpPr>
+          <p:nvPr>
+            <p:ph type="sldImg"/>
+          </p:nvPr>
+        </p:nvSpPr>
+        <p:spPr/>
+      </p:sp>
+      <p:sp>
+        <p:nvSpPr>
+          <p:cNvPr id="3" name="Notes Placeholder 2"/>
+          <p:cNvSpPr>
+            <a:spLocks noGrp="1"/>
+          </p:cNvSpPr>
+          <p:nvPr>
+            <p:ph type="body" idx="1"/>
+          </p:nvPr>
+        </p:nvSpPr>
+        <p:spPr/>
+        <p:txBody>
+          <a:bodyPr/>
+          <a:lstStyle/>
+          <a:p>
+            <a:r>
+              <a:rPr lang="en-US" dirty="0"/>
+              <a:t/>
+            </a:r>
+            <a:endParaRPr lang="en-US" dirty="0"/>
+          </a:p>
+        </p:txBody>
+      </p:sp>
+      <p:sp>
+        <p:nvSpPr>
+          <p:cNvPr id="4" name="Slide Number Placeholder 3"/>
+          <p:cNvSpPr>
+            <a:spLocks noGrp="1"/>
+          </p:cNvSpPr>
+          <p:nvPr>
+            <p:ph type="sldNum" sz="quarter" idx="10"/>
+          </p:nvPr>
+        </p:nvSpPr>
+        <p:spPr/>
+        <p:txBody>
+          <a:bodyPr/>
+          <a:lstStyle/>
+          <a:p>
+            <a:fld id="{F7021451-1387-4CA6-816F-3879F97B5CBC}" type="slidenum">
+              <a:rPr lang="en-US"/>
+              <a:t>20</a:t>
+            </a:fld>
+            <a:endParaRPr lang="en-US"/>
+          </a:p>
+        </p:txBody>
+      </p:sp>
+    </p:spTree>
+    <p:extLst>
+      <p:ext uri="{BB962C8B-B14F-4D97-AF65-F5344CB8AC3E}">
+        <p14:creationId xmlns:p14="http://schemas.microsoft.com/office/powerpoint/2010/main" val="1024086991"/>
+      </p:ext>
+    </p:extLst>
+  </p:cSld>
+  <p:clrMapOvr>
+    <a:masterClrMapping/>
+  </p:clrMapOvr>
+</p:notes>
+</file>
+
+<file path=ppt/notesSlides/notesSlide21.xml><?xml version="1.0" encoding="utf-8"?>
+<p:notes xmlns:a="http://schemas.openxmlformats.org/drawingml/2006/main" xmlns:r="http://schemas.openxmlformats.org/officeDocument/2006/relationships" xmlns:p="http://schemas.openxmlformats.org/presentationml/2006/main">
+  <p:cSld>
+    <p:spTree>
+      <p:nvGrpSpPr>
+        <p:cNvPr id="1" name=""/>
+        <p:cNvGrpSpPr/>
+        <p:nvPr/>
+      </p:nvGrpSpPr>
+      <p:grpSpPr>
+        <a:xfrm>
+          <a:off x="0" y="0"/>
+          <a:ext cx="0" cy="0"/>
+          <a:chOff x="0" y="0"/>
+          <a:chExt cx="0" cy="0"/>
+        </a:xfrm>
+      </p:grpSpPr>
+      <p:sp>
+        <p:nvSpPr>
+          <p:cNvPr id="2" name="Slide Image Placeholder 1"/>
+          <p:cNvSpPr>
+            <a:spLocks noGrp="1" noRot="1" noChangeAspect="1"/>
+          </p:cNvSpPr>
+          <p:nvPr>
+            <p:ph type="sldImg"/>
+          </p:nvPr>
+        </p:nvSpPr>
+        <p:spPr/>
+      </p:sp>
+      <p:sp>
+        <p:nvSpPr>
+          <p:cNvPr id="3" name="Notes Placeholder 2"/>
+          <p:cNvSpPr>
+            <a:spLocks noGrp="1"/>
+          </p:cNvSpPr>
+          <p:nvPr>
+            <p:ph type="body" idx="1"/>
+          </p:nvPr>
+        </p:nvSpPr>
+        <p:spPr/>
+        <p:txBody>
+          <a:bodyPr/>
+          <a:lstStyle/>
+          <a:p>
+            <a:r>
+              <a:rPr lang="en-US" dirty="0"/>
+              <a:t/>
+            </a:r>
+            <a:endParaRPr lang="en-US" dirty="0"/>
+          </a:p>
+        </p:txBody>
+      </p:sp>
+      <p:sp>
+        <p:nvSpPr>
+          <p:cNvPr id="4" name="Slide Number Placeholder 3"/>
+          <p:cNvSpPr>
+            <a:spLocks noGrp="1"/>
+          </p:cNvSpPr>
+          <p:nvPr>
+            <p:ph type="sldNum" sz="quarter" idx="10"/>
+          </p:nvPr>
+        </p:nvSpPr>
+        <p:spPr/>
+        <p:txBody>
+          <a:bodyPr/>
+          <a:lstStyle/>
+          <a:p>
+            <a:fld id="{F7021451-1387-4CA6-816F-3879F97B5CBC}" type="slidenum">
+              <a:rPr lang="en-US"/>
+              <a:t>21</a:t>
+            </a:fld>
+            <a:endParaRPr lang="en-US"/>
+          </a:p>
+        </p:txBody>
+      </p:sp>
+    </p:spTree>
+    <p:extLst>
+      <p:ext uri="{BB962C8B-B14F-4D97-AF65-F5344CB8AC3E}">
+        <p14:creationId xmlns:p14="http://schemas.microsoft.com/office/powerpoint/2010/main" val="1024086991"/>
+      </p:ext>
+    </p:extLst>
+  </p:cSld>
+  <p:clrMapOvr>
+    <a:masterClrMapping/>
+  </p:clrMapOvr>
+</p:notes>
+</file>
+
+<file path=ppt/notesSlides/notesSlide22.xml><?xml version="1.0" encoding="utf-8"?>
+<p:notes xmlns:a="http://schemas.openxmlformats.org/drawingml/2006/main" xmlns:r="http://schemas.openxmlformats.org/officeDocument/2006/relationships" xmlns:p="http://schemas.openxmlformats.org/presentationml/2006/main">
+  <p:cSld>
+    <p:spTree>
+      <p:nvGrpSpPr>
+        <p:cNvPr id="1" name=""/>
+        <p:cNvGrpSpPr/>
+        <p:nvPr/>
+      </p:nvGrpSpPr>
+      <p:grpSpPr>
+        <a:xfrm>
+          <a:off x="0" y="0"/>
+          <a:ext cx="0" cy="0"/>
+          <a:chOff x="0" y="0"/>
+          <a:chExt cx="0" cy="0"/>
+        </a:xfrm>
+      </p:grpSpPr>
+      <p:sp>
+        <p:nvSpPr>
+          <p:cNvPr id="2" name="Slide Image Placeholder 1"/>
+          <p:cNvSpPr>
+            <a:spLocks noGrp="1" noRot="1" noChangeAspect="1"/>
+          </p:cNvSpPr>
+          <p:nvPr>
+            <p:ph type="sldImg"/>
+          </p:nvPr>
+        </p:nvSpPr>
+        <p:spPr/>
+      </p:sp>
+      <p:sp>
+        <p:nvSpPr>
+          <p:cNvPr id="3" name="Notes Placeholder 2"/>
+          <p:cNvSpPr>
+            <a:spLocks noGrp="1"/>
+          </p:cNvSpPr>
+          <p:nvPr>
+            <p:ph type="body" idx="1"/>
+          </p:nvPr>
+        </p:nvSpPr>
+        <p:spPr/>
+        <p:txBody>
+          <a:bodyPr/>
+          <a:lstStyle/>
+          <a:p>
+            <a:r>
+              <a:rPr lang="en-US" dirty="0"/>
+              <a:t/>
+            </a:r>
+            <a:endParaRPr lang="en-US" dirty="0"/>
+          </a:p>
+        </p:txBody>
+      </p:sp>
+      <p:sp>
+        <p:nvSpPr>
+          <p:cNvPr id="4" name="Slide Number Placeholder 3"/>
+          <p:cNvSpPr>
+            <a:spLocks noGrp="1"/>
+          </p:cNvSpPr>
+          <p:nvPr>
+            <p:ph type="sldNum" sz="quarter" idx="10"/>
+          </p:nvPr>
+        </p:nvSpPr>
+        <p:spPr/>
+        <p:txBody>
+          <a:bodyPr/>
+          <a:lstStyle/>
+          <a:p>
+            <a:fld id="{F7021451-1387-4CA6-816F-3879F97B5CBC}" type="slidenum">
+              <a:rPr lang="en-US"/>
+              <a:t>22</a:t>
+            </a:fld>
+            <a:endParaRPr lang="en-US"/>
+          </a:p>
+        </p:txBody>
+      </p:sp>
+    </p:spTree>
+    <p:extLst>
+      <p:ext uri="{BB962C8B-B14F-4D97-AF65-F5344CB8AC3E}">
+        <p14:creationId xmlns:p14="http://schemas.microsoft.com/office/powerpoint/2010/main" val="1024086991"/>
+      </p:ext>
+    </p:extLst>
+  </p:cSld>
+  <p:clrMapOvr>
+    <a:masterClrMapping/>
+  </p:clrMapOvr>
+</p:notes>
+</file>
+
+<file path=ppt/notesSlides/notesSlide23.xml><?xml version="1.0" encoding="utf-8"?>
+<p:notes xmlns:a="http://schemas.openxmlformats.org/drawingml/2006/main" xmlns:r="http://schemas.openxmlformats.org/officeDocument/2006/relationships" xmlns:p="http://schemas.openxmlformats.org/presentationml/2006/main">
+  <p:cSld>
+    <p:spTree>
+      <p:nvGrpSpPr>
+        <p:cNvPr id="1" name=""/>
+        <p:cNvGrpSpPr/>
+        <p:nvPr/>
+      </p:nvGrpSpPr>
+      <p:grpSpPr>
+        <a:xfrm>
+          <a:off x="0" y="0"/>
+          <a:ext cx="0" cy="0"/>
+          <a:chOff x="0" y="0"/>
+          <a:chExt cx="0" cy="0"/>
+        </a:xfrm>
+      </p:grpSpPr>
+      <p:sp>
+        <p:nvSpPr>
+          <p:cNvPr id="2" name="Slide Image Placeholder 1"/>
+          <p:cNvSpPr>
+            <a:spLocks noGrp="1" noRot="1" noChangeAspect="1"/>
+          </p:cNvSpPr>
+          <p:nvPr>
+            <p:ph type="sldImg"/>
+          </p:nvPr>
+        </p:nvSpPr>
+        <p:spPr/>
+      </p:sp>
+      <p:sp>
+        <p:nvSpPr>
+          <p:cNvPr id="3" name="Notes Placeholder 2"/>
+          <p:cNvSpPr>
+            <a:spLocks noGrp="1"/>
+          </p:cNvSpPr>
+          <p:nvPr>
+            <p:ph type="body" idx="1"/>
+          </p:nvPr>
+        </p:nvSpPr>
+        <p:spPr/>
+        <p:txBody>
+          <a:bodyPr/>
+          <a:lstStyle/>
+          <a:p>
+            <a:r>
+              <a:rPr lang="en-US" dirty="0"/>
+              <a:t/>
+            </a:r>
+            <a:endParaRPr lang="en-US" dirty="0"/>
+          </a:p>
+        </p:txBody>
+      </p:sp>
+      <p:sp>
+        <p:nvSpPr>
+          <p:cNvPr id="4" name="Slide Number Placeholder 3"/>
+          <p:cNvSpPr>
+            <a:spLocks noGrp="1"/>
+          </p:cNvSpPr>
+          <p:nvPr>
+            <p:ph type="sldNum" sz="quarter" idx="10"/>
+          </p:nvPr>
+        </p:nvSpPr>
+        <p:spPr/>
+        <p:txBody>
+          <a:bodyPr/>
+          <a:lstStyle/>
+          <a:p>
+            <a:fld id="{F7021451-1387-4CA6-816F-3879F97B5CBC}" type="slidenum">
+              <a:rPr lang="en-US"/>
+              <a:t>23</a:t>
+            </a:fld>
+            <a:endParaRPr lang="en-US"/>
+          </a:p>
+        </p:txBody>
+      </p:sp>
+    </p:spTree>
+    <p:extLst>
+      <p:ext uri="{BB962C8B-B14F-4D97-AF65-F5344CB8AC3E}">
+        <p14:creationId xmlns:p14="http://schemas.microsoft.com/office/powerpoint/2010/main" val="1024086991"/>
+      </p:ext>
+    </p:extLst>
+  </p:cSld>
+  <p:clrMapOvr>
+    <a:masterClrMapping/>
+  </p:clrMapOvr>
+</p:notes>
+</file>
+
+<file path=ppt/notesSlides/notesSlide24.xml><?xml version="1.0" encoding="utf-8"?>
+<p:notes xmlns:a="http://schemas.openxmlformats.org/drawingml/2006/main" xmlns:r="http://schemas.openxmlformats.org/officeDocument/2006/relationships" xmlns:p="http://schemas.openxmlformats.org/presentationml/2006/main">
+  <p:cSld>
+    <p:spTree>
+      <p:nvGrpSpPr>
+        <p:cNvPr id="1" name=""/>
+        <p:cNvGrpSpPr/>
+        <p:nvPr/>
+      </p:nvGrpSpPr>
+      <p:grpSpPr>
+        <a:xfrm>
+          <a:off x="0" y="0"/>
+          <a:ext cx="0" cy="0"/>
+          <a:chOff x="0" y="0"/>
+          <a:chExt cx="0" cy="0"/>
+        </a:xfrm>
+      </p:grpSpPr>
+      <p:sp>
+        <p:nvSpPr>
+          <p:cNvPr id="2" name="Slide Image Placeholder 1"/>
+          <p:cNvSpPr>
+            <a:spLocks noGrp="1" noRot="1" noChangeAspect="1"/>
+          </p:cNvSpPr>
+          <p:nvPr>
+            <p:ph type="sldImg"/>
+          </p:nvPr>
+        </p:nvSpPr>
+        <p:spPr/>
+      </p:sp>
+      <p:sp>
+        <p:nvSpPr>
+          <p:cNvPr id="3" name="Notes Placeholder 2"/>
+          <p:cNvSpPr>
+            <a:spLocks noGrp="1"/>
+          </p:cNvSpPr>
+          <p:nvPr>
+            <p:ph type="body" idx="1"/>
+          </p:nvPr>
+        </p:nvSpPr>
+        <p:spPr/>
+        <p:txBody>
+          <a:bodyPr/>
+          <a:lstStyle/>
+          <a:p>
+            <a:r>
+              <a:rPr lang="en-US" dirty="0"/>
+              <a:t/>
+            </a:r>
+            <a:endParaRPr lang="en-US" dirty="0"/>
+          </a:p>
+        </p:txBody>
+      </p:sp>
+      <p:sp>
+        <p:nvSpPr>
+          <p:cNvPr id="4" name="Slide Number Placeholder 3"/>
+          <p:cNvSpPr>
+            <a:spLocks noGrp="1"/>
+          </p:cNvSpPr>
+          <p:nvPr>
+            <p:ph type="sldNum" sz="quarter" idx="10"/>
+          </p:nvPr>
+        </p:nvSpPr>
+        <p:spPr/>
+        <p:txBody>
+          <a:bodyPr/>
+          <a:lstStyle/>
+          <a:p>
+            <a:fld id="{F7021451-1387-4CA6-816F-3879F97B5CBC}" type="slidenum">
+              <a:rPr lang="en-US"/>
+              <a:t>24</a:t>
+            </a:fld>
+            <a:endParaRPr lang="en-US"/>
+          </a:p>
+        </p:txBody>
+      </p:sp>
+    </p:spTree>
+    <p:extLst>
+      <p:ext uri="{BB962C8B-B14F-4D97-AF65-F5344CB8AC3E}">
+        <p14:creationId xmlns:p14="http://schemas.microsoft.com/office/powerpoint/2010/main" val="1024086991"/>
+      </p:ext>
+    </p:extLst>
+  </p:cSld>
+  <p:clrMapOvr>
+    <a:masterClrMapping/>
+  </p:clrMapOvr>
+</p:notes>
+</file>
+
+<file path=ppt/notesSlides/notesSlide25.xml><?xml version="1.0" encoding="utf-8"?>
+<p:notes xmlns:a="http://schemas.openxmlformats.org/drawingml/2006/main" xmlns:r="http://schemas.openxmlformats.org/officeDocument/2006/relationships" xmlns:p="http://schemas.openxmlformats.org/presentationml/2006/main">
+  <p:cSld>
+    <p:spTree>
+      <p:nvGrpSpPr>
+        <p:cNvPr id="1" name=""/>
+        <p:cNvGrpSpPr/>
+        <p:nvPr/>
+      </p:nvGrpSpPr>
+      <p:grpSpPr>
+        <a:xfrm>
+          <a:off x="0" y="0"/>
+          <a:ext cx="0" cy="0"/>
+          <a:chOff x="0" y="0"/>
+          <a:chExt cx="0" cy="0"/>
+        </a:xfrm>
+      </p:grpSpPr>
+      <p:sp>
+        <p:nvSpPr>
+          <p:cNvPr id="2" name="Slide Image Placeholder 1"/>
+          <p:cNvSpPr>
+            <a:spLocks noGrp="1" noRot="1" noChangeAspect="1"/>
+          </p:cNvSpPr>
+          <p:nvPr>
+            <p:ph type="sldImg"/>
+          </p:nvPr>
+        </p:nvSpPr>
+        <p:spPr/>
+      </p:sp>
+      <p:sp>
+        <p:nvSpPr>
+          <p:cNvPr id="3" name="Notes Placeholder 2"/>
+          <p:cNvSpPr>
+            <a:spLocks noGrp="1"/>
+          </p:cNvSpPr>
+          <p:nvPr>
+            <p:ph type="body" idx="1"/>
+          </p:nvPr>
+        </p:nvSpPr>
+        <p:spPr/>
+        <p:txBody>
+          <a:bodyPr/>
+          <a:lstStyle/>
+          <a:p>
+            <a:r>
+              <a:rPr lang="en-US" dirty="0"/>
+              <a:t/>
+            </a:r>
+            <a:endParaRPr lang="en-US" dirty="0"/>
+          </a:p>
+        </p:txBody>
+      </p:sp>
+      <p:sp>
+        <p:nvSpPr>
+          <p:cNvPr id="4" name="Slide Number Placeholder 3"/>
+          <p:cNvSpPr>
+            <a:spLocks noGrp="1"/>
+          </p:cNvSpPr>
+          <p:nvPr>
+            <p:ph type="sldNum" sz="quarter" idx="10"/>
+          </p:nvPr>
+        </p:nvSpPr>
+        <p:spPr/>
+        <p:txBody>
+          <a:bodyPr/>
+          <a:lstStyle/>
+          <a:p>
+            <a:fld id="{F7021451-1387-4CA6-816F-3879F97B5CBC}" type="slidenum">
+              <a:rPr lang="en-US"/>
+              <a:t>25</a:t>
             </a:fld>
             <a:endParaRPr lang="en-US"/>
           </a:p>
@@ -5695,7 +6585,7 @@
                 <a:ea typeface="Cambria" pitchFamily="34" charset="-122"/>
                 <a:cs typeface="Cambria" pitchFamily="34" charset="-120"/>
               </a:rPr>
-              <a:t>Errores frecuentes</a:t>
+              <a:t>Aritmética modular</a:t>
             </a:r>
             <a:endParaRPr lang="en-US" sz="3000" dirty="0"/>
           </a:p>
@@ -5734,7 +6624,7 @@
                 <a:ea typeface="Calibri" pitchFamily="34" charset="-122"/>
                 <a:cs typeface="Calibri" pitchFamily="34" charset="-120"/>
               </a:rPr>
-              <a:t>Revísalos antes del examen</a:t>
+              <a:t>Matemática circular: el residuo dentro de un ciclo</a:t>
             </a:r>
             <a:endParaRPr lang="en-US" sz="1600" dirty="0"/>
           </a:p>
@@ -5781,14 +6671,80 @@
       </p:sp>
       <p:sp>
         <p:nvSpPr>
-          <p:cNvPr id="5" name="Text 3"/>
+          <p:cNvPr id="5" name="Shape 3"/>
+          <p:cNvSpPr/>
+          <p:nvPr/>
+        </p:nvSpPr>
+        <p:spPr>
+          <a:xfrm>
+            <a:off x="914400" y="1737360"/>
+            <a:ext cx="7132320" cy="1005840"/>
+          </a:xfrm>
+          <a:prstGeom prst="roundRect">
+            <a:avLst>
+              <a:gd name="adj" fmla="val 10909"/>
+            </a:avLst>
+          </a:prstGeom>
+          <a:solidFill>
+            <a:srgbClr val="DDE8F3"/>
+          </a:solidFill>
+          <a:ln w="12700">
+            <a:solidFill>
+              <a:srgbClr val="DDE8F3"/>
+            </a:solidFill>
+            <a:prstDash val="solid"/>
+          </a:ln>
+        </p:spPr>
+      </p:sp>
+      <p:sp>
+        <p:nvSpPr>
+          <p:cNvPr id="6" name="Text 4"/>
           <p:cNvSpPr txBox="1"/>
           <p:nvPr/>
         </p:nvSpPr>
         <p:spPr>
           <a:xfrm>
-            <a:off x="548640" y="1645920"/>
-            <a:ext cx="8046720" cy="2926080"/>
+            <a:off x="914400" y="1737360"/>
+            <a:ext cx="7132320" cy="1005840"/>
+          </a:xfrm>
+          <a:prstGeom prst="rect">
+            <a:avLst/>
+          </a:prstGeom>
+          <a:noFill/>
+          <a:ln/>
+        </p:spPr>
+        <p:txBody>
+          <a:bodyPr wrap="square" lIns="0" tIns="0" rIns="0" bIns="0" rtlCol="0" anchor="ctr"/>
+          <a:lstStyle/>
+          <a:p>
+            <a:pPr algn="ctr" indent="0" marL="0">
+              <a:buNone/>
+            </a:pPr>
+            <a:r>
+              <a:rPr lang="en-US" sz="2200" b="1" dirty="0">
+                <a:solidFill>
+                  <a:srgbClr val="2F3E4E"/>
+                </a:solidFill>
+                <a:latin typeface="Calibri" pitchFamily="34" charset="0"/>
+                <a:ea typeface="Calibri" pitchFamily="34" charset="-122"/>
+                <a:cs typeface="Calibri" pitchFamily="34" charset="-120"/>
+              </a:rPr>
+              <a:t>a = q · m + r,  con  0 ≤ r &lt; m</a:t>
+            </a:r>
+            <a:endParaRPr lang="en-US" sz="2200" dirty="0"/>
+          </a:p>
+        </p:txBody>
+      </p:sp>
+      <p:sp>
+        <p:nvSpPr>
+          <p:cNvPr id="7" name="Text 5"/>
+          <p:cNvSpPr txBox="1"/>
+          <p:nvPr/>
+        </p:nvSpPr>
+        <p:spPr>
+          <a:xfrm>
+            <a:off x="548640" y="3017520"/>
+            <a:ext cx="8046720" cy="1463040"/>
           </a:xfrm>
           <a:prstGeom prst="rect">
             <a:avLst/>
@@ -5816,7 +6772,7 @@
                 <a:ea typeface="Calibri" pitchFamily="34" charset="-122"/>
                 <a:cs typeface="Calibri" pitchFamily="34" charset="-120"/>
               </a:rPr>
-              <a:t>Usar la división real para contar paquetes completos: usa el piso ⌊a/b⌋.</a:t>
+              <a:t>a mod m es el residuo al dividir a entre m &gt; 0.</a:t>
             </a:r>
             <a:endParaRPr lang="en-US" sz="1700" dirty="0"/>
           </a:p>
@@ -5837,7 +6793,7 @@
                 <a:ea typeface="Calibri" pitchFamily="34" charset="-122"/>
                 <a:cs typeface="Calibri" pitchFamily="34" charset="-120"/>
               </a:rPr>
-              <a:t>Contar mal los elementos de [a, b]: son b − a + 1.</a:t>
+              <a:t>El residuo siempre está entre 0 y m − 1.</a:t>
             </a:r>
             <a:endParaRPr lang="en-US" sz="1700" dirty="0"/>
           </a:p>
@@ -5858,49 +6814,7 @@
                 <a:ea typeface="Calibri" pitchFamily="34" charset="-122"/>
                 <a:cs typeface="Calibri" pitchFamily="34" charset="-120"/>
               </a:rPr>
-              <a:t>Olvidar restar la intersección en inclusión-exclusión.</a:t>
-            </a:r>
-            <a:endParaRPr lang="en-US" sz="1700" dirty="0"/>
-          </a:p>
-          <a:p>
-            <a:pPr marL="342900" indent="-342900">
-              <a:spcAft>
-                <a:spcPts val="600"/>
-              </a:spcAft>
-              <a:buSzPct val="100000"/>
-              <a:buChar char="•"/>
-            </a:pPr>
-            <a:r>
-              <a:rPr lang="en-US" sz="1700" dirty="0">
-                <a:solidFill>
-                  <a:srgbClr val="2F3E4E"/>
-                </a:solidFill>
-                <a:latin typeface="Calibri" pitchFamily="34" charset="0"/>
-                <a:ea typeface="Calibri" pitchFamily="34" charset="-122"/>
-                <a:cs typeface="Calibri" pitchFamily="34" charset="-120"/>
-              </a:rPr>
-              <a:t>Confundir el cardinal (total) con el ordinal (posición).</a:t>
-            </a:r>
-            <a:endParaRPr lang="en-US" sz="1700" dirty="0"/>
-          </a:p>
-          <a:p>
-            <a:pPr marL="342900" indent="-342900">
-              <a:spcAft>
-                <a:spcPts val="600"/>
-              </a:spcAft>
-              <a:buSzPct val="100000"/>
-              <a:buChar char="•"/>
-            </a:pPr>
-            <a:r>
-              <a:rPr lang="en-US" sz="1700" dirty="0">
-                <a:solidFill>
-                  <a:srgbClr val="2F3E4E"/>
-                </a:solidFill>
-                <a:latin typeface="Calibri" pitchFamily="34" charset="0"/>
-                <a:ea typeface="Calibri" pitchFamily="34" charset="-122"/>
-                <a:cs typeface="Calibri" pitchFamily="34" charset="-120"/>
-              </a:rPr>
-              <a:t>Aplicar el piso con negativos: ⌊−3.2⌋ = −4, no −3.</a:t>
+              <a:t>Así los resultados no crecen sin control.</a:t>
             </a:r>
             <a:endParaRPr lang="en-US" sz="1700" dirty="0"/>
           </a:p>
@@ -5971,6 +6885,4931 @@
                 <a:ea typeface="Cambria" pitchFamily="34" charset="-122"/>
                 <a:cs typeface="Cambria" pitchFamily="34" charset="-120"/>
               </a:rPr>
+              <a:t>Congruencias</a:t>
+            </a:r>
+            <a:endParaRPr lang="en-US" sz="3000" dirty="0"/>
+          </a:p>
+        </p:txBody>
+      </p:sp>
+      <p:sp>
+        <p:nvSpPr>
+          <p:cNvPr id="3" name="Text 1"/>
+          <p:cNvSpPr txBox="1"/>
+          <p:nvPr/>
+        </p:nvSpPr>
+        <p:spPr>
+          <a:xfrm>
+            <a:off x="548640" y="960120"/>
+            <a:ext cx="8046720" cy="365760"/>
+          </a:xfrm>
+          <a:prstGeom prst="rect">
+            <a:avLst/>
+          </a:prstGeom>
+          <a:noFill/>
+          <a:ln/>
+        </p:spPr>
+        <p:txBody>
+          <a:bodyPr wrap="square" lIns="0" tIns="0" rIns="0" bIns="0" rtlCol="0" anchor="ctr"/>
+          <a:lstStyle/>
+          <a:p>
+            <a:pPr indent="0" marL="0">
+              <a:buNone/>
+            </a:pPr>
+            <a:r>
+              <a:rPr lang="en-US" sz="1600" dirty="0">
+                <a:solidFill>
+                  <a:srgbClr val="5F6E80"/>
+                </a:solidFill>
+                <a:latin typeface="Calibri" pitchFamily="34" charset="0"/>
+                <a:ea typeface="Calibri" pitchFamily="34" charset="-122"/>
+                <a:cs typeface="Calibri" pitchFamily="34" charset="-120"/>
+              </a:rPr>
+              <a:t>Dos números son congruentes cuando dejan el mismo residuo</a:t>
+            </a:r>
+            <a:endParaRPr lang="en-US" sz="1600" dirty="0"/>
+          </a:p>
+        </p:txBody>
+      </p:sp>
+      <p:sp>
+        <p:nvSpPr>
+          <p:cNvPr id="4" name="Text 2"/>
+          <p:cNvSpPr txBox="1"/>
+          <p:nvPr/>
+        </p:nvSpPr>
+        <p:spPr>
+          <a:xfrm>
+            <a:off x="548640" y="4754880"/>
+            <a:ext cx="8046720" cy="228600"/>
+          </a:xfrm>
+          <a:prstGeom prst="rect">
+            <a:avLst/>
+          </a:prstGeom>
+          <a:noFill/>
+          <a:ln/>
+        </p:spPr>
+        <p:txBody>
+          <a:bodyPr wrap="square" lIns="0" tIns="0" rIns="0" bIns="0" rtlCol="0" anchor="ctr"/>
+          <a:lstStyle/>
+          <a:p>
+            <a:pPr indent="0" marL="0">
+              <a:buNone/>
+            </a:pPr>
+            <a:r>
+              <a:rPr lang="en-US" sz="1000" dirty="0">
+                <a:solidFill>
+                  <a:srgbClr val="8A98A8"/>
+                </a:solidFill>
+                <a:latin typeface="Calibri" pitchFamily="34" charset="0"/>
+                <a:ea typeface="Calibri" pitchFamily="34" charset="-122"/>
+                <a:cs typeface="Calibri" pitchFamily="34" charset="-120"/>
+              </a:rPr>
+              <a:t>Club de programación Competitiva - BugSquad 2026</a:t>
+            </a:r>
+            <a:endParaRPr lang="en-US" sz="1000" dirty="0"/>
+          </a:p>
+        </p:txBody>
+      </p:sp>
+      <p:sp>
+        <p:nvSpPr>
+          <p:cNvPr id="5" name="Shape 3"/>
+          <p:cNvSpPr/>
+          <p:nvPr/>
+        </p:nvSpPr>
+        <p:spPr>
+          <a:xfrm>
+            <a:off x="1645920" y="1737360"/>
+            <a:ext cx="5852160" cy="1005840"/>
+          </a:xfrm>
+          <a:prstGeom prst="roundRect">
+            <a:avLst>
+              <a:gd name="adj" fmla="val 10909"/>
+            </a:avLst>
+          </a:prstGeom>
+          <a:solidFill>
+            <a:srgbClr val="E1F0E7"/>
+          </a:solidFill>
+          <a:ln w="12700">
+            <a:solidFill>
+              <a:srgbClr val="E1F0E7"/>
+            </a:solidFill>
+            <a:prstDash val="solid"/>
+          </a:ln>
+        </p:spPr>
+      </p:sp>
+      <p:sp>
+        <p:nvSpPr>
+          <p:cNvPr id="6" name="Text 4"/>
+          <p:cNvSpPr txBox="1"/>
+          <p:nvPr/>
+        </p:nvSpPr>
+        <p:spPr>
+          <a:xfrm>
+            <a:off x="1645920" y="1737360"/>
+            <a:ext cx="5852160" cy="1005840"/>
+          </a:xfrm>
+          <a:prstGeom prst="rect">
+            <a:avLst/>
+          </a:prstGeom>
+          <a:noFill/>
+          <a:ln/>
+        </p:spPr>
+        <p:txBody>
+          <a:bodyPr wrap="square" lIns="0" tIns="0" rIns="0" bIns="0" rtlCol="0" anchor="ctr"/>
+          <a:lstStyle/>
+          <a:p>
+            <a:pPr algn="ctr" indent="0" marL="0">
+              <a:buNone/>
+            </a:pPr>
+            <a:r>
+              <a:rPr lang="en-US" sz="2600" b="1" dirty="0">
+                <a:solidFill>
+                  <a:srgbClr val="2F3E4E"/>
+                </a:solidFill>
+                <a:latin typeface="Calibri" pitchFamily="34" charset="0"/>
+                <a:ea typeface="Calibri" pitchFamily="34" charset="-122"/>
+                <a:cs typeface="Calibri" pitchFamily="34" charset="-120"/>
+              </a:rPr>
+              <a:t>a ≡ b (mod m)</a:t>
+            </a:r>
+            <a:endParaRPr lang="en-US" sz="2600" dirty="0"/>
+          </a:p>
+        </p:txBody>
+      </p:sp>
+      <p:sp>
+        <p:nvSpPr>
+          <p:cNvPr id="7" name="Text 5"/>
+          <p:cNvSpPr txBox="1"/>
+          <p:nvPr/>
+        </p:nvSpPr>
+        <p:spPr>
+          <a:xfrm>
+            <a:off x="548640" y="3017520"/>
+            <a:ext cx="8046720" cy="1463040"/>
+          </a:xfrm>
+          <a:prstGeom prst="rect">
+            <a:avLst/>
+          </a:prstGeom>
+          <a:noFill/>
+          <a:ln/>
+        </p:spPr>
+        <p:txBody>
+          <a:bodyPr wrap="square" lIns="0" tIns="0" rIns="0" bIns="0" rtlCol="0" anchor="t"/>
+          <a:lstStyle/>
+          <a:p>
+            <a:pPr marL="342900" indent="-342900">
+              <a:spcAft>
+                <a:spcPts val="600"/>
+              </a:spcAft>
+              <a:buSzPct val="100000"/>
+              <a:buChar char="•"/>
+            </a:pPr>
+            <a:r>
+              <a:rPr lang="en-US" sz="1700" dirty="0">
+                <a:solidFill>
+                  <a:srgbClr val="2F3E4E"/>
+                </a:solidFill>
+                <a:latin typeface="Calibri" pitchFamily="34" charset="0"/>
+                <a:ea typeface="Calibri" pitchFamily="34" charset="-122"/>
+                <a:cs typeface="Calibri" pitchFamily="34" charset="-120"/>
+              </a:rPr>
+              <a:t>Significa que a mod m = b mod m.</a:t>
+            </a:r>
+            <a:endParaRPr lang="en-US" sz="1700" dirty="0"/>
+          </a:p>
+          <a:p>
+            <a:pPr marL="342900" indent="-342900">
+              <a:spcAft>
+                <a:spcPts val="600"/>
+              </a:spcAft>
+              <a:buSzPct val="100000"/>
+              <a:buChar char="•"/>
+            </a:pPr>
+            <a:r>
+              <a:rPr lang="en-US" sz="1700" dirty="0">
+                <a:solidFill>
+                  <a:srgbClr val="2F3E4E"/>
+                </a:solidFill>
+                <a:latin typeface="Calibri" pitchFamily="34" charset="0"/>
+                <a:ea typeface="Calibri" pitchFamily="34" charset="-122"/>
+                <a:cs typeface="Calibri" pitchFamily="34" charset="-120"/>
+              </a:rPr>
+              <a:t>Equivale a decir que a − b es múltiplo exacto de m.</a:t>
+            </a:r>
+            <a:endParaRPr lang="en-US" sz="1700" dirty="0"/>
+          </a:p>
+          <a:p>
+            <a:pPr marL="342900" indent="-342900">
+              <a:spcAft>
+                <a:spcPts val="600"/>
+              </a:spcAft>
+              <a:buSzPct val="100000"/>
+              <a:buChar char="•"/>
+            </a:pPr>
+            <a:r>
+              <a:rPr lang="en-US" sz="1700" dirty="0">
+                <a:solidFill>
+                  <a:srgbClr val="2F3E4E"/>
+                </a:solidFill>
+                <a:latin typeface="Calibri" pitchFamily="34" charset="0"/>
+                <a:ea typeface="Calibri" pitchFamily="34" charset="-122"/>
+                <a:cs typeface="Calibri" pitchFamily="34" charset="-120"/>
+              </a:rPr>
+              <a:t>Ejemplo: 17 ≡ 5 (mod 6), porque 17 − 5 = 12 es múltiplo de 6.</a:t>
+            </a:r>
+            <a:endParaRPr lang="en-US" sz="1700" dirty="0"/>
+          </a:p>
+        </p:txBody>
+      </p:sp>
+    </p:spTree>
+  </p:cSld>
+  <p:clrMapOvr>
+    <a:masterClrMapping/>
+  </p:clrMapOvr>
+</p:sld>
+</file>
+
+<file path=ppt/slides/slide15.xml><?xml version="1.0" encoding="utf-8"?>
+<p:sld xmlns:a="http://schemas.openxmlformats.org/drawingml/2006/main" xmlns:r="http://schemas.openxmlformats.org/officeDocument/2006/relationships" xmlns:p="http://schemas.openxmlformats.org/presentationml/2006/main">
+  <p:cSld name="Slide 15">
+    <p:bg>
+      <p:bgPr>
+        <a:solidFill>
+          <a:srgbClr val="FFFFFF"/>
+        </a:solidFill>
+      </p:bgPr>
+    </p:bg>
+    <p:spTree>
+      <p:nvGrpSpPr>
+        <p:cNvPr id="1" name=""/>
+        <p:cNvGrpSpPr/>
+        <p:nvPr/>
+      </p:nvGrpSpPr>
+      <p:grpSpPr>
+        <a:xfrm>
+          <a:off x="0" y="0"/>
+          <a:ext cx="0" cy="0"/>
+          <a:chOff x="0" y="0"/>
+          <a:chExt cx="0" cy="0"/>
+        </a:xfrm>
+      </p:grpSpPr>
+      <p:sp>
+        <p:nvSpPr>
+          <p:cNvPr id="2" name="Text 0"/>
+          <p:cNvSpPr txBox="1"/>
+          <p:nvPr/>
+        </p:nvSpPr>
+        <p:spPr>
+          <a:xfrm>
+            <a:off x="548640" y="320040"/>
+            <a:ext cx="8046720" cy="640080"/>
+          </a:xfrm>
+          <a:prstGeom prst="rect">
+            <a:avLst/>
+          </a:prstGeom>
+          <a:noFill/>
+          <a:ln/>
+        </p:spPr>
+        <p:txBody>
+          <a:bodyPr wrap="square" lIns="0" tIns="0" rIns="0" bIns="0" rtlCol="0" anchor="ctr"/>
+          <a:lstStyle/>
+          <a:p>
+            <a:pPr indent="0" marL="0">
+              <a:buNone/>
+            </a:pPr>
+            <a:r>
+              <a:rPr lang="en-US" sz="3000" b="1" dirty="0">
+                <a:solidFill>
+                  <a:srgbClr val="2F3E4E"/>
+                </a:solidFill>
+                <a:latin typeface="Cambria" pitchFamily="34" charset="0"/>
+                <a:ea typeface="Cambria" pitchFamily="34" charset="-122"/>
+                <a:cs typeface="Cambria" pitchFamily="34" charset="-120"/>
+              </a:rPr>
+              <a:t>Propiedades de la suma, resta y producto</a:t>
+            </a:r>
+            <a:endParaRPr lang="en-US" sz="3000" dirty="0"/>
+          </a:p>
+        </p:txBody>
+      </p:sp>
+      <p:sp>
+        <p:nvSpPr>
+          <p:cNvPr id="3" name="Text 1"/>
+          <p:cNvSpPr txBox="1"/>
+          <p:nvPr/>
+        </p:nvSpPr>
+        <p:spPr>
+          <a:xfrm>
+            <a:off x="548640" y="960120"/>
+            <a:ext cx="8046720" cy="365760"/>
+          </a:xfrm>
+          <a:prstGeom prst="rect">
+            <a:avLst/>
+          </a:prstGeom>
+          <a:noFill/>
+          <a:ln/>
+        </p:spPr>
+        <p:txBody>
+          <a:bodyPr wrap="square" lIns="0" tIns="0" rIns="0" bIns="0" rtlCol="0" anchor="ctr"/>
+          <a:lstStyle/>
+          <a:p>
+            <a:pPr indent="0" marL="0">
+              <a:buNone/>
+            </a:pPr>
+            <a:r>
+              <a:rPr lang="en-US" sz="1600" dirty="0">
+                <a:solidFill>
+                  <a:srgbClr val="5F6E80"/>
+                </a:solidFill>
+                <a:latin typeface="Calibri" pitchFamily="34" charset="0"/>
+                <a:ea typeface="Calibri" pitchFamily="34" charset="-122"/>
+                <a:cs typeface="Calibri" pitchFamily="34" charset="-120"/>
+              </a:rPr>
+              <a:t>Puedes reducir antes de operar</a:t>
+            </a:r>
+            <a:endParaRPr lang="en-US" sz="1600" dirty="0"/>
+          </a:p>
+        </p:txBody>
+      </p:sp>
+      <p:sp>
+        <p:nvSpPr>
+          <p:cNvPr id="4" name="Text 2"/>
+          <p:cNvSpPr txBox="1"/>
+          <p:nvPr/>
+        </p:nvSpPr>
+        <p:spPr>
+          <a:xfrm>
+            <a:off x="548640" y="4754880"/>
+            <a:ext cx="8046720" cy="228600"/>
+          </a:xfrm>
+          <a:prstGeom prst="rect">
+            <a:avLst/>
+          </a:prstGeom>
+          <a:noFill/>
+          <a:ln/>
+        </p:spPr>
+        <p:txBody>
+          <a:bodyPr wrap="square" lIns="0" tIns="0" rIns="0" bIns="0" rtlCol="0" anchor="ctr"/>
+          <a:lstStyle/>
+          <a:p>
+            <a:pPr indent="0" marL="0">
+              <a:buNone/>
+            </a:pPr>
+            <a:r>
+              <a:rPr lang="en-US" sz="1000" dirty="0">
+                <a:solidFill>
+                  <a:srgbClr val="8A98A8"/>
+                </a:solidFill>
+                <a:latin typeface="Calibri" pitchFamily="34" charset="0"/>
+                <a:ea typeface="Calibri" pitchFamily="34" charset="-122"/>
+                <a:cs typeface="Calibri" pitchFamily="34" charset="-120"/>
+              </a:rPr>
+              <a:t>Club de programación Competitiva - BugSquad 2026</a:t>
+            </a:r>
+            <a:endParaRPr lang="en-US" sz="1000" dirty="0"/>
+          </a:p>
+        </p:txBody>
+      </p:sp>
+      <p:graphicFrame>
+        <p:nvGraphicFramePr>
+          <p:cNvPr id="16" name="Table 0"/>
+          <p:cNvGraphicFramePr>
+            <a:graphicFrameLocks noGrp="1"/>
+          </p:cNvGraphicFramePr>
+          <p:nvPr>
+            <p:extLst>
+              <p:ext uri="{D42A27DB-BD31-4B8C-83A1-F6EECF244321}">
+                <p14:modId xmlns:p14="http://schemas.microsoft.com/office/powerpoint/2010/main" val="1579011935"/>
+              </p:ext>
+            </p:extLst>
+          </p:nvPr>
+        </p:nvGraphicFramePr>
+        <p:xfrm>
+          <a:off x="548640" y="1645920"/>
+          <a:ext cx="8046720" cy="914400"/>
+        </p:xfrm>
+        <a:graphic>
+          <a:graphicData uri="http://schemas.openxmlformats.org/drawingml/2006/table">
+            <a:tbl>
+              <a:tblPr/>
+              <a:tblGrid>
+                <a:gridCol w="1828800"/>
+                <a:gridCol w="6217920"/>
+              </a:tblGrid>
+              <a:tr h="411480">
+                <a:tc>
+                  <a:txBody>
+                    <a:bodyPr/>
+                    <a:lstStyle/>
+                    <a:p>
+                      <a:pPr algn="ctr" indent="0" marL="0">
+                        <a:buNone/>
+                      </a:pPr>
+                      <a:r>
+                        <a:rPr lang="en-US" sz="1400" b="1" dirty="0">
+                          <a:solidFill>
+                            <a:srgbClr val="FFFFFF"/>
+                          </a:solidFill>
+                          <a:latin typeface="Calibri" pitchFamily="34" charset="0"/>
+                          <a:ea typeface="Calibri" pitchFamily="34" charset="-122"/>
+                          <a:cs typeface="Calibri" pitchFamily="34" charset="-120"/>
+                        </a:rPr>
+                        <a:t>Operación</a:t>
+                      </a:r>
+                      <a:endParaRPr lang="en-US" sz="1400" dirty="0">
+                        <a:latin typeface="Calibri" charset="0"/>
+                        <a:ea typeface="Calibri" charset="0"/>
+                        <a:cs typeface="Calibri" charset="0"/>
+                      </a:endParaRPr>
+                    </a:p>
+                  </a:txBody>
+                  <a:tcPr marL="91440" marR="91440" marT="45720" marB="45720" anchor="ctr">
+                    <a:lnL w="9525" cap="flat" cmpd="sng" algn="ctr">
+                      <a:solidFill>
+                        <a:srgbClr val="C9D5E2"/>
+                      </a:solidFill>
+                      <a:prstDash val="solid"/>
+                      <a:round/>
+                      <a:headEnd type="none" w="med" len="med"/>
+                      <a:tailEnd type="none" w="med" len="med"/>
+                    </a:lnL>
+                    <a:lnR w="9525" cap="flat" cmpd="sng" algn="ctr">
+                      <a:solidFill>
+                        <a:srgbClr val="C9D5E2"/>
+                      </a:solidFill>
+                      <a:prstDash val="solid"/>
+                      <a:round/>
+                      <a:headEnd type="none" w="med" len="med"/>
+                      <a:tailEnd type="none" w="med" len="med"/>
+                    </a:lnR>
+                    <a:lnT w="9525" cap="flat" cmpd="sng" algn="ctr">
+                      <a:solidFill>
+                        <a:srgbClr val="C9D5E2"/>
+                      </a:solidFill>
+                      <a:prstDash val="solid"/>
+                      <a:round/>
+                      <a:headEnd type="none" w="med" len="med"/>
+                      <a:tailEnd type="none" w="med" len="med"/>
+                    </a:lnT>
+                    <a:lnB w="9525" cap="flat" cmpd="sng" algn="ctr">
+                      <a:solidFill>
+                        <a:srgbClr val="C9D5E2"/>
+                      </a:solidFill>
+                      <a:prstDash val="solid"/>
+                      <a:round/>
+                      <a:headEnd type="none" w="med" len="med"/>
+                      <a:tailEnd type="none" w="med" len="med"/>
+                    </a:lnB>
+                    <a:solidFill>
+                      <a:srgbClr val="4F7CAC"/>
+                    </a:solidFill>
+                  </a:tcPr>
+                </a:tc>
+                <a:tc>
+                  <a:txBody>
+                    <a:bodyPr/>
+                    <a:lstStyle/>
+                    <a:p>
+                      <a:pPr algn="ctr" indent="0" marL="0">
+                        <a:buNone/>
+                      </a:pPr>
+                      <a:r>
+                        <a:rPr lang="en-US" sz="1400" b="1" dirty="0">
+                          <a:solidFill>
+                            <a:srgbClr val="FFFFFF"/>
+                          </a:solidFill>
+                          <a:latin typeface="Calibri" pitchFamily="34" charset="0"/>
+                          <a:ea typeface="Calibri" pitchFamily="34" charset="-122"/>
+                          <a:cs typeface="Calibri" pitchFamily="34" charset="-120"/>
+                        </a:rPr>
+                        <a:t>Con reducción previa</a:t>
+                      </a:r>
+                      <a:endParaRPr lang="en-US" sz="1400" dirty="0">
+                        <a:latin typeface="Calibri" charset="0"/>
+                        <a:ea typeface="Calibri" charset="0"/>
+                        <a:cs typeface="Calibri" charset="0"/>
+                      </a:endParaRPr>
+                    </a:p>
+                  </a:txBody>
+                  <a:tcPr marL="91440" marR="91440" marT="45720" marB="45720" anchor="ctr">
+                    <a:lnL w="9525" cap="flat" cmpd="sng" algn="ctr">
+                      <a:solidFill>
+                        <a:srgbClr val="C9D5E2"/>
+                      </a:solidFill>
+                      <a:prstDash val="solid"/>
+                      <a:round/>
+                      <a:headEnd type="none" w="med" len="med"/>
+                      <a:tailEnd type="none" w="med" len="med"/>
+                    </a:lnL>
+                    <a:lnR w="9525" cap="flat" cmpd="sng" algn="ctr">
+                      <a:solidFill>
+                        <a:srgbClr val="C9D5E2"/>
+                      </a:solidFill>
+                      <a:prstDash val="solid"/>
+                      <a:round/>
+                      <a:headEnd type="none" w="med" len="med"/>
+                      <a:tailEnd type="none" w="med" len="med"/>
+                    </a:lnR>
+                    <a:lnT w="9525" cap="flat" cmpd="sng" algn="ctr">
+                      <a:solidFill>
+                        <a:srgbClr val="C9D5E2"/>
+                      </a:solidFill>
+                      <a:prstDash val="solid"/>
+                      <a:round/>
+                      <a:headEnd type="none" w="med" len="med"/>
+                      <a:tailEnd type="none" w="med" len="med"/>
+                    </a:lnT>
+                    <a:lnB w="9525" cap="flat" cmpd="sng" algn="ctr">
+                      <a:solidFill>
+                        <a:srgbClr val="C9D5E2"/>
+                      </a:solidFill>
+                      <a:prstDash val="solid"/>
+                      <a:round/>
+                      <a:headEnd type="none" w="med" len="med"/>
+                      <a:tailEnd type="none" w="med" len="med"/>
+                    </a:lnB>
+                    <a:solidFill>
+                      <a:srgbClr val="4F7CAC"/>
+                    </a:solidFill>
+                  </a:tcPr>
+                </a:tc>
+              </a:tr>
+              <a:tr h="411480">
+                <a:tc>
+                  <a:txBody>
+                    <a:bodyPr/>
+                    <a:lstStyle/>
+                    <a:p>
+                      <a:pPr algn="ctr" indent="0" marL="0">
+                        <a:buNone/>
+                      </a:pPr>
+                      <a:r>
+                        <a:rPr lang="en-US" sz="1400" dirty="0">
+                          <a:solidFill>
+                            <a:srgbClr val="2F3E4E"/>
+                          </a:solidFill>
+                          <a:latin typeface="Calibri" pitchFamily="34" charset="0"/>
+                          <a:ea typeface="Calibri" pitchFamily="34" charset="-122"/>
+                          <a:cs typeface="Calibri" pitchFamily="34" charset="-120"/>
+                        </a:rPr>
+                        <a:t>Suma</a:t>
+                      </a:r>
+                      <a:endParaRPr lang="en-US" sz="1400" dirty="0">
+                        <a:latin typeface="Calibri" charset="0"/>
+                        <a:ea typeface="Calibri" charset="0"/>
+                        <a:cs typeface="Calibri" charset="0"/>
+                      </a:endParaRPr>
+                    </a:p>
+                  </a:txBody>
+                  <a:tcPr marL="91440" marR="91440" marT="45720" marB="45720" anchor="ctr">
+                    <a:lnL w="9525" cap="flat" cmpd="sng" algn="ctr">
+                      <a:solidFill>
+                        <a:srgbClr val="C9D5E2"/>
+                      </a:solidFill>
+                      <a:prstDash val="solid"/>
+                      <a:round/>
+                      <a:headEnd type="none" w="med" len="med"/>
+                      <a:tailEnd type="none" w="med" len="med"/>
+                    </a:lnL>
+                    <a:lnR w="9525" cap="flat" cmpd="sng" algn="ctr">
+                      <a:solidFill>
+                        <a:srgbClr val="C9D5E2"/>
+                      </a:solidFill>
+                      <a:prstDash val="solid"/>
+                      <a:round/>
+                      <a:headEnd type="none" w="med" len="med"/>
+                      <a:tailEnd type="none" w="med" len="med"/>
+                    </a:lnR>
+                    <a:lnT w="9525" cap="flat" cmpd="sng" algn="ctr">
+                      <a:solidFill>
+                        <a:srgbClr val="C9D5E2"/>
+                      </a:solidFill>
+                      <a:prstDash val="solid"/>
+                      <a:round/>
+                      <a:headEnd type="none" w="med" len="med"/>
+                      <a:tailEnd type="none" w="med" len="med"/>
+                    </a:lnT>
+                    <a:lnB w="9525" cap="flat" cmpd="sng" algn="ctr">
+                      <a:solidFill>
+                        <a:srgbClr val="C9D5E2"/>
+                      </a:solidFill>
+                      <a:prstDash val="solid"/>
+                      <a:round/>
+                      <a:headEnd type="none" w="med" len="med"/>
+                      <a:tailEnd type="none" w="med" len="med"/>
+                    </a:lnB>
+                    <a:solidFill>
+                      <a:srgbClr val="FFFFFF"/>
+                    </a:solidFill>
+                  </a:tcPr>
+                </a:tc>
+                <a:tc>
+                  <a:txBody>
+                    <a:bodyPr/>
+                    <a:lstStyle/>
+                    <a:p>
+                      <a:pPr algn="ctr" indent="0" marL="0">
+                        <a:buNone/>
+                      </a:pPr>
+                      <a:r>
+                        <a:rPr lang="en-US" sz="1400" dirty="0">
+                          <a:solidFill>
+                            <a:srgbClr val="2F3E4E"/>
+                          </a:solidFill>
+                          <a:latin typeface="Calibri" pitchFamily="34" charset="0"/>
+                          <a:ea typeface="Calibri" pitchFamily="34" charset="-122"/>
+                          <a:cs typeface="Calibri" pitchFamily="34" charset="-120"/>
+                        </a:rPr>
+                        <a:t>(a + b) mod m = ((a mod m) + (b mod m)) mod m</a:t>
+                      </a:r>
+                      <a:endParaRPr lang="en-US" sz="1400" dirty="0">
+                        <a:latin typeface="Calibri" charset="0"/>
+                        <a:ea typeface="Calibri" charset="0"/>
+                        <a:cs typeface="Calibri" charset="0"/>
+                      </a:endParaRPr>
+                    </a:p>
+                  </a:txBody>
+                  <a:tcPr marL="91440" marR="91440" marT="45720" marB="45720" anchor="ctr">
+                    <a:lnL w="9525" cap="flat" cmpd="sng" algn="ctr">
+                      <a:solidFill>
+                        <a:srgbClr val="C9D5E2"/>
+                      </a:solidFill>
+                      <a:prstDash val="solid"/>
+                      <a:round/>
+                      <a:headEnd type="none" w="med" len="med"/>
+                      <a:tailEnd type="none" w="med" len="med"/>
+                    </a:lnL>
+                    <a:lnR w="9525" cap="flat" cmpd="sng" algn="ctr">
+                      <a:solidFill>
+                        <a:srgbClr val="C9D5E2"/>
+                      </a:solidFill>
+                      <a:prstDash val="solid"/>
+                      <a:round/>
+                      <a:headEnd type="none" w="med" len="med"/>
+                      <a:tailEnd type="none" w="med" len="med"/>
+                    </a:lnR>
+                    <a:lnT w="9525" cap="flat" cmpd="sng" algn="ctr">
+                      <a:solidFill>
+                        <a:srgbClr val="C9D5E2"/>
+                      </a:solidFill>
+                      <a:prstDash val="solid"/>
+                      <a:round/>
+                      <a:headEnd type="none" w="med" len="med"/>
+                      <a:tailEnd type="none" w="med" len="med"/>
+                    </a:lnT>
+                    <a:lnB w="9525" cap="flat" cmpd="sng" algn="ctr">
+                      <a:solidFill>
+                        <a:srgbClr val="C9D5E2"/>
+                      </a:solidFill>
+                      <a:prstDash val="solid"/>
+                      <a:round/>
+                      <a:headEnd type="none" w="med" len="med"/>
+                      <a:tailEnd type="none" w="med" len="med"/>
+                    </a:lnB>
+                    <a:solidFill>
+                      <a:srgbClr val="FFFFFF"/>
+                    </a:solidFill>
+                  </a:tcPr>
+                </a:tc>
+              </a:tr>
+              <a:tr h="411480">
+                <a:tc>
+                  <a:txBody>
+                    <a:bodyPr/>
+                    <a:lstStyle/>
+                    <a:p>
+                      <a:pPr algn="ctr" indent="0" marL="0">
+                        <a:buNone/>
+                      </a:pPr>
+                      <a:r>
+                        <a:rPr lang="en-US" sz="1400" dirty="0">
+                          <a:solidFill>
+                            <a:srgbClr val="2F3E4E"/>
+                          </a:solidFill>
+                          <a:latin typeface="Calibri" pitchFamily="34" charset="0"/>
+                          <a:ea typeface="Calibri" pitchFamily="34" charset="-122"/>
+                          <a:cs typeface="Calibri" pitchFamily="34" charset="-120"/>
+                        </a:rPr>
+                        <a:t>Resta</a:t>
+                      </a:r>
+                      <a:endParaRPr lang="en-US" sz="1400" dirty="0">
+                        <a:latin typeface="Calibri" charset="0"/>
+                        <a:ea typeface="Calibri" charset="0"/>
+                        <a:cs typeface="Calibri" charset="0"/>
+                      </a:endParaRPr>
+                    </a:p>
+                  </a:txBody>
+                  <a:tcPr marL="91440" marR="91440" marT="45720" marB="45720" anchor="ctr">
+                    <a:lnL w="9525" cap="flat" cmpd="sng" algn="ctr">
+                      <a:solidFill>
+                        <a:srgbClr val="C9D5E2"/>
+                      </a:solidFill>
+                      <a:prstDash val="solid"/>
+                      <a:round/>
+                      <a:headEnd type="none" w="med" len="med"/>
+                      <a:tailEnd type="none" w="med" len="med"/>
+                    </a:lnL>
+                    <a:lnR w="9525" cap="flat" cmpd="sng" algn="ctr">
+                      <a:solidFill>
+                        <a:srgbClr val="C9D5E2"/>
+                      </a:solidFill>
+                      <a:prstDash val="solid"/>
+                      <a:round/>
+                      <a:headEnd type="none" w="med" len="med"/>
+                      <a:tailEnd type="none" w="med" len="med"/>
+                    </a:lnR>
+                    <a:lnT w="9525" cap="flat" cmpd="sng" algn="ctr">
+                      <a:solidFill>
+                        <a:srgbClr val="C9D5E2"/>
+                      </a:solidFill>
+                      <a:prstDash val="solid"/>
+                      <a:round/>
+                      <a:headEnd type="none" w="med" len="med"/>
+                      <a:tailEnd type="none" w="med" len="med"/>
+                    </a:lnT>
+                    <a:lnB w="9525" cap="flat" cmpd="sng" algn="ctr">
+                      <a:solidFill>
+                        <a:srgbClr val="C9D5E2"/>
+                      </a:solidFill>
+                      <a:prstDash val="solid"/>
+                      <a:round/>
+                      <a:headEnd type="none" w="med" len="med"/>
+                      <a:tailEnd type="none" w="med" len="med"/>
+                    </a:lnB>
+                    <a:solidFill>
+                      <a:srgbClr val="EEF3F8"/>
+                    </a:solidFill>
+                  </a:tcPr>
+                </a:tc>
+                <a:tc>
+                  <a:txBody>
+                    <a:bodyPr/>
+                    <a:lstStyle/>
+                    <a:p>
+                      <a:pPr algn="ctr" indent="0" marL="0">
+                        <a:buNone/>
+                      </a:pPr>
+                      <a:r>
+                        <a:rPr lang="en-US" sz="1400" dirty="0">
+                          <a:solidFill>
+                            <a:srgbClr val="2F3E4E"/>
+                          </a:solidFill>
+                          <a:latin typeface="Calibri" pitchFamily="34" charset="0"/>
+                          <a:ea typeface="Calibri" pitchFamily="34" charset="-122"/>
+                          <a:cs typeface="Calibri" pitchFamily="34" charset="-120"/>
+                        </a:rPr>
+                        <a:t>(a − b) mod m = ((a mod m) − (b mod m)) mod m</a:t>
+                      </a:r>
+                      <a:endParaRPr lang="en-US" sz="1400" dirty="0">
+                        <a:latin typeface="Calibri" charset="0"/>
+                        <a:ea typeface="Calibri" charset="0"/>
+                        <a:cs typeface="Calibri" charset="0"/>
+                      </a:endParaRPr>
+                    </a:p>
+                  </a:txBody>
+                  <a:tcPr marL="91440" marR="91440" marT="45720" marB="45720" anchor="ctr">
+                    <a:lnL w="9525" cap="flat" cmpd="sng" algn="ctr">
+                      <a:solidFill>
+                        <a:srgbClr val="C9D5E2"/>
+                      </a:solidFill>
+                      <a:prstDash val="solid"/>
+                      <a:round/>
+                      <a:headEnd type="none" w="med" len="med"/>
+                      <a:tailEnd type="none" w="med" len="med"/>
+                    </a:lnL>
+                    <a:lnR w="9525" cap="flat" cmpd="sng" algn="ctr">
+                      <a:solidFill>
+                        <a:srgbClr val="C9D5E2"/>
+                      </a:solidFill>
+                      <a:prstDash val="solid"/>
+                      <a:round/>
+                      <a:headEnd type="none" w="med" len="med"/>
+                      <a:tailEnd type="none" w="med" len="med"/>
+                    </a:lnR>
+                    <a:lnT w="9525" cap="flat" cmpd="sng" algn="ctr">
+                      <a:solidFill>
+                        <a:srgbClr val="C9D5E2"/>
+                      </a:solidFill>
+                      <a:prstDash val="solid"/>
+                      <a:round/>
+                      <a:headEnd type="none" w="med" len="med"/>
+                      <a:tailEnd type="none" w="med" len="med"/>
+                    </a:lnT>
+                    <a:lnB w="9525" cap="flat" cmpd="sng" algn="ctr">
+                      <a:solidFill>
+                        <a:srgbClr val="C9D5E2"/>
+                      </a:solidFill>
+                      <a:prstDash val="solid"/>
+                      <a:round/>
+                      <a:headEnd type="none" w="med" len="med"/>
+                      <a:tailEnd type="none" w="med" len="med"/>
+                    </a:lnB>
+                    <a:solidFill>
+                      <a:srgbClr val="EEF3F8"/>
+                    </a:solidFill>
+                  </a:tcPr>
+                </a:tc>
+              </a:tr>
+              <a:tr h="411480">
+                <a:tc>
+                  <a:txBody>
+                    <a:bodyPr/>
+                    <a:lstStyle/>
+                    <a:p>
+                      <a:pPr algn="ctr" indent="0" marL="0">
+                        <a:buNone/>
+                      </a:pPr>
+                      <a:r>
+                        <a:rPr lang="en-US" sz="1400" dirty="0">
+                          <a:solidFill>
+                            <a:srgbClr val="2F3E4E"/>
+                          </a:solidFill>
+                          <a:latin typeface="Calibri" pitchFamily="34" charset="0"/>
+                          <a:ea typeface="Calibri" pitchFamily="34" charset="-122"/>
+                          <a:cs typeface="Calibri" pitchFamily="34" charset="-120"/>
+                        </a:rPr>
+                        <a:t>Producto</a:t>
+                      </a:r>
+                      <a:endParaRPr lang="en-US" sz="1400" dirty="0">
+                        <a:latin typeface="Calibri" charset="0"/>
+                        <a:ea typeface="Calibri" charset="0"/>
+                        <a:cs typeface="Calibri" charset="0"/>
+                      </a:endParaRPr>
+                    </a:p>
+                  </a:txBody>
+                  <a:tcPr marL="91440" marR="91440" marT="45720" marB="45720" anchor="ctr">
+                    <a:lnL w="9525" cap="flat" cmpd="sng" algn="ctr">
+                      <a:solidFill>
+                        <a:srgbClr val="C9D5E2"/>
+                      </a:solidFill>
+                      <a:prstDash val="solid"/>
+                      <a:round/>
+                      <a:headEnd type="none" w="med" len="med"/>
+                      <a:tailEnd type="none" w="med" len="med"/>
+                    </a:lnL>
+                    <a:lnR w="9525" cap="flat" cmpd="sng" algn="ctr">
+                      <a:solidFill>
+                        <a:srgbClr val="C9D5E2"/>
+                      </a:solidFill>
+                      <a:prstDash val="solid"/>
+                      <a:round/>
+                      <a:headEnd type="none" w="med" len="med"/>
+                      <a:tailEnd type="none" w="med" len="med"/>
+                    </a:lnR>
+                    <a:lnT w="9525" cap="flat" cmpd="sng" algn="ctr">
+                      <a:solidFill>
+                        <a:srgbClr val="C9D5E2"/>
+                      </a:solidFill>
+                      <a:prstDash val="solid"/>
+                      <a:round/>
+                      <a:headEnd type="none" w="med" len="med"/>
+                      <a:tailEnd type="none" w="med" len="med"/>
+                    </a:lnT>
+                    <a:lnB w="9525" cap="flat" cmpd="sng" algn="ctr">
+                      <a:solidFill>
+                        <a:srgbClr val="C9D5E2"/>
+                      </a:solidFill>
+                      <a:prstDash val="solid"/>
+                      <a:round/>
+                      <a:headEnd type="none" w="med" len="med"/>
+                      <a:tailEnd type="none" w="med" len="med"/>
+                    </a:lnB>
+                    <a:solidFill>
+                      <a:srgbClr val="FFFFFF"/>
+                    </a:solidFill>
+                  </a:tcPr>
+                </a:tc>
+                <a:tc>
+                  <a:txBody>
+                    <a:bodyPr/>
+                    <a:lstStyle/>
+                    <a:p>
+                      <a:pPr algn="ctr" indent="0" marL="0">
+                        <a:buNone/>
+                      </a:pPr>
+                      <a:r>
+                        <a:rPr lang="en-US" sz="1400" dirty="0">
+                          <a:solidFill>
+                            <a:srgbClr val="2F3E4E"/>
+                          </a:solidFill>
+                          <a:latin typeface="Calibri" pitchFamily="34" charset="0"/>
+                          <a:ea typeface="Calibri" pitchFamily="34" charset="-122"/>
+                          <a:cs typeface="Calibri" pitchFamily="34" charset="-120"/>
+                        </a:rPr>
+                        <a:t>(a · b) mod m = ((a mod m) · (b mod m)) mod m</a:t>
+                      </a:r>
+                      <a:endParaRPr lang="en-US" sz="1400" dirty="0">
+                        <a:latin typeface="Calibri" charset="0"/>
+                        <a:ea typeface="Calibri" charset="0"/>
+                        <a:cs typeface="Calibri" charset="0"/>
+                      </a:endParaRPr>
+                    </a:p>
+                  </a:txBody>
+                  <a:tcPr marL="91440" marR="91440" marT="45720" marB="45720" anchor="ctr">
+                    <a:lnL w="9525" cap="flat" cmpd="sng" algn="ctr">
+                      <a:solidFill>
+                        <a:srgbClr val="C9D5E2"/>
+                      </a:solidFill>
+                      <a:prstDash val="solid"/>
+                      <a:round/>
+                      <a:headEnd type="none" w="med" len="med"/>
+                      <a:tailEnd type="none" w="med" len="med"/>
+                    </a:lnL>
+                    <a:lnR w="9525" cap="flat" cmpd="sng" algn="ctr">
+                      <a:solidFill>
+                        <a:srgbClr val="C9D5E2"/>
+                      </a:solidFill>
+                      <a:prstDash val="solid"/>
+                      <a:round/>
+                      <a:headEnd type="none" w="med" len="med"/>
+                      <a:tailEnd type="none" w="med" len="med"/>
+                    </a:lnR>
+                    <a:lnT w="9525" cap="flat" cmpd="sng" algn="ctr">
+                      <a:solidFill>
+                        <a:srgbClr val="C9D5E2"/>
+                      </a:solidFill>
+                      <a:prstDash val="solid"/>
+                      <a:round/>
+                      <a:headEnd type="none" w="med" len="med"/>
+                      <a:tailEnd type="none" w="med" len="med"/>
+                    </a:lnT>
+                    <a:lnB w="9525" cap="flat" cmpd="sng" algn="ctr">
+                      <a:solidFill>
+                        <a:srgbClr val="C9D5E2"/>
+                      </a:solidFill>
+                      <a:prstDash val="solid"/>
+                      <a:round/>
+                      <a:headEnd type="none" w="med" len="med"/>
+                      <a:tailEnd type="none" w="med" len="med"/>
+                    </a:lnB>
+                    <a:solidFill>
+                      <a:srgbClr val="FFFFFF"/>
+                    </a:solidFill>
+                  </a:tcPr>
+                </a:tc>
+              </a:tr>
+            </a:tbl>
+          </a:graphicData>
+        </a:graphic>
+      </p:graphicFrame>
+      <p:sp>
+        <p:nvSpPr>
+          <p:cNvPr id="6" name="Text 3"/>
+          <p:cNvSpPr txBox="1"/>
+          <p:nvPr/>
+        </p:nvSpPr>
+        <p:spPr>
+          <a:xfrm>
+            <a:off x="548640" y="3749040"/>
+            <a:ext cx="8046720" cy="365760"/>
+          </a:xfrm>
+          <a:prstGeom prst="rect">
+            <a:avLst/>
+          </a:prstGeom>
+          <a:noFill/>
+          <a:ln/>
+        </p:spPr>
+        <p:txBody>
+          <a:bodyPr wrap="square" lIns="0" tIns="0" rIns="0" bIns="0" rtlCol="0" anchor="t"/>
+          <a:lstStyle/>
+          <a:p>
+            <a:pPr indent="0" marL="0">
+              <a:buNone/>
+            </a:pPr>
+            <a:r>
+              <a:rPr lang="en-US" sz="1600" b="1" dirty="0">
+                <a:solidFill>
+                  <a:srgbClr val="2F3E4E"/>
+                </a:solidFill>
+                <a:latin typeface="Calibri" pitchFamily="34" charset="0"/>
+                <a:ea typeface="Calibri" pitchFamily="34" charset="-122"/>
+                <a:cs typeface="Calibri" pitchFamily="34" charset="-120"/>
+              </a:rPr>
+              <a:t>Reducir antes de operar da el mismo residuo final y evita números grandes.</a:t>
+            </a:r>
+            <a:endParaRPr lang="en-US" sz="1600" dirty="0"/>
+          </a:p>
+        </p:txBody>
+      </p:sp>
+    </p:spTree>
+  </p:cSld>
+  <p:clrMapOvr>
+    <a:masterClrMapping/>
+  </p:clrMapOvr>
+</p:sld>
+</file>
+
+<file path=ppt/slides/slide16.xml><?xml version="1.0" encoding="utf-8"?>
+<p:sld xmlns:a="http://schemas.openxmlformats.org/drawingml/2006/main" xmlns:r="http://schemas.openxmlformats.org/officeDocument/2006/relationships" xmlns:p="http://schemas.openxmlformats.org/presentationml/2006/main">
+  <p:cSld name="Slide 16">
+    <p:bg>
+      <p:bgPr>
+        <a:solidFill>
+          <a:srgbClr val="FFFFFF"/>
+        </a:solidFill>
+      </p:bgPr>
+    </p:bg>
+    <p:spTree>
+      <p:nvGrpSpPr>
+        <p:cNvPr id="1" name=""/>
+        <p:cNvGrpSpPr/>
+        <p:nvPr/>
+      </p:nvGrpSpPr>
+      <p:grpSpPr>
+        <a:xfrm>
+          <a:off x="0" y="0"/>
+          <a:ext cx="0" cy="0"/>
+          <a:chOff x="0" y="0"/>
+          <a:chExt cx="0" cy="0"/>
+        </a:xfrm>
+      </p:grpSpPr>
+      <p:sp>
+        <p:nvSpPr>
+          <p:cNvPr id="2" name="Text 0"/>
+          <p:cNvSpPr txBox="1"/>
+          <p:nvPr/>
+        </p:nvSpPr>
+        <p:spPr>
+          <a:xfrm>
+            <a:off x="548640" y="320040"/>
+            <a:ext cx="8046720" cy="640080"/>
+          </a:xfrm>
+          <a:prstGeom prst="rect">
+            <a:avLst/>
+          </a:prstGeom>
+          <a:noFill/>
+          <a:ln/>
+        </p:spPr>
+        <p:txBody>
+          <a:bodyPr wrap="square" lIns="0" tIns="0" rIns="0" bIns="0" rtlCol="0" anchor="ctr"/>
+          <a:lstStyle/>
+          <a:p>
+            <a:pPr indent="0" marL="0">
+              <a:buNone/>
+            </a:pPr>
+            <a:r>
+              <a:rPr lang="en-US" sz="3000" b="1" dirty="0">
+                <a:solidFill>
+                  <a:srgbClr val="2F3E4E"/>
+                </a:solidFill>
+                <a:latin typeface="Cambria" pitchFamily="34" charset="0"/>
+                <a:ea typeface="Cambria" pitchFamily="34" charset="-122"/>
+                <a:cs typeface="Cambria" pitchFamily="34" charset="-120"/>
+              </a:rPr>
+              <a:t>Comprobación con módulo 5</a:t>
+            </a:r>
+            <a:endParaRPr lang="en-US" sz="3000" dirty="0"/>
+          </a:p>
+        </p:txBody>
+      </p:sp>
+      <p:sp>
+        <p:nvSpPr>
+          <p:cNvPr id="3" name="Text 1"/>
+          <p:cNvSpPr txBox="1"/>
+          <p:nvPr/>
+        </p:nvSpPr>
+        <p:spPr>
+          <a:xfrm>
+            <a:off x="548640" y="960120"/>
+            <a:ext cx="8046720" cy="365760"/>
+          </a:xfrm>
+          <a:prstGeom prst="rect">
+            <a:avLst/>
+          </a:prstGeom>
+          <a:noFill/>
+          <a:ln/>
+        </p:spPr>
+        <p:txBody>
+          <a:bodyPr wrap="square" lIns="0" tIns="0" rIns="0" bIns="0" rtlCol="0" anchor="ctr"/>
+          <a:lstStyle/>
+          <a:p>
+            <a:pPr indent="0" marL="0">
+              <a:buNone/>
+            </a:pPr>
+            <a:r>
+              <a:rPr lang="en-US" sz="1600" dirty="0">
+                <a:solidFill>
+                  <a:srgbClr val="5F6E80"/>
+                </a:solidFill>
+                <a:latin typeface="Calibri" pitchFamily="34" charset="0"/>
+                <a:ea typeface="Calibri" pitchFamily="34" charset="-122"/>
+                <a:cs typeface="Calibri" pitchFamily="34" charset="-120"/>
+              </a:rPr>
+              <a:t>Dos caminos, el mismo residuo</a:t>
+            </a:r>
+            <a:endParaRPr lang="en-US" sz="1600" dirty="0"/>
+          </a:p>
+        </p:txBody>
+      </p:sp>
+      <p:sp>
+        <p:nvSpPr>
+          <p:cNvPr id="4" name="Text 2"/>
+          <p:cNvSpPr txBox="1"/>
+          <p:nvPr/>
+        </p:nvSpPr>
+        <p:spPr>
+          <a:xfrm>
+            <a:off x="548640" y="4754880"/>
+            <a:ext cx="8046720" cy="228600"/>
+          </a:xfrm>
+          <a:prstGeom prst="rect">
+            <a:avLst/>
+          </a:prstGeom>
+          <a:noFill/>
+          <a:ln/>
+        </p:spPr>
+        <p:txBody>
+          <a:bodyPr wrap="square" lIns="0" tIns="0" rIns="0" bIns="0" rtlCol="0" anchor="ctr"/>
+          <a:lstStyle/>
+          <a:p>
+            <a:pPr indent="0" marL="0">
+              <a:buNone/>
+            </a:pPr>
+            <a:r>
+              <a:rPr lang="en-US" sz="1000" dirty="0">
+                <a:solidFill>
+                  <a:srgbClr val="8A98A8"/>
+                </a:solidFill>
+                <a:latin typeface="Calibri" pitchFamily="34" charset="0"/>
+                <a:ea typeface="Calibri" pitchFamily="34" charset="-122"/>
+                <a:cs typeface="Calibri" pitchFamily="34" charset="-120"/>
+              </a:rPr>
+              <a:t>Club de programación Competitiva - BugSquad 2026</a:t>
+            </a:r>
+            <a:endParaRPr lang="en-US" sz="1000" dirty="0"/>
+          </a:p>
+        </p:txBody>
+      </p:sp>
+      <p:sp>
+        <p:nvSpPr>
+          <p:cNvPr id="5" name="Shape 3"/>
+          <p:cNvSpPr/>
+          <p:nvPr/>
+        </p:nvSpPr>
+        <p:spPr>
+          <a:xfrm>
+            <a:off x="548640" y="1645920"/>
+            <a:ext cx="3840480" cy="2286000"/>
+          </a:xfrm>
+          <a:prstGeom prst="roundRect">
+            <a:avLst>
+              <a:gd name="adj" fmla="val 4800"/>
+            </a:avLst>
+          </a:prstGeom>
+          <a:solidFill>
+            <a:srgbClr val="DDE8F3"/>
+          </a:solidFill>
+          <a:ln w="12700">
+            <a:solidFill>
+              <a:srgbClr val="DDE8F3"/>
+            </a:solidFill>
+            <a:prstDash val="solid"/>
+          </a:ln>
+        </p:spPr>
+      </p:sp>
+      <p:sp>
+        <p:nvSpPr>
+          <p:cNvPr id="6" name="Text 4"/>
+          <p:cNvSpPr txBox="1"/>
+          <p:nvPr/>
+        </p:nvSpPr>
+        <p:spPr>
+          <a:xfrm>
+            <a:off x="822960" y="1828800"/>
+            <a:ext cx="3291840" cy="411480"/>
+          </a:xfrm>
+          <a:prstGeom prst="rect">
+            <a:avLst/>
+          </a:prstGeom>
+          <a:noFill/>
+          <a:ln/>
+        </p:spPr>
+        <p:txBody>
+          <a:bodyPr wrap="square" lIns="0" tIns="0" rIns="0" bIns="0" rtlCol="0" anchor="t"/>
+          <a:lstStyle/>
+          <a:p>
+            <a:pPr indent="0" marL="0">
+              <a:buNone/>
+            </a:pPr>
+            <a:r>
+              <a:rPr lang="en-US" sz="1800" b="1" dirty="0">
+                <a:solidFill>
+                  <a:srgbClr val="4F7CAC"/>
+                </a:solidFill>
+                <a:latin typeface="Calibri" pitchFamily="34" charset="0"/>
+                <a:ea typeface="Calibri" pitchFamily="34" charset="-122"/>
+                <a:cs typeface="Calibri" pitchFamily="34" charset="-120"/>
+              </a:rPr>
+              <a:t>(14 + 9) mod 5</a:t>
+            </a:r>
+            <a:endParaRPr lang="en-US" sz="1800" dirty="0"/>
+          </a:p>
+        </p:txBody>
+      </p:sp>
+      <p:sp>
+        <p:nvSpPr>
+          <p:cNvPr id="7" name="Text 5"/>
+          <p:cNvSpPr txBox="1"/>
+          <p:nvPr/>
+        </p:nvSpPr>
+        <p:spPr>
+          <a:xfrm>
+            <a:off x="822960" y="2331720"/>
+            <a:ext cx="3291840" cy="1463040"/>
+          </a:xfrm>
+          <a:prstGeom prst="rect">
+            <a:avLst/>
+          </a:prstGeom>
+          <a:noFill/>
+          <a:ln/>
+        </p:spPr>
+        <p:txBody>
+          <a:bodyPr wrap="square" lIns="0" tIns="0" rIns="0" bIns="0" rtlCol="0" anchor="t"/>
+          <a:lstStyle/>
+          <a:p>
+            <a:pPr indent="0" marL="0">
+              <a:buNone/>
+            </a:pPr>
+            <a:r>
+              <a:rPr lang="en-US" sz="1500" dirty="0">
+                <a:solidFill>
+                  <a:srgbClr val="2F3E4E"/>
+                </a:solidFill>
+                <a:latin typeface="Calibri" pitchFamily="34" charset="0"/>
+                <a:ea typeface="Calibri" pitchFamily="34" charset="-122"/>
+                <a:cs typeface="Calibri" pitchFamily="34" charset="-120"/>
+              </a:rPr>
+              <a:t>Directo: 23 mod 5 = 3.</a:t>
+            </a:r>
+            <a:endParaRPr lang="en-US" sz="1500" dirty="0"/>
+          </a:p>
+          <a:p>
+            <a:pPr indent="0" marL="0">
+              <a:buNone/>
+            </a:pPr>
+            <a:endParaRPr lang="en-US" sz="1500" dirty="0"/>
+          </a:p>
+          <a:p>
+            <a:pPr indent="0" marL="0">
+              <a:buNone/>
+            </a:pPr>
+            <a:r>
+              <a:rPr lang="en-US" sz="1500" dirty="0">
+                <a:solidFill>
+                  <a:srgbClr val="2F3E4E"/>
+                </a:solidFill>
+                <a:latin typeface="Calibri" pitchFamily="34" charset="0"/>
+                <a:ea typeface="Calibri" pitchFamily="34" charset="-122"/>
+                <a:cs typeface="Calibri" pitchFamily="34" charset="-120"/>
+              </a:rPr>
+              <a:t>Con reducción: 4 + 4 = 8, y 8 mod 5 = 3.</a:t>
+            </a:r>
+            <a:endParaRPr lang="en-US" sz="1500" dirty="0"/>
+          </a:p>
+        </p:txBody>
+      </p:sp>
+      <p:sp>
+        <p:nvSpPr>
+          <p:cNvPr id="8" name="Shape 6"/>
+          <p:cNvSpPr/>
+          <p:nvPr/>
+        </p:nvSpPr>
+        <p:spPr>
+          <a:xfrm>
+            <a:off x="4754880" y="1645920"/>
+            <a:ext cx="3840480" cy="2286000"/>
+          </a:xfrm>
+          <a:prstGeom prst="roundRect">
+            <a:avLst>
+              <a:gd name="adj" fmla="val 4800"/>
+            </a:avLst>
+          </a:prstGeom>
+          <a:solidFill>
+            <a:srgbClr val="E1F0E7"/>
+          </a:solidFill>
+          <a:ln w="12700">
+            <a:solidFill>
+              <a:srgbClr val="E1F0E7"/>
+            </a:solidFill>
+            <a:prstDash val="solid"/>
+          </a:ln>
+        </p:spPr>
+      </p:sp>
+      <p:sp>
+        <p:nvSpPr>
+          <p:cNvPr id="9" name="Text 7"/>
+          <p:cNvSpPr txBox="1"/>
+          <p:nvPr/>
+        </p:nvSpPr>
+        <p:spPr>
+          <a:xfrm>
+            <a:off x="5029200" y="1828800"/>
+            <a:ext cx="3291840" cy="411480"/>
+          </a:xfrm>
+          <a:prstGeom prst="rect">
+            <a:avLst/>
+          </a:prstGeom>
+          <a:noFill/>
+          <a:ln/>
+        </p:spPr>
+        <p:txBody>
+          <a:bodyPr wrap="square" lIns="0" tIns="0" rIns="0" bIns="0" rtlCol="0" anchor="t"/>
+          <a:lstStyle/>
+          <a:p>
+            <a:pPr indent="0" marL="0">
+              <a:buNone/>
+            </a:pPr>
+            <a:r>
+              <a:rPr lang="en-US" sz="1800" b="1" dirty="0">
+                <a:solidFill>
+                  <a:srgbClr val="6FA287"/>
+                </a:solidFill>
+                <a:latin typeface="Calibri" pitchFamily="34" charset="0"/>
+                <a:ea typeface="Calibri" pitchFamily="34" charset="-122"/>
+                <a:cs typeface="Calibri" pitchFamily="34" charset="-120"/>
+              </a:rPr>
+              <a:t>(14 · 9) mod 5</a:t>
+            </a:r>
+            <a:endParaRPr lang="en-US" sz="1800" dirty="0"/>
+          </a:p>
+        </p:txBody>
+      </p:sp>
+      <p:sp>
+        <p:nvSpPr>
+          <p:cNvPr id="10" name="Text 8"/>
+          <p:cNvSpPr txBox="1"/>
+          <p:nvPr/>
+        </p:nvSpPr>
+        <p:spPr>
+          <a:xfrm>
+            <a:off x="5029200" y="2331720"/>
+            <a:ext cx="3291840" cy="1463040"/>
+          </a:xfrm>
+          <a:prstGeom prst="rect">
+            <a:avLst/>
+          </a:prstGeom>
+          <a:noFill/>
+          <a:ln/>
+        </p:spPr>
+        <p:txBody>
+          <a:bodyPr wrap="square" lIns="0" tIns="0" rIns="0" bIns="0" rtlCol="0" anchor="t"/>
+          <a:lstStyle/>
+          <a:p>
+            <a:pPr indent="0" marL="0">
+              <a:buNone/>
+            </a:pPr>
+            <a:r>
+              <a:rPr lang="en-US" sz="1500" dirty="0">
+                <a:solidFill>
+                  <a:srgbClr val="2F3E4E"/>
+                </a:solidFill>
+                <a:latin typeface="Calibri" pitchFamily="34" charset="0"/>
+                <a:ea typeface="Calibri" pitchFamily="34" charset="-122"/>
+                <a:cs typeface="Calibri" pitchFamily="34" charset="-120"/>
+              </a:rPr>
+              <a:t>Directo: 126 mod 5 = 1.</a:t>
+            </a:r>
+            <a:endParaRPr lang="en-US" sz="1500" dirty="0"/>
+          </a:p>
+          <a:p>
+            <a:pPr indent="0" marL="0">
+              <a:buNone/>
+            </a:pPr>
+            <a:endParaRPr lang="en-US" sz="1500" dirty="0"/>
+          </a:p>
+          <a:p>
+            <a:pPr indent="0" marL="0">
+              <a:buNone/>
+            </a:pPr>
+            <a:r>
+              <a:rPr lang="en-US" sz="1500" dirty="0">
+                <a:solidFill>
+                  <a:srgbClr val="2F3E4E"/>
+                </a:solidFill>
+                <a:latin typeface="Calibri" pitchFamily="34" charset="0"/>
+                <a:ea typeface="Calibri" pitchFamily="34" charset="-122"/>
+                <a:cs typeface="Calibri" pitchFamily="34" charset="-120"/>
+              </a:rPr>
+              <a:t>Con reducción: 4 · 4 = 16, y 16 mod 5 = 1.</a:t>
+            </a:r>
+            <a:endParaRPr lang="en-US" sz="1500" dirty="0"/>
+          </a:p>
+        </p:txBody>
+      </p:sp>
+      <p:sp>
+        <p:nvSpPr>
+          <p:cNvPr id="11" name="Text 9"/>
+          <p:cNvSpPr txBox="1"/>
+          <p:nvPr/>
+        </p:nvSpPr>
+        <p:spPr>
+          <a:xfrm>
+            <a:off x="548640" y="4206240"/>
+            <a:ext cx="8046720" cy="365760"/>
+          </a:xfrm>
+          <a:prstGeom prst="rect">
+            <a:avLst/>
+          </a:prstGeom>
+          <a:noFill/>
+          <a:ln/>
+        </p:spPr>
+        <p:txBody>
+          <a:bodyPr wrap="square" lIns="0" tIns="0" rIns="0" bIns="0" rtlCol="0" anchor="t"/>
+          <a:lstStyle/>
+          <a:p>
+            <a:pPr indent="0" marL="0">
+              <a:buNone/>
+            </a:pPr>
+            <a:r>
+              <a:rPr lang="en-US" sz="1500" dirty="0">
+                <a:solidFill>
+                  <a:srgbClr val="5F6E80"/>
+                </a:solidFill>
+                <a:latin typeface="Calibri" pitchFamily="34" charset="0"/>
+                <a:ea typeface="Calibri" pitchFamily="34" charset="-122"/>
+                <a:cs typeface="Calibri" pitchFamily="34" charset="-120"/>
+              </a:rPr>
+              <a:t>Los dos caminos dan el mismo residuo.</a:t>
+            </a:r>
+            <a:endParaRPr lang="en-US" sz="1500" dirty="0"/>
+          </a:p>
+        </p:txBody>
+      </p:sp>
+    </p:spTree>
+  </p:cSld>
+  <p:clrMapOvr>
+    <a:masterClrMapping/>
+  </p:clrMapOvr>
+</p:sld>
+</file>
+
+<file path=ppt/slides/slide17.xml><?xml version="1.0" encoding="utf-8"?>
+<p:sld xmlns:a="http://schemas.openxmlformats.org/drawingml/2006/main" xmlns:r="http://schemas.openxmlformats.org/officeDocument/2006/relationships" xmlns:p="http://schemas.openxmlformats.org/presentationml/2006/main">
+  <p:cSld name="Slide 17">
+    <p:bg>
+      <p:bgPr>
+        <a:solidFill>
+          <a:srgbClr val="FFFFFF"/>
+        </a:solidFill>
+      </p:bgPr>
+    </p:bg>
+    <p:spTree>
+      <p:nvGrpSpPr>
+        <p:cNvPr id="1" name=""/>
+        <p:cNvGrpSpPr/>
+        <p:nvPr/>
+      </p:nvGrpSpPr>
+      <p:grpSpPr>
+        <a:xfrm>
+          <a:off x="0" y="0"/>
+          <a:ext cx="0" cy="0"/>
+          <a:chOff x="0" y="0"/>
+          <a:chExt cx="0" cy="0"/>
+        </a:xfrm>
+      </p:grpSpPr>
+      <p:sp>
+        <p:nvSpPr>
+          <p:cNvPr id="2" name="Text 0"/>
+          <p:cNvSpPr txBox="1"/>
+          <p:nvPr/>
+        </p:nvSpPr>
+        <p:spPr>
+          <a:xfrm>
+            <a:off x="548640" y="320040"/>
+            <a:ext cx="8046720" cy="640080"/>
+          </a:xfrm>
+          <a:prstGeom prst="rect">
+            <a:avLst/>
+          </a:prstGeom>
+          <a:noFill/>
+          <a:ln/>
+        </p:spPr>
+        <p:txBody>
+          <a:bodyPr wrap="square" lIns="0" tIns="0" rIns="0" bIns="0" rtlCol="0" anchor="ctr"/>
+          <a:lstStyle/>
+          <a:p>
+            <a:pPr indent="0" marL="0">
+              <a:buNone/>
+            </a:pPr>
+            <a:r>
+              <a:rPr lang="en-US" sz="3000" b="1" dirty="0">
+                <a:solidFill>
+                  <a:srgbClr val="2F3E4E"/>
+                </a:solidFill>
+                <a:latin typeface="Cambria" pitchFamily="34" charset="0"/>
+                <a:ea typeface="Cambria" pitchFamily="34" charset="-122"/>
+                <a:cs typeface="Cambria" pitchFamily="34" charset="-120"/>
+              </a:rPr>
+              <a:t>Aplicaciones cotidianas</a:t>
+            </a:r>
+            <a:endParaRPr lang="en-US" sz="3000" dirty="0"/>
+          </a:p>
+        </p:txBody>
+      </p:sp>
+      <p:sp>
+        <p:nvSpPr>
+          <p:cNvPr id="3" name="Text 1"/>
+          <p:cNvSpPr txBox="1"/>
+          <p:nvPr/>
+        </p:nvSpPr>
+        <p:spPr>
+          <a:xfrm>
+            <a:off x="548640" y="960120"/>
+            <a:ext cx="8046720" cy="365760"/>
+          </a:xfrm>
+          <a:prstGeom prst="rect">
+            <a:avLst/>
+          </a:prstGeom>
+          <a:noFill/>
+          <a:ln/>
+        </p:spPr>
+        <p:txBody>
+          <a:bodyPr wrap="square" lIns="0" tIns="0" rIns="0" bIns="0" rtlCol="0" anchor="ctr"/>
+          <a:lstStyle/>
+          <a:p>
+            <a:pPr indent="0" marL="0">
+              <a:buNone/>
+            </a:pPr>
+            <a:r>
+              <a:rPr lang="en-US" sz="1600" dirty="0">
+                <a:solidFill>
+                  <a:srgbClr val="5F6E80"/>
+                </a:solidFill>
+                <a:latin typeface="Calibri" pitchFamily="34" charset="0"/>
+                <a:ea typeface="Calibri" pitchFamily="34" charset="-122"/>
+                <a:cs typeface="Calibri" pitchFamily="34" charset="-120"/>
+              </a:rPr>
+              <a:t>Ciclos que regresan al punto de partida</a:t>
+            </a:r>
+            <a:endParaRPr lang="en-US" sz="1600" dirty="0"/>
+          </a:p>
+        </p:txBody>
+      </p:sp>
+      <p:sp>
+        <p:nvSpPr>
+          <p:cNvPr id="4" name="Text 2"/>
+          <p:cNvSpPr txBox="1"/>
+          <p:nvPr/>
+        </p:nvSpPr>
+        <p:spPr>
+          <a:xfrm>
+            <a:off x="548640" y="4754880"/>
+            <a:ext cx="8046720" cy="228600"/>
+          </a:xfrm>
+          <a:prstGeom prst="rect">
+            <a:avLst/>
+          </a:prstGeom>
+          <a:noFill/>
+          <a:ln/>
+        </p:spPr>
+        <p:txBody>
+          <a:bodyPr wrap="square" lIns="0" tIns="0" rIns="0" bIns="0" rtlCol="0" anchor="ctr"/>
+          <a:lstStyle/>
+          <a:p>
+            <a:pPr indent="0" marL="0">
+              <a:buNone/>
+            </a:pPr>
+            <a:r>
+              <a:rPr lang="en-US" sz="1000" dirty="0">
+                <a:solidFill>
+                  <a:srgbClr val="8A98A8"/>
+                </a:solidFill>
+                <a:latin typeface="Calibri" pitchFamily="34" charset="0"/>
+                <a:ea typeface="Calibri" pitchFamily="34" charset="-122"/>
+                <a:cs typeface="Calibri" pitchFamily="34" charset="-120"/>
+              </a:rPr>
+              <a:t>Club de programación Competitiva - BugSquad 2026</a:t>
+            </a:r>
+            <a:endParaRPr lang="en-US" sz="1000" dirty="0"/>
+          </a:p>
+        </p:txBody>
+      </p:sp>
+      <p:sp>
+        <p:nvSpPr>
+          <p:cNvPr id="5" name="Shape 3"/>
+          <p:cNvSpPr/>
+          <p:nvPr/>
+        </p:nvSpPr>
+        <p:spPr>
+          <a:xfrm>
+            <a:off x="548640" y="1645920"/>
+            <a:ext cx="1874520" cy="2377440"/>
+          </a:xfrm>
+          <a:prstGeom prst="roundRect">
+            <a:avLst>
+              <a:gd name="adj" fmla="val 5854"/>
+            </a:avLst>
+          </a:prstGeom>
+          <a:solidFill>
+            <a:srgbClr val="DDE8F3"/>
+          </a:solidFill>
+          <a:ln w="12700">
+            <a:solidFill>
+              <a:srgbClr val="DDE8F3"/>
+            </a:solidFill>
+            <a:prstDash val="solid"/>
+          </a:ln>
+        </p:spPr>
+      </p:sp>
+      <p:sp>
+        <p:nvSpPr>
+          <p:cNvPr id="6" name="Shape 4"/>
+          <p:cNvSpPr/>
+          <p:nvPr/>
+        </p:nvSpPr>
+        <p:spPr>
+          <a:xfrm>
+            <a:off x="731520" y="1828800"/>
+            <a:ext cx="548640" cy="548640"/>
+          </a:xfrm>
+          <a:prstGeom prst="ellipse">
+            <a:avLst/>
+          </a:prstGeom>
+          <a:solidFill>
+            <a:srgbClr val="4F7CAC"/>
+          </a:solidFill>
+          <a:ln w="12700">
+            <a:solidFill>
+              <a:srgbClr val="4F7CAC"/>
+            </a:solidFill>
+            <a:prstDash val="solid"/>
+          </a:ln>
+        </p:spPr>
+      </p:sp>
+      <p:pic>
+        <p:nvPicPr>
+          <p:cNvPr id="7" name="Image 0" descr="preencoded.png">    </p:cNvPr>
+          <p:cNvPicPr>
+            <a:picLocks noChangeAspect="1"/>
+          </p:cNvPicPr>
+          <p:nvPr/>
+        </p:nvPicPr>
+        <p:blipFill>
+          <a:blip r:embed="rId1"/>
+          <a:stretch>
+            <a:fillRect/>
+          </a:stretch>
+        </p:blipFill>
+        <p:spPr>
+          <a:xfrm>
+            <a:off x="879653" y="1976933"/>
+            <a:ext cx="252374" cy="252374"/>
+          </a:xfrm>
+          <a:prstGeom prst="rect">
+            <a:avLst/>
+          </a:prstGeom>
+        </p:spPr>
+      </p:pic>
+      <p:sp>
+        <p:nvSpPr>
+          <p:cNvPr id="8" name="Text 5"/>
+          <p:cNvSpPr txBox="1"/>
+          <p:nvPr/>
+        </p:nvSpPr>
+        <p:spPr>
+          <a:xfrm>
+            <a:off x="731520" y="2514600"/>
+            <a:ext cx="1508760" cy="548640"/>
+          </a:xfrm>
+          <a:prstGeom prst="rect">
+            <a:avLst/>
+          </a:prstGeom>
+          <a:noFill/>
+          <a:ln/>
+        </p:spPr>
+        <p:txBody>
+          <a:bodyPr wrap="square" lIns="0" tIns="0" rIns="0" bIns="0" rtlCol="0" anchor="t"/>
+          <a:lstStyle/>
+          <a:p>
+            <a:pPr indent="0" marL="0">
+              <a:buNone/>
+            </a:pPr>
+            <a:r>
+              <a:rPr lang="en-US" sz="1600" b="1" dirty="0">
+                <a:solidFill>
+                  <a:srgbClr val="2F3E4E"/>
+                </a:solidFill>
+                <a:latin typeface="Calibri" pitchFamily="34" charset="0"/>
+                <a:ea typeface="Calibri" pitchFamily="34" charset="-122"/>
+                <a:cs typeface="Calibri" pitchFamily="34" charset="-120"/>
+              </a:rPr>
+              <a:t>Reloj</a:t>
+            </a:r>
+            <a:endParaRPr lang="en-US" sz="1600" dirty="0"/>
+          </a:p>
+        </p:txBody>
+      </p:sp>
+      <p:sp>
+        <p:nvSpPr>
+          <p:cNvPr id="9" name="Text 6"/>
+          <p:cNvSpPr txBox="1"/>
+          <p:nvPr/>
+        </p:nvSpPr>
+        <p:spPr>
+          <a:xfrm>
+            <a:off x="731520" y="3108960"/>
+            <a:ext cx="1508760" cy="868680"/>
+          </a:xfrm>
+          <a:prstGeom prst="rect">
+            <a:avLst/>
+          </a:prstGeom>
+          <a:noFill/>
+          <a:ln/>
+        </p:spPr>
+        <p:txBody>
+          <a:bodyPr wrap="square" lIns="0" tIns="0" rIns="0" bIns="0" rtlCol="0" anchor="t"/>
+          <a:lstStyle/>
+          <a:p>
+            <a:pPr indent="0" marL="0">
+              <a:buNone/>
+            </a:pPr>
+            <a:r>
+              <a:rPr lang="en-US" sz="1300" dirty="0">
+                <a:solidFill>
+                  <a:srgbClr val="2F3E4E"/>
+                </a:solidFill>
+                <a:latin typeface="Calibri" pitchFamily="34" charset="0"/>
+                <a:ea typeface="Calibri" pitchFamily="34" charset="-122"/>
+                <a:cs typeface="Calibri" pitchFamily="34" charset="-120"/>
+              </a:rPr>
+              <a:t>(9 + 5) mod 12 = 2. Son las 2.</a:t>
+            </a:r>
+            <a:endParaRPr lang="en-US" sz="1300" dirty="0"/>
+          </a:p>
+        </p:txBody>
+      </p:sp>
+      <p:sp>
+        <p:nvSpPr>
+          <p:cNvPr id="10" name="Shape 7"/>
+          <p:cNvSpPr/>
+          <p:nvPr/>
+        </p:nvSpPr>
+        <p:spPr>
+          <a:xfrm>
+            <a:off x="2606040" y="1645920"/>
+            <a:ext cx="1874520" cy="2377440"/>
+          </a:xfrm>
+          <a:prstGeom prst="roundRect">
+            <a:avLst>
+              <a:gd name="adj" fmla="val 5854"/>
+            </a:avLst>
+          </a:prstGeom>
+          <a:solidFill>
+            <a:srgbClr val="E1F0E7"/>
+          </a:solidFill>
+          <a:ln w="12700">
+            <a:solidFill>
+              <a:srgbClr val="E1F0E7"/>
+            </a:solidFill>
+            <a:prstDash val="solid"/>
+          </a:ln>
+        </p:spPr>
+      </p:sp>
+      <p:sp>
+        <p:nvSpPr>
+          <p:cNvPr id="11" name="Shape 8"/>
+          <p:cNvSpPr/>
+          <p:nvPr/>
+        </p:nvSpPr>
+        <p:spPr>
+          <a:xfrm>
+            <a:off x="2788920" y="1828800"/>
+            <a:ext cx="548640" cy="548640"/>
+          </a:xfrm>
+          <a:prstGeom prst="ellipse">
+            <a:avLst/>
+          </a:prstGeom>
+          <a:solidFill>
+            <a:srgbClr val="6FA287"/>
+          </a:solidFill>
+          <a:ln w="12700">
+            <a:solidFill>
+              <a:srgbClr val="6FA287"/>
+            </a:solidFill>
+            <a:prstDash val="solid"/>
+          </a:ln>
+        </p:spPr>
+      </p:sp>
+      <p:pic>
+        <p:nvPicPr>
+          <p:cNvPr id="12" name="Image 1" descr="preencoded.png">    </p:cNvPr>
+          <p:cNvPicPr>
+            <a:picLocks noChangeAspect="1"/>
+          </p:cNvPicPr>
+          <p:nvPr/>
+        </p:nvPicPr>
+        <p:blipFill>
+          <a:blip r:embed="rId2"/>
+          <a:stretch>
+            <a:fillRect/>
+          </a:stretch>
+        </p:blipFill>
+        <p:spPr>
+          <a:xfrm>
+            <a:off x="2937053" y="1976933"/>
+            <a:ext cx="252374" cy="252374"/>
+          </a:xfrm>
+          <a:prstGeom prst="rect">
+            <a:avLst/>
+          </a:prstGeom>
+        </p:spPr>
+      </p:pic>
+      <p:sp>
+        <p:nvSpPr>
+          <p:cNvPr id="13" name="Text 9"/>
+          <p:cNvSpPr txBox="1"/>
+          <p:nvPr/>
+        </p:nvSpPr>
+        <p:spPr>
+          <a:xfrm>
+            <a:off x="2788920" y="2514600"/>
+            <a:ext cx="1508760" cy="548640"/>
+          </a:xfrm>
+          <a:prstGeom prst="rect">
+            <a:avLst/>
+          </a:prstGeom>
+          <a:noFill/>
+          <a:ln/>
+        </p:spPr>
+        <p:txBody>
+          <a:bodyPr wrap="square" lIns="0" tIns="0" rIns="0" bIns="0" rtlCol="0" anchor="t"/>
+          <a:lstStyle/>
+          <a:p>
+            <a:pPr indent="0" marL="0">
+              <a:buNone/>
+            </a:pPr>
+            <a:r>
+              <a:rPr lang="en-US" sz="1600" b="1" dirty="0">
+                <a:solidFill>
+                  <a:srgbClr val="2F3E4E"/>
+                </a:solidFill>
+                <a:latin typeface="Calibri" pitchFamily="34" charset="0"/>
+                <a:ea typeface="Calibri" pitchFamily="34" charset="-122"/>
+                <a:cs typeface="Calibri" pitchFamily="34" charset="-120"/>
+              </a:rPr>
+              <a:t>Días</a:t>
+            </a:r>
+            <a:endParaRPr lang="en-US" sz="1600" dirty="0"/>
+          </a:p>
+        </p:txBody>
+      </p:sp>
+      <p:sp>
+        <p:nvSpPr>
+          <p:cNvPr id="14" name="Text 10"/>
+          <p:cNvSpPr txBox="1"/>
+          <p:nvPr/>
+        </p:nvSpPr>
+        <p:spPr>
+          <a:xfrm>
+            <a:off x="2788920" y="3108960"/>
+            <a:ext cx="1508760" cy="868680"/>
+          </a:xfrm>
+          <a:prstGeom prst="rect">
+            <a:avLst/>
+          </a:prstGeom>
+          <a:noFill/>
+          <a:ln/>
+        </p:spPr>
+        <p:txBody>
+          <a:bodyPr wrap="square" lIns="0" tIns="0" rIns="0" bIns="0" rtlCol="0" anchor="t"/>
+          <a:lstStyle/>
+          <a:p>
+            <a:pPr indent="0" marL="0">
+              <a:buNone/>
+            </a:pPr>
+            <a:r>
+              <a:rPr lang="en-US" sz="1300" dirty="0">
+                <a:solidFill>
+                  <a:srgbClr val="2F3E4E"/>
+                </a:solidFill>
+                <a:latin typeface="Calibri" pitchFamily="34" charset="0"/>
+                <a:ea typeface="Calibri" pitchFamily="34" charset="-122"/>
+                <a:cs typeface="Calibri" pitchFamily="34" charset="-120"/>
+              </a:rPr>
+              <a:t>100 mod 7 = 2 días después del día actual.</a:t>
+            </a:r>
+            <a:endParaRPr lang="en-US" sz="1300" dirty="0"/>
+          </a:p>
+        </p:txBody>
+      </p:sp>
+      <p:sp>
+        <p:nvSpPr>
+          <p:cNvPr id="15" name="Shape 11"/>
+          <p:cNvSpPr/>
+          <p:nvPr/>
+        </p:nvSpPr>
+        <p:spPr>
+          <a:xfrm>
+            <a:off x="4663440" y="1645920"/>
+            <a:ext cx="1874520" cy="2377440"/>
+          </a:xfrm>
+          <a:prstGeom prst="roundRect">
+            <a:avLst>
+              <a:gd name="adj" fmla="val 5854"/>
+            </a:avLst>
+          </a:prstGeom>
+          <a:solidFill>
+            <a:srgbClr val="FBEADC"/>
+          </a:solidFill>
+          <a:ln w="12700">
+            <a:solidFill>
+              <a:srgbClr val="FBEADC"/>
+            </a:solidFill>
+            <a:prstDash val="solid"/>
+          </a:ln>
+        </p:spPr>
+      </p:sp>
+      <p:sp>
+        <p:nvSpPr>
+          <p:cNvPr id="16" name="Shape 12"/>
+          <p:cNvSpPr/>
+          <p:nvPr/>
+        </p:nvSpPr>
+        <p:spPr>
+          <a:xfrm>
+            <a:off x="4846320" y="1828800"/>
+            <a:ext cx="548640" cy="548640"/>
+          </a:xfrm>
+          <a:prstGeom prst="ellipse">
+            <a:avLst/>
+          </a:prstGeom>
+          <a:solidFill>
+            <a:srgbClr val="E39B6B"/>
+          </a:solidFill>
+          <a:ln w="12700">
+            <a:solidFill>
+              <a:srgbClr val="E39B6B"/>
+            </a:solidFill>
+            <a:prstDash val="solid"/>
+          </a:ln>
+        </p:spPr>
+      </p:sp>
+      <p:pic>
+        <p:nvPicPr>
+          <p:cNvPr id="17" name="Image 2" descr="preencoded.png">    </p:cNvPr>
+          <p:cNvPicPr>
+            <a:picLocks noChangeAspect="1"/>
+          </p:cNvPicPr>
+          <p:nvPr/>
+        </p:nvPicPr>
+        <p:blipFill>
+          <a:blip r:embed="rId3"/>
+          <a:stretch>
+            <a:fillRect/>
+          </a:stretch>
+        </p:blipFill>
+        <p:spPr>
+          <a:xfrm>
+            <a:off x="4994453" y="1976933"/>
+            <a:ext cx="252374" cy="252374"/>
+          </a:xfrm>
+          <a:prstGeom prst="rect">
+            <a:avLst/>
+          </a:prstGeom>
+        </p:spPr>
+      </p:pic>
+      <p:sp>
+        <p:nvSpPr>
+          <p:cNvPr id="18" name="Text 13"/>
+          <p:cNvSpPr txBox="1"/>
+          <p:nvPr/>
+        </p:nvSpPr>
+        <p:spPr>
+          <a:xfrm>
+            <a:off x="4846320" y="2514600"/>
+            <a:ext cx="1508760" cy="548640"/>
+          </a:xfrm>
+          <a:prstGeom prst="rect">
+            <a:avLst/>
+          </a:prstGeom>
+          <a:noFill/>
+          <a:ln/>
+        </p:spPr>
+        <p:txBody>
+          <a:bodyPr wrap="square" lIns="0" tIns="0" rIns="0" bIns="0" rtlCol="0" anchor="t"/>
+          <a:lstStyle/>
+          <a:p>
+            <a:pPr indent="0" marL="0">
+              <a:buNone/>
+            </a:pPr>
+            <a:r>
+              <a:rPr lang="en-US" sz="1600" b="1" dirty="0">
+                <a:solidFill>
+                  <a:srgbClr val="2F3E4E"/>
+                </a:solidFill>
+                <a:latin typeface="Calibri" pitchFamily="34" charset="0"/>
+                <a:ea typeface="Calibri" pitchFamily="34" charset="-122"/>
+                <a:cs typeface="Calibri" pitchFamily="34" charset="-120"/>
+              </a:rPr>
+              <a:t>Potencias de 2</a:t>
+            </a:r>
+            <a:endParaRPr lang="en-US" sz="1600" dirty="0"/>
+          </a:p>
+        </p:txBody>
+      </p:sp>
+      <p:sp>
+        <p:nvSpPr>
+          <p:cNvPr id="19" name="Text 14"/>
+          <p:cNvSpPr txBox="1"/>
+          <p:nvPr/>
+        </p:nvSpPr>
+        <p:spPr>
+          <a:xfrm>
+            <a:off x="4846320" y="3108960"/>
+            <a:ext cx="1508760" cy="868680"/>
+          </a:xfrm>
+          <a:prstGeom prst="rect">
+            <a:avLst/>
+          </a:prstGeom>
+          <a:noFill/>
+          <a:ln/>
+        </p:spPr>
+        <p:txBody>
+          <a:bodyPr wrap="square" lIns="0" tIns="0" rIns="0" bIns="0" rtlCol="0" anchor="t"/>
+          <a:lstStyle/>
+          <a:p>
+            <a:pPr indent="0" marL="0">
+              <a:buNone/>
+            </a:pPr>
+            <a:r>
+              <a:rPr lang="en-US" sz="1300" dirty="0">
+                <a:solidFill>
+                  <a:srgbClr val="2F3E4E"/>
+                </a:solidFill>
+                <a:latin typeface="Calibri" pitchFamily="34" charset="0"/>
+                <a:ea typeface="Calibri" pitchFamily="34" charset="-122"/>
+                <a:cs typeface="Calibri" pitchFamily="34" charset="-120"/>
+              </a:rPr>
+              <a:t>Módulo 5: 2, 4, 3, 1 y se repite.</a:t>
+            </a:r>
+            <a:endParaRPr lang="en-US" sz="1300" dirty="0"/>
+          </a:p>
+        </p:txBody>
+      </p:sp>
+      <p:sp>
+        <p:nvSpPr>
+          <p:cNvPr id="20" name="Shape 15"/>
+          <p:cNvSpPr/>
+          <p:nvPr/>
+        </p:nvSpPr>
+        <p:spPr>
+          <a:xfrm>
+            <a:off x="6720840" y="1645920"/>
+            <a:ext cx="1874520" cy="2377440"/>
+          </a:xfrm>
+          <a:prstGeom prst="roundRect">
+            <a:avLst>
+              <a:gd name="adj" fmla="val 5854"/>
+            </a:avLst>
+          </a:prstGeom>
+          <a:solidFill>
+            <a:srgbClr val="ECE8F6"/>
+          </a:solidFill>
+          <a:ln w="12700">
+            <a:solidFill>
+              <a:srgbClr val="ECE8F6"/>
+            </a:solidFill>
+            <a:prstDash val="solid"/>
+          </a:ln>
+        </p:spPr>
+      </p:sp>
+      <p:sp>
+        <p:nvSpPr>
+          <p:cNvPr id="21" name="Shape 16"/>
+          <p:cNvSpPr/>
+          <p:nvPr/>
+        </p:nvSpPr>
+        <p:spPr>
+          <a:xfrm>
+            <a:off x="6903720" y="1828800"/>
+            <a:ext cx="548640" cy="548640"/>
+          </a:xfrm>
+          <a:prstGeom prst="ellipse">
+            <a:avLst/>
+          </a:prstGeom>
+          <a:solidFill>
+            <a:srgbClr val="8E7FBF"/>
+          </a:solidFill>
+          <a:ln w="12700">
+            <a:solidFill>
+              <a:srgbClr val="8E7FBF"/>
+            </a:solidFill>
+            <a:prstDash val="solid"/>
+          </a:ln>
+        </p:spPr>
+      </p:sp>
+      <p:pic>
+        <p:nvPicPr>
+          <p:cNvPr id="22" name="Image 3" descr="preencoded.png">    </p:cNvPr>
+          <p:cNvPicPr>
+            <a:picLocks noChangeAspect="1"/>
+          </p:cNvPicPr>
+          <p:nvPr/>
+        </p:nvPicPr>
+        <p:blipFill>
+          <a:blip r:embed="rId4"/>
+          <a:stretch>
+            <a:fillRect/>
+          </a:stretch>
+        </p:blipFill>
+        <p:spPr>
+          <a:xfrm>
+            <a:off x="7051853" y="1976933"/>
+            <a:ext cx="252374" cy="252374"/>
+          </a:xfrm>
+          <a:prstGeom prst="rect">
+            <a:avLst/>
+          </a:prstGeom>
+        </p:spPr>
+      </p:pic>
+      <p:sp>
+        <p:nvSpPr>
+          <p:cNvPr id="23" name="Text 17"/>
+          <p:cNvSpPr txBox="1"/>
+          <p:nvPr/>
+        </p:nvSpPr>
+        <p:spPr>
+          <a:xfrm>
+            <a:off x="6903720" y="2514600"/>
+            <a:ext cx="1508760" cy="548640"/>
+          </a:xfrm>
+          <a:prstGeom prst="rect">
+            <a:avLst/>
+          </a:prstGeom>
+          <a:noFill/>
+          <a:ln/>
+        </p:spPr>
+        <p:txBody>
+          <a:bodyPr wrap="square" lIns="0" tIns="0" rIns="0" bIns="0" rtlCol="0" anchor="t"/>
+          <a:lstStyle/>
+          <a:p>
+            <a:pPr indent="0" marL="0">
+              <a:buNone/>
+            </a:pPr>
+            <a:r>
+              <a:rPr lang="en-US" sz="1600" b="1" dirty="0">
+                <a:solidFill>
+                  <a:srgbClr val="2F3E4E"/>
+                </a:solidFill>
+                <a:latin typeface="Calibri" pitchFamily="34" charset="0"/>
+                <a:ea typeface="Calibri" pitchFamily="34" charset="-122"/>
+                <a:cs typeface="Calibri" pitchFamily="34" charset="-120"/>
+              </a:rPr>
+              <a:t>Última cifra</a:t>
+            </a:r>
+            <a:endParaRPr lang="en-US" sz="1600" dirty="0"/>
+          </a:p>
+        </p:txBody>
+      </p:sp>
+      <p:sp>
+        <p:nvSpPr>
+          <p:cNvPr id="24" name="Text 18"/>
+          <p:cNvSpPr txBox="1"/>
+          <p:nvPr/>
+        </p:nvSpPr>
+        <p:spPr>
+          <a:xfrm>
+            <a:off x="6903720" y="3108960"/>
+            <a:ext cx="1508760" cy="868680"/>
+          </a:xfrm>
+          <a:prstGeom prst="rect">
+            <a:avLst/>
+          </a:prstGeom>
+          <a:noFill/>
+          <a:ln/>
+        </p:spPr>
+        <p:txBody>
+          <a:bodyPr wrap="square" lIns="0" tIns="0" rIns="0" bIns="0" rtlCol="0" anchor="t"/>
+          <a:lstStyle/>
+          <a:p>
+            <a:pPr indent="0" marL="0">
+              <a:buNone/>
+            </a:pPr>
+            <a:r>
+              <a:rPr lang="en-US" sz="1300" dirty="0">
+                <a:solidFill>
+                  <a:srgbClr val="2F3E4E"/>
+                </a:solidFill>
+                <a:latin typeface="Calibri" pitchFamily="34" charset="0"/>
+                <a:ea typeface="Calibri" pitchFamily="34" charset="-122"/>
+                <a:cs typeface="Calibri" pitchFamily="34" charset="-120"/>
+              </a:rPr>
+              <a:t>358 mod 10 = 8.</a:t>
+            </a:r>
+            <a:endParaRPr lang="en-US" sz="1300" dirty="0"/>
+          </a:p>
+        </p:txBody>
+      </p:sp>
+    </p:spTree>
+  </p:cSld>
+  <p:clrMapOvr>
+    <a:masterClrMapping/>
+  </p:clrMapOvr>
+</p:sld>
+</file>
+
+<file path=ppt/slides/slide18.xml><?xml version="1.0" encoding="utf-8"?>
+<p:sld xmlns:a="http://schemas.openxmlformats.org/drawingml/2006/main" xmlns:r="http://schemas.openxmlformats.org/officeDocument/2006/relationships" xmlns:p="http://schemas.openxmlformats.org/presentationml/2006/main">
+  <p:cSld name="Slide 18">
+    <p:bg>
+      <p:bgPr>
+        <a:solidFill>
+          <a:srgbClr val="FFFFFF"/>
+        </a:solidFill>
+      </p:bgPr>
+    </p:bg>
+    <p:spTree>
+      <p:nvGrpSpPr>
+        <p:cNvPr id="1" name=""/>
+        <p:cNvGrpSpPr/>
+        <p:nvPr/>
+      </p:nvGrpSpPr>
+      <p:grpSpPr>
+        <a:xfrm>
+          <a:off x="0" y="0"/>
+          <a:ext cx="0" cy="0"/>
+          <a:chOff x="0" y="0"/>
+          <a:chExt cx="0" cy="0"/>
+        </a:xfrm>
+      </p:grpSpPr>
+      <p:sp>
+        <p:nvSpPr>
+          <p:cNvPr id="2" name="Text 0"/>
+          <p:cNvSpPr txBox="1"/>
+          <p:nvPr/>
+        </p:nvSpPr>
+        <p:spPr>
+          <a:xfrm>
+            <a:off x="548640" y="320040"/>
+            <a:ext cx="8046720" cy="640080"/>
+          </a:xfrm>
+          <a:prstGeom prst="rect">
+            <a:avLst/>
+          </a:prstGeom>
+          <a:noFill/>
+          <a:ln/>
+        </p:spPr>
+        <p:txBody>
+          <a:bodyPr wrap="square" lIns="0" tIns="0" rIns="0" bIns="0" rtlCol="0" anchor="ctr"/>
+          <a:lstStyle/>
+          <a:p>
+            <a:pPr indent="0" marL="0">
+              <a:buNone/>
+            </a:pPr>
+            <a:r>
+              <a:rPr lang="en-US" sz="3000" b="1" dirty="0">
+                <a:solidFill>
+                  <a:srgbClr val="2F3E4E"/>
+                </a:solidFill>
+                <a:latin typeface="Cambria" pitchFamily="34" charset="0"/>
+                <a:ea typeface="Cambria" pitchFamily="34" charset="-122"/>
+                <a:cs typeface="Cambria" pitchFamily="34" charset="-120"/>
+              </a:rPr>
+              <a:t>Errores frecuentes: aritmética modular</a:t>
+            </a:r>
+            <a:endParaRPr lang="en-US" sz="3000" dirty="0"/>
+          </a:p>
+        </p:txBody>
+      </p:sp>
+      <p:sp>
+        <p:nvSpPr>
+          <p:cNvPr id="3" name="Text 1"/>
+          <p:cNvSpPr txBox="1"/>
+          <p:nvPr/>
+        </p:nvSpPr>
+        <p:spPr>
+          <a:xfrm>
+            <a:off x="548640" y="960120"/>
+            <a:ext cx="8046720" cy="365760"/>
+          </a:xfrm>
+          <a:prstGeom prst="rect">
+            <a:avLst/>
+          </a:prstGeom>
+          <a:noFill/>
+          <a:ln/>
+        </p:spPr>
+        <p:txBody>
+          <a:bodyPr wrap="square" lIns="0" tIns="0" rIns="0" bIns="0" rtlCol="0" anchor="ctr"/>
+          <a:lstStyle/>
+          <a:p>
+            <a:pPr indent="0" marL="0">
+              <a:buNone/>
+            </a:pPr>
+            <a:r>
+              <a:rPr lang="en-US" sz="1600" dirty="0">
+                <a:solidFill>
+                  <a:srgbClr val="5F6E80"/>
+                </a:solidFill>
+                <a:latin typeface="Calibri" pitchFamily="34" charset="0"/>
+                <a:ea typeface="Calibri" pitchFamily="34" charset="-122"/>
+                <a:cs typeface="Calibri" pitchFamily="34" charset="-120"/>
+              </a:rPr>
+              <a:t>Revísalos antes de la tarea</a:t>
+            </a:r>
+            <a:endParaRPr lang="en-US" sz="1600" dirty="0"/>
+          </a:p>
+        </p:txBody>
+      </p:sp>
+      <p:sp>
+        <p:nvSpPr>
+          <p:cNvPr id="4" name="Text 2"/>
+          <p:cNvSpPr txBox="1"/>
+          <p:nvPr/>
+        </p:nvSpPr>
+        <p:spPr>
+          <a:xfrm>
+            <a:off x="548640" y="4754880"/>
+            <a:ext cx="8046720" cy="228600"/>
+          </a:xfrm>
+          <a:prstGeom prst="rect">
+            <a:avLst/>
+          </a:prstGeom>
+          <a:noFill/>
+          <a:ln/>
+        </p:spPr>
+        <p:txBody>
+          <a:bodyPr wrap="square" lIns="0" tIns="0" rIns="0" bIns="0" rtlCol="0" anchor="ctr"/>
+          <a:lstStyle/>
+          <a:p>
+            <a:pPr indent="0" marL="0">
+              <a:buNone/>
+            </a:pPr>
+            <a:r>
+              <a:rPr lang="en-US" sz="1000" dirty="0">
+                <a:solidFill>
+                  <a:srgbClr val="8A98A8"/>
+                </a:solidFill>
+                <a:latin typeface="Calibri" pitchFamily="34" charset="0"/>
+                <a:ea typeface="Calibri" pitchFamily="34" charset="-122"/>
+                <a:cs typeface="Calibri" pitchFamily="34" charset="-120"/>
+              </a:rPr>
+              <a:t>Club de programación Competitiva - BugSquad 2026</a:t>
+            </a:r>
+            <a:endParaRPr lang="en-US" sz="1000" dirty="0"/>
+          </a:p>
+        </p:txBody>
+      </p:sp>
+      <p:sp>
+        <p:nvSpPr>
+          <p:cNvPr id="5" name="Text 3"/>
+          <p:cNvSpPr txBox="1"/>
+          <p:nvPr/>
+        </p:nvSpPr>
+        <p:spPr>
+          <a:xfrm>
+            <a:off x="548640" y="1645920"/>
+            <a:ext cx="8046720" cy="2377440"/>
+          </a:xfrm>
+          <a:prstGeom prst="rect">
+            <a:avLst/>
+          </a:prstGeom>
+          <a:noFill/>
+          <a:ln/>
+        </p:spPr>
+        <p:txBody>
+          <a:bodyPr wrap="square" lIns="0" tIns="0" rIns="0" bIns="0" rtlCol="0" anchor="t"/>
+          <a:lstStyle/>
+          <a:p>
+            <a:pPr marL="342900" indent="-342900">
+              <a:spcAft>
+                <a:spcPts val="600"/>
+              </a:spcAft>
+              <a:buSzPct val="100000"/>
+              <a:buChar char="•"/>
+            </a:pPr>
+            <a:r>
+              <a:rPr lang="en-US" sz="1800" dirty="0">
+                <a:solidFill>
+                  <a:srgbClr val="2F3E4E"/>
+                </a:solidFill>
+                <a:latin typeface="Calibri" pitchFamily="34" charset="0"/>
+                <a:ea typeface="Calibri" pitchFamily="34" charset="-122"/>
+                <a:cs typeface="Calibri" pitchFamily="34" charset="-120"/>
+              </a:rPr>
+              <a:t>a mod m devuelve el residuo, no el cociente ni un decimal.</a:t>
+            </a:r>
+            <a:endParaRPr lang="en-US" sz="1800" dirty="0"/>
+          </a:p>
+          <a:p>
+            <a:pPr marL="342900" indent="-342900">
+              <a:spcAft>
+                <a:spcPts val="600"/>
+              </a:spcAft>
+              <a:buSzPct val="100000"/>
+              <a:buChar char="•"/>
+            </a:pPr>
+            <a:r>
+              <a:rPr lang="en-US" sz="1800" dirty="0">
+                <a:solidFill>
+                  <a:srgbClr val="2F3E4E"/>
+                </a:solidFill>
+                <a:latin typeface="Calibri" pitchFamily="34" charset="0"/>
+                <a:ea typeface="Calibri" pitchFamily="34" charset="-122"/>
+                <a:cs typeface="Calibri" pitchFamily="34" charset="-120"/>
+              </a:rPr>
+              <a:t>El residuo nunca es igual o mayor que m.</a:t>
+            </a:r>
+            <a:endParaRPr lang="en-US" sz="1800" dirty="0"/>
+          </a:p>
+          <a:p>
+            <a:pPr marL="342900" indent="-342900">
+              <a:spcAft>
+                <a:spcPts val="600"/>
+              </a:spcAft>
+              <a:buSzPct val="100000"/>
+              <a:buChar char="•"/>
+            </a:pPr>
+            <a:r>
+              <a:rPr lang="en-US" sz="1800" dirty="0">
+                <a:solidFill>
+                  <a:srgbClr val="2F3E4E"/>
+                </a:solidFill>
+                <a:latin typeface="Calibri" pitchFamily="34" charset="0"/>
+                <a:ea typeface="Calibri" pitchFamily="34" charset="-122"/>
+                <a:cs typeface="Calibri" pitchFamily="34" charset="-120"/>
+              </a:rPr>
+              <a:t>La división no se aplica a las congruencias como si fuera una ecuación.</a:t>
+            </a:r>
+            <a:endParaRPr lang="en-US" sz="1800" dirty="0"/>
+          </a:p>
+        </p:txBody>
+      </p:sp>
+    </p:spTree>
+  </p:cSld>
+  <p:clrMapOvr>
+    <a:masterClrMapping/>
+  </p:clrMapOvr>
+</p:sld>
+</file>
+
+<file path=ppt/slides/slide19.xml><?xml version="1.0" encoding="utf-8"?>
+<p:sld xmlns:a="http://schemas.openxmlformats.org/drawingml/2006/main" xmlns:r="http://schemas.openxmlformats.org/officeDocument/2006/relationships" xmlns:p="http://schemas.openxmlformats.org/presentationml/2006/main">
+  <p:cSld name="Slide 19">
+    <p:bg>
+      <p:bgPr>
+        <a:solidFill>
+          <a:srgbClr val="FFFFFF"/>
+        </a:solidFill>
+      </p:bgPr>
+    </p:bg>
+    <p:spTree>
+      <p:nvGrpSpPr>
+        <p:cNvPr id="1" name=""/>
+        <p:cNvGrpSpPr/>
+        <p:nvPr/>
+      </p:nvGrpSpPr>
+      <p:grpSpPr>
+        <a:xfrm>
+          <a:off x="0" y="0"/>
+          <a:ext cx="0" cy="0"/>
+          <a:chOff x="0" y="0"/>
+          <a:chExt cx="0" cy="0"/>
+        </a:xfrm>
+      </p:grpSpPr>
+      <p:sp>
+        <p:nvSpPr>
+          <p:cNvPr id="2" name="Text 0"/>
+          <p:cNvSpPr txBox="1"/>
+          <p:nvPr/>
+        </p:nvSpPr>
+        <p:spPr>
+          <a:xfrm>
+            <a:off x="548640" y="320040"/>
+            <a:ext cx="8046720" cy="640080"/>
+          </a:xfrm>
+          <a:prstGeom prst="rect">
+            <a:avLst/>
+          </a:prstGeom>
+          <a:noFill/>
+          <a:ln/>
+        </p:spPr>
+        <p:txBody>
+          <a:bodyPr wrap="square" lIns="0" tIns="0" rIns="0" bIns="0" rtlCol="0" anchor="ctr"/>
+          <a:lstStyle/>
+          <a:p>
+            <a:pPr indent="0" marL="0">
+              <a:buNone/>
+            </a:pPr>
+            <a:r>
+              <a:rPr lang="en-US" sz="3000" b="1" dirty="0">
+                <a:solidFill>
+                  <a:srgbClr val="2F3E4E"/>
+                </a:solidFill>
+                <a:latin typeface="Cambria" pitchFamily="34" charset="0"/>
+                <a:ea typeface="Cambria" pitchFamily="34" charset="-122"/>
+                <a:cs typeface="Cambria" pitchFamily="34" charset="-120"/>
+              </a:rPr>
+              <a:t>Divisibilidad y primos</a:t>
+            </a:r>
+            <a:endParaRPr lang="en-US" sz="3000" dirty="0"/>
+          </a:p>
+        </p:txBody>
+      </p:sp>
+      <p:sp>
+        <p:nvSpPr>
+          <p:cNvPr id="3" name="Text 1"/>
+          <p:cNvSpPr txBox="1"/>
+          <p:nvPr/>
+        </p:nvSpPr>
+        <p:spPr>
+          <a:xfrm>
+            <a:off x="548640" y="960120"/>
+            <a:ext cx="8046720" cy="365760"/>
+          </a:xfrm>
+          <a:prstGeom prst="rect">
+            <a:avLst/>
+          </a:prstGeom>
+          <a:noFill/>
+          <a:ln/>
+        </p:spPr>
+        <p:txBody>
+          <a:bodyPr wrap="square" lIns="0" tIns="0" rIns="0" bIns="0" rtlCol="0" anchor="ctr"/>
+          <a:lstStyle/>
+          <a:p>
+            <a:pPr indent="0" marL="0">
+              <a:buNone/>
+            </a:pPr>
+            <a:r>
+              <a:rPr lang="en-US" sz="1600" dirty="0">
+                <a:solidFill>
+                  <a:srgbClr val="5F6E80"/>
+                </a:solidFill>
+                <a:latin typeface="Calibri" pitchFamily="34" charset="0"/>
+                <a:ea typeface="Calibri" pitchFamily="34" charset="-122"/>
+                <a:cs typeface="Calibri" pitchFamily="34" charset="-120"/>
+              </a:rPr>
+              <a:t>Ampliación del subtema 5</a:t>
+            </a:r>
+            <a:endParaRPr lang="en-US" sz="1600" dirty="0"/>
+          </a:p>
+        </p:txBody>
+      </p:sp>
+      <p:sp>
+        <p:nvSpPr>
+          <p:cNvPr id="4" name="Text 2"/>
+          <p:cNvSpPr txBox="1"/>
+          <p:nvPr/>
+        </p:nvSpPr>
+        <p:spPr>
+          <a:xfrm>
+            <a:off x="548640" y="4754880"/>
+            <a:ext cx="8046720" cy="228600"/>
+          </a:xfrm>
+          <a:prstGeom prst="rect">
+            <a:avLst/>
+          </a:prstGeom>
+          <a:noFill/>
+          <a:ln/>
+        </p:spPr>
+        <p:txBody>
+          <a:bodyPr wrap="square" lIns="0" tIns="0" rIns="0" bIns="0" rtlCol="0" anchor="ctr"/>
+          <a:lstStyle/>
+          <a:p>
+            <a:pPr indent="0" marL="0">
+              <a:buNone/>
+            </a:pPr>
+            <a:r>
+              <a:rPr lang="en-US" sz="1000" dirty="0">
+                <a:solidFill>
+                  <a:srgbClr val="8A98A8"/>
+                </a:solidFill>
+                <a:latin typeface="Calibri" pitchFamily="34" charset="0"/>
+                <a:ea typeface="Calibri" pitchFamily="34" charset="-122"/>
+                <a:cs typeface="Calibri" pitchFamily="34" charset="-120"/>
+              </a:rPr>
+              <a:t>Club de programación Competitiva - BugSquad 2026</a:t>
+            </a:r>
+            <a:endParaRPr lang="en-US" sz="1000" dirty="0"/>
+          </a:p>
+        </p:txBody>
+      </p:sp>
+      <p:sp>
+        <p:nvSpPr>
+          <p:cNvPr id="5" name="Shape 3"/>
+          <p:cNvSpPr/>
+          <p:nvPr/>
+        </p:nvSpPr>
+        <p:spPr>
+          <a:xfrm>
+            <a:off x="548640" y="1737360"/>
+            <a:ext cx="3840480" cy="1005840"/>
+          </a:xfrm>
+          <a:prstGeom prst="roundRect">
+            <a:avLst>
+              <a:gd name="adj" fmla="val 10909"/>
+            </a:avLst>
+          </a:prstGeom>
+          <a:solidFill>
+            <a:srgbClr val="DDE8F3"/>
+          </a:solidFill>
+          <a:ln w="12700">
+            <a:solidFill>
+              <a:srgbClr val="DDE8F3"/>
+            </a:solidFill>
+            <a:prstDash val="solid"/>
+          </a:ln>
+        </p:spPr>
+      </p:sp>
+      <p:sp>
+        <p:nvSpPr>
+          <p:cNvPr id="6" name="Text 4"/>
+          <p:cNvSpPr txBox="1"/>
+          <p:nvPr/>
+        </p:nvSpPr>
+        <p:spPr>
+          <a:xfrm>
+            <a:off x="548640" y="1737360"/>
+            <a:ext cx="3840480" cy="1005840"/>
+          </a:xfrm>
+          <a:prstGeom prst="rect">
+            <a:avLst/>
+          </a:prstGeom>
+          <a:noFill/>
+          <a:ln/>
+        </p:spPr>
+        <p:txBody>
+          <a:bodyPr wrap="square" lIns="0" tIns="0" rIns="0" bIns="0" rtlCol="0" anchor="ctr"/>
+          <a:lstStyle/>
+          <a:p>
+            <a:pPr algn="ctr" indent="0" marL="0">
+              <a:buNone/>
+            </a:pPr>
+            <a:r>
+              <a:rPr lang="en-US" sz="2200" b="1" dirty="0">
+                <a:solidFill>
+                  <a:srgbClr val="2F3E4E"/>
+                </a:solidFill>
+                <a:latin typeface="Calibri" pitchFamily="34" charset="0"/>
+                <a:ea typeface="Calibri" pitchFamily="34" charset="-122"/>
+                <a:cs typeface="Calibri" pitchFamily="34" charset="-120"/>
+              </a:rPr>
+              <a:t>a | b  si  b = k · a</a:t>
+            </a:r>
+            <a:endParaRPr lang="en-US" sz="2200" dirty="0"/>
+          </a:p>
+        </p:txBody>
+      </p:sp>
+      <p:sp>
+        <p:nvSpPr>
+          <p:cNvPr id="7" name="Shape 5"/>
+          <p:cNvSpPr/>
+          <p:nvPr/>
+        </p:nvSpPr>
+        <p:spPr>
+          <a:xfrm>
+            <a:off x="4754880" y="1737360"/>
+            <a:ext cx="3840480" cy="1005840"/>
+          </a:xfrm>
+          <a:prstGeom prst="roundRect">
+            <a:avLst>
+              <a:gd name="adj" fmla="val 10909"/>
+            </a:avLst>
+          </a:prstGeom>
+          <a:solidFill>
+            <a:srgbClr val="E1F0E7"/>
+          </a:solidFill>
+          <a:ln w="12700">
+            <a:solidFill>
+              <a:srgbClr val="E1F0E7"/>
+            </a:solidFill>
+            <a:prstDash val="solid"/>
+          </a:ln>
+        </p:spPr>
+      </p:sp>
+      <p:sp>
+        <p:nvSpPr>
+          <p:cNvPr id="8" name="Text 6"/>
+          <p:cNvSpPr txBox="1"/>
+          <p:nvPr/>
+        </p:nvSpPr>
+        <p:spPr>
+          <a:xfrm>
+            <a:off x="4754880" y="1737360"/>
+            <a:ext cx="3840480" cy="1005840"/>
+          </a:xfrm>
+          <a:prstGeom prst="rect">
+            <a:avLst/>
+          </a:prstGeom>
+          <a:noFill/>
+          <a:ln/>
+        </p:spPr>
+        <p:txBody>
+          <a:bodyPr wrap="square" lIns="0" tIns="0" rIns="0" bIns="0" rtlCol="0" anchor="ctr"/>
+          <a:lstStyle/>
+          <a:p>
+            <a:pPr algn="ctr" indent="0" marL="0">
+              <a:buNone/>
+            </a:pPr>
+            <a:r>
+              <a:rPr lang="en-US" sz="2200" b="1" dirty="0">
+                <a:solidFill>
+                  <a:srgbClr val="2F3E4E"/>
+                </a:solidFill>
+                <a:latin typeface="Calibri" pitchFamily="34" charset="0"/>
+                <a:ea typeface="Calibri" pitchFamily="34" charset="-122"/>
+                <a:cs typeface="Calibri" pitchFamily="34" charset="-120"/>
+              </a:rPr>
+              <a:t>360 = 2³ · 3² · 5</a:t>
+            </a:r>
+            <a:endParaRPr lang="en-US" sz="2200" dirty="0"/>
+          </a:p>
+        </p:txBody>
+      </p:sp>
+      <p:sp>
+        <p:nvSpPr>
+          <p:cNvPr id="9" name="Text 7"/>
+          <p:cNvSpPr txBox="1"/>
+          <p:nvPr/>
+        </p:nvSpPr>
+        <p:spPr>
+          <a:xfrm>
+            <a:off x="548640" y="3017520"/>
+            <a:ext cx="8046720" cy="1463040"/>
+          </a:xfrm>
+          <a:prstGeom prst="rect">
+            <a:avLst/>
+          </a:prstGeom>
+          <a:noFill/>
+          <a:ln/>
+        </p:spPr>
+        <p:txBody>
+          <a:bodyPr wrap="square" lIns="0" tIns="0" rIns="0" bIns="0" rtlCol="0" anchor="t"/>
+          <a:lstStyle/>
+          <a:p>
+            <a:pPr marL="342900" indent="-342900">
+              <a:spcAft>
+                <a:spcPts val="600"/>
+              </a:spcAft>
+              <a:buSzPct val="100000"/>
+              <a:buChar char="•"/>
+            </a:pPr>
+            <a:r>
+              <a:rPr lang="en-US" sz="1600" dirty="0">
+                <a:solidFill>
+                  <a:srgbClr val="2F3E4E"/>
+                </a:solidFill>
+                <a:latin typeface="Calibri" pitchFamily="34" charset="0"/>
+                <a:ea typeface="Calibri" pitchFamily="34" charset="-122"/>
+                <a:cs typeface="Calibri" pitchFamily="34" charset="-120"/>
+              </a:rPr>
+              <a:t>Ejemplo: 4 | 12, porque 12 = 3 · 4.</a:t>
+            </a:r>
+            <a:endParaRPr lang="en-US" sz="1600" dirty="0"/>
+          </a:p>
+          <a:p>
+            <a:pPr marL="342900" indent="-342900">
+              <a:spcAft>
+                <a:spcPts val="600"/>
+              </a:spcAft>
+              <a:buSzPct val="100000"/>
+              <a:buChar char="•"/>
+            </a:pPr>
+            <a:r>
+              <a:rPr lang="en-US" sz="1600" dirty="0">
+                <a:solidFill>
+                  <a:srgbClr val="2F3E4E"/>
+                </a:solidFill>
+                <a:latin typeface="Calibri" pitchFamily="34" charset="0"/>
+                <a:ea typeface="Calibri" pitchFamily="34" charset="-122"/>
+                <a:cs typeface="Calibri" pitchFamily="34" charset="-120"/>
+              </a:rPr>
+              <a:t>Un primo solo tiene dos divisores positivos: 1 y él mismo.</a:t>
+            </a:r>
+            <a:endParaRPr lang="en-US" sz="1600" dirty="0"/>
+          </a:p>
+          <a:p>
+            <a:pPr marL="342900" indent="-342900">
+              <a:spcAft>
+                <a:spcPts val="600"/>
+              </a:spcAft>
+              <a:buSzPct val="100000"/>
+              <a:buChar char="•"/>
+            </a:pPr>
+            <a:r>
+              <a:rPr lang="en-US" sz="1600" dirty="0">
+                <a:solidFill>
+                  <a:srgbClr val="2F3E4E"/>
+                </a:solidFill>
+                <a:latin typeface="Calibri" pitchFamily="34" charset="0"/>
+                <a:ea typeface="Calibri" pitchFamily="34" charset="-122"/>
+                <a:cs typeface="Calibri" pitchFamily="34" charset="-120"/>
+              </a:rPr>
+              <a:t>Para factorizar, divide entre primos en orden (2, 3, 5, 7…) hasta llegar a 1.</a:t>
+            </a:r>
+            <a:endParaRPr lang="en-US" sz="1600" dirty="0"/>
+          </a:p>
+        </p:txBody>
+      </p:sp>
+    </p:spTree>
+  </p:cSld>
+  <p:clrMapOvr>
+    <a:masterClrMapping/>
+  </p:clrMapOvr>
+</p:sld>
+</file>
+
+<file path=ppt/slides/slide2.xml><?xml version="1.0" encoding="utf-8"?>
+<p:sld xmlns:a="http://schemas.openxmlformats.org/drawingml/2006/main" xmlns:r="http://schemas.openxmlformats.org/officeDocument/2006/relationships" xmlns:p="http://schemas.openxmlformats.org/presentationml/2006/main">
+  <p:cSld name="Slide 2">
+    <p:bg>
+      <p:bgPr>
+        <a:solidFill>
+          <a:srgbClr val="FFFFFF"/>
+        </a:solidFill>
+      </p:bgPr>
+    </p:bg>
+    <p:spTree>
+      <p:nvGrpSpPr>
+        <p:cNvPr id="1" name=""/>
+        <p:cNvGrpSpPr/>
+        <p:nvPr/>
+      </p:nvGrpSpPr>
+      <p:grpSpPr>
+        <a:xfrm>
+          <a:off x="0" y="0"/>
+          <a:ext cx="0" cy="0"/>
+          <a:chOff x="0" y="0"/>
+          <a:chExt cx="0" cy="0"/>
+        </a:xfrm>
+      </p:grpSpPr>
+      <p:sp>
+        <p:nvSpPr>
+          <p:cNvPr id="2" name="Text 0"/>
+          <p:cNvSpPr txBox="1"/>
+          <p:nvPr/>
+        </p:nvSpPr>
+        <p:spPr>
+          <a:xfrm>
+            <a:off x="548640" y="320040"/>
+            <a:ext cx="8046720" cy="640080"/>
+          </a:xfrm>
+          <a:prstGeom prst="rect">
+            <a:avLst/>
+          </a:prstGeom>
+          <a:noFill/>
+          <a:ln/>
+        </p:spPr>
+        <p:txBody>
+          <a:bodyPr wrap="square" lIns="0" tIns="0" rIns="0" bIns="0" rtlCol="0" anchor="ctr"/>
+          <a:lstStyle/>
+          <a:p>
+            <a:pPr indent="0" marL="0">
+              <a:buNone/>
+            </a:pPr>
+            <a:r>
+              <a:rPr lang="en-US" sz="3000" b="1" dirty="0">
+                <a:solidFill>
+                  <a:srgbClr val="2F3E4E"/>
+                </a:solidFill>
+                <a:latin typeface="Cambria" pitchFamily="34" charset="0"/>
+                <a:ea typeface="Cambria" pitchFamily="34" charset="-122"/>
+                <a:cs typeface="Cambria" pitchFamily="34" charset="-120"/>
+              </a:rPr>
+              <a:t>Modelar con números enteros</a:t>
+            </a:r>
+            <a:endParaRPr lang="en-US" sz="3000" dirty="0"/>
+          </a:p>
+        </p:txBody>
+      </p:sp>
+      <p:sp>
+        <p:nvSpPr>
+          <p:cNvPr id="3" name="Text 1"/>
+          <p:cNvSpPr txBox="1"/>
+          <p:nvPr/>
+        </p:nvSpPr>
+        <p:spPr>
+          <a:xfrm>
+            <a:off x="548640" y="960120"/>
+            <a:ext cx="8046720" cy="365760"/>
+          </a:xfrm>
+          <a:prstGeom prst="rect">
+            <a:avLst/>
+          </a:prstGeom>
+          <a:noFill/>
+          <a:ln/>
+        </p:spPr>
+        <p:txBody>
+          <a:bodyPr wrap="square" lIns="0" tIns="0" rIns="0" bIns="0" rtlCol="0" anchor="ctr"/>
+          <a:lstStyle/>
+          <a:p>
+            <a:pPr indent="0" marL="0">
+              <a:buNone/>
+            </a:pPr>
+            <a:r>
+              <a:rPr lang="en-US" sz="1600" dirty="0">
+                <a:solidFill>
+                  <a:srgbClr val="5F6E80"/>
+                </a:solidFill>
+                <a:latin typeface="Calibri" pitchFamily="34" charset="0"/>
+                <a:ea typeface="Calibri" pitchFamily="34" charset="-122"/>
+                <a:cs typeface="Calibri" pitchFamily="34" charset="-120"/>
+              </a:rPr>
+              <a:t>Aritmética elemental, conteo ordenado y análisis por casos</a:t>
+            </a:r>
+            <a:endParaRPr lang="en-US" sz="1600" dirty="0"/>
+          </a:p>
+        </p:txBody>
+      </p:sp>
+      <p:sp>
+        <p:nvSpPr>
+          <p:cNvPr id="4" name="Text 2"/>
+          <p:cNvSpPr txBox="1"/>
+          <p:nvPr/>
+        </p:nvSpPr>
+        <p:spPr>
+          <a:xfrm>
+            <a:off x="548640" y="4754880"/>
+            <a:ext cx="8046720" cy="228600"/>
+          </a:xfrm>
+          <a:prstGeom prst="rect">
+            <a:avLst/>
+          </a:prstGeom>
+          <a:noFill/>
+          <a:ln/>
+        </p:spPr>
+        <p:txBody>
+          <a:bodyPr wrap="square" lIns="0" tIns="0" rIns="0" bIns="0" rtlCol="0" anchor="ctr"/>
+          <a:lstStyle/>
+          <a:p>
+            <a:pPr indent="0" marL="0">
+              <a:buNone/>
+            </a:pPr>
+            <a:r>
+              <a:rPr lang="en-US" sz="1000" dirty="0">
+                <a:solidFill>
+                  <a:srgbClr val="8A98A8"/>
+                </a:solidFill>
+                <a:latin typeface="Calibri" pitchFamily="34" charset="0"/>
+                <a:ea typeface="Calibri" pitchFamily="34" charset="-122"/>
+                <a:cs typeface="Calibri" pitchFamily="34" charset="-120"/>
+              </a:rPr>
+              <a:t>Club de programación Competitiva - BugSquad 2026</a:t>
+            </a:r>
+            <a:endParaRPr lang="en-US" sz="1000" dirty="0"/>
+          </a:p>
+        </p:txBody>
+      </p:sp>
+      <p:sp>
+        <p:nvSpPr>
+          <p:cNvPr id="5" name="Shape 3"/>
+          <p:cNvSpPr/>
+          <p:nvPr/>
+        </p:nvSpPr>
+        <p:spPr>
+          <a:xfrm>
+            <a:off x="548640" y="1645920"/>
+            <a:ext cx="1874520" cy="2377440"/>
+          </a:xfrm>
+          <a:prstGeom prst="roundRect">
+            <a:avLst>
+              <a:gd name="adj" fmla="val 5854"/>
+            </a:avLst>
+          </a:prstGeom>
+          <a:solidFill>
+            <a:srgbClr val="DDE8F3"/>
+          </a:solidFill>
+          <a:ln w="12700">
+            <a:solidFill>
+              <a:srgbClr val="DDE8F3"/>
+            </a:solidFill>
+            <a:prstDash val="solid"/>
+          </a:ln>
+        </p:spPr>
+      </p:sp>
+      <p:sp>
+        <p:nvSpPr>
+          <p:cNvPr id="6" name="Shape 4"/>
+          <p:cNvSpPr/>
+          <p:nvPr/>
+        </p:nvSpPr>
+        <p:spPr>
+          <a:xfrm>
+            <a:off x="731520" y="1828800"/>
+            <a:ext cx="548640" cy="548640"/>
+          </a:xfrm>
+          <a:prstGeom prst="ellipse">
+            <a:avLst/>
+          </a:prstGeom>
+          <a:solidFill>
+            <a:srgbClr val="4F7CAC"/>
+          </a:solidFill>
+          <a:ln w="12700">
+            <a:solidFill>
+              <a:srgbClr val="4F7CAC"/>
+            </a:solidFill>
+            <a:prstDash val="solid"/>
+          </a:ln>
+        </p:spPr>
+      </p:sp>
+      <p:pic>
+        <p:nvPicPr>
+          <p:cNvPr id="7" name="Image 0" descr="preencoded.png">    </p:cNvPr>
+          <p:cNvPicPr>
+            <a:picLocks noChangeAspect="1"/>
+          </p:cNvPicPr>
+          <p:nvPr/>
+        </p:nvPicPr>
+        <p:blipFill>
+          <a:blip r:embed="rId1"/>
+          <a:stretch>
+            <a:fillRect/>
+          </a:stretch>
+        </p:blipFill>
+        <p:spPr>
+          <a:xfrm>
+            <a:off x="879653" y="1976933"/>
+            <a:ext cx="252374" cy="252374"/>
+          </a:xfrm>
+          <a:prstGeom prst="rect">
+            <a:avLst/>
+          </a:prstGeom>
+        </p:spPr>
+      </p:pic>
+      <p:sp>
+        <p:nvSpPr>
+          <p:cNvPr id="8" name="Text 5"/>
+          <p:cNvSpPr txBox="1"/>
+          <p:nvPr/>
+        </p:nvSpPr>
+        <p:spPr>
+          <a:xfrm>
+            <a:off x="731520" y="2514600"/>
+            <a:ext cx="1508760" cy="548640"/>
+          </a:xfrm>
+          <a:prstGeom prst="rect">
+            <a:avLst/>
+          </a:prstGeom>
+          <a:noFill/>
+          <a:ln/>
+        </p:spPr>
+        <p:txBody>
+          <a:bodyPr wrap="square" lIns="0" tIns="0" rIns="0" bIns="0" rtlCol="0" anchor="t"/>
+          <a:lstStyle/>
+          <a:p>
+            <a:pPr indent="0" marL="0">
+              <a:buNone/>
+            </a:pPr>
+            <a:r>
+              <a:rPr lang="en-US" sz="1600" b="1" dirty="0">
+                <a:solidFill>
+                  <a:srgbClr val="2F3E4E"/>
+                </a:solidFill>
+                <a:latin typeface="Calibri" pitchFamily="34" charset="0"/>
+                <a:ea typeface="Calibri" pitchFamily="34" charset="-122"/>
+                <a:cs typeface="Calibri" pitchFamily="34" charset="-120"/>
+              </a:rPr>
+              <a:t>Paridad</a:t>
+            </a:r>
+            <a:endParaRPr lang="en-US" sz="1600" dirty="0"/>
+          </a:p>
+        </p:txBody>
+      </p:sp>
+      <p:sp>
+        <p:nvSpPr>
+          <p:cNvPr id="9" name="Text 6"/>
+          <p:cNvSpPr txBox="1"/>
+          <p:nvPr/>
+        </p:nvSpPr>
+        <p:spPr>
+          <a:xfrm>
+            <a:off x="731520" y="3108960"/>
+            <a:ext cx="1508760" cy="868680"/>
+          </a:xfrm>
+          <a:prstGeom prst="rect">
+            <a:avLst/>
+          </a:prstGeom>
+          <a:noFill/>
+          <a:ln/>
+        </p:spPr>
+        <p:txBody>
+          <a:bodyPr wrap="square" lIns="0" tIns="0" rIns="0" bIns="0" rtlCol="0" anchor="t"/>
+          <a:lstStyle/>
+          <a:p>
+            <a:pPr indent="0" marL="0">
+              <a:buNone/>
+            </a:pPr>
+            <a:r>
+              <a:rPr lang="en-US" sz="1300" dirty="0">
+                <a:solidFill>
+                  <a:srgbClr val="2F3E4E"/>
+                </a:solidFill>
+                <a:latin typeface="Calibri" pitchFamily="34" charset="0"/>
+                <a:ea typeface="Calibri" pitchFamily="34" charset="-122"/>
+                <a:cs typeface="Calibri" pitchFamily="34" charset="-120"/>
+              </a:rPr>
+              <a:t>Pares e impares, divisibilidad e invariantes.</a:t>
+            </a:r>
+            <a:endParaRPr lang="en-US" sz="1300" dirty="0"/>
+          </a:p>
+        </p:txBody>
+      </p:sp>
+      <p:sp>
+        <p:nvSpPr>
+          <p:cNvPr id="10" name="Shape 7"/>
+          <p:cNvSpPr/>
+          <p:nvPr/>
+        </p:nvSpPr>
+        <p:spPr>
+          <a:xfrm>
+            <a:off x="2606040" y="1645920"/>
+            <a:ext cx="1874520" cy="2377440"/>
+          </a:xfrm>
+          <a:prstGeom prst="roundRect">
+            <a:avLst>
+              <a:gd name="adj" fmla="val 5854"/>
+            </a:avLst>
+          </a:prstGeom>
+          <a:solidFill>
+            <a:srgbClr val="E1F0E7"/>
+          </a:solidFill>
+          <a:ln w="12700">
+            <a:solidFill>
+              <a:srgbClr val="E1F0E7"/>
+            </a:solidFill>
+            <a:prstDash val="solid"/>
+          </a:ln>
+        </p:spPr>
+      </p:sp>
+      <p:sp>
+        <p:nvSpPr>
+          <p:cNvPr id="11" name="Shape 8"/>
+          <p:cNvSpPr/>
+          <p:nvPr/>
+        </p:nvSpPr>
+        <p:spPr>
+          <a:xfrm>
+            <a:off x="2788920" y="1828800"/>
+            <a:ext cx="548640" cy="548640"/>
+          </a:xfrm>
+          <a:prstGeom prst="ellipse">
+            <a:avLst/>
+          </a:prstGeom>
+          <a:solidFill>
+            <a:srgbClr val="6FA287"/>
+          </a:solidFill>
+          <a:ln w="12700">
+            <a:solidFill>
+              <a:srgbClr val="6FA287"/>
+            </a:solidFill>
+            <a:prstDash val="solid"/>
+          </a:ln>
+        </p:spPr>
+      </p:sp>
+      <p:pic>
+        <p:nvPicPr>
+          <p:cNvPr id="12" name="Image 1" descr="preencoded.png">    </p:cNvPr>
+          <p:cNvPicPr>
+            <a:picLocks noChangeAspect="1"/>
+          </p:cNvPicPr>
+          <p:nvPr/>
+        </p:nvPicPr>
+        <p:blipFill>
+          <a:blip r:embed="rId2"/>
+          <a:stretch>
+            <a:fillRect/>
+          </a:stretch>
+        </p:blipFill>
+        <p:spPr>
+          <a:xfrm>
+            <a:off x="2937053" y="1976933"/>
+            <a:ext cx="252374" cy="252374"/>
+          </a:xfrm>
+          <a:prstGeom prst="rect">
+            <a:avLst/>
+          </a:prstGeom>
+        </p:spPr>
+      </p:pic>
+      <p:sp>
+        <p:nvSpPr>
+          <p:cNvPr id="13" name="Text 9"/>
+          <p:cNvSpPr txBox="1"/>
+          <p:nvPr/>
+        </p:nvSpPr>
+        <p:spPr>
+          <a:xfrm>
+            <a:off x="2788920" y="2514600"/>
+            <a:ext cx="1508760" cy="548640"/>
+          </a:xfrm>
+          <a:prstGeom prst="rect">
+            <a:avLst/>
+          </a:prstGeom>
+          <a:noFill/>
+          <a:ln/>
+        </p:spPr>
+        <p:txBody>
+          <a:bodyPr wrap="square" lIns="0" tIns="0" rIns="0" bIns="0" rtlCol="0" anchor="t"/>
+          <a:lstStyle/>
+          <a:p>
+            <a:pPr indent="0" marL="0">
+              <a:buNone/>
+            </a:pPr>
+            <a:r>
+              <a:rPr lang="en-US" sz="1600" b="1" dirty="0">
+                <a:solidFill>
+                  <a:srgbClr val="2F3E4E"/>
+                </a:solidFill>
+                <a:latin typeface="Calibri" pitchFamily="34" charset="0"/>
+                <a:ea typeface="Calibri" pitchFamily="34" charset="-122"/>
+                <a:cs typeface="Calibri" pitchFamily="34" charset="-120"/>
+              </a:rPr>
+              <a:t>Aritmética</a:t>
+            </a:r>
+            <a:endParaRPr lang="en-US" sz="1600" dirty="0"/>
+          </a:p>
+        </p:txBody>
+      </p:sp>
+      <p:sp>
+        <p:nvSpPr>
+          <p:cNvPr id="14" name="Text 10"/>
+          <p:cNvSpPr txBox="1"/>
+          <p:nvPr/>
+        </p:nvSpPr>
+        <p:spPr>
+          <a:xfrm>
+            <a:off x="2788920" y="3108960"/>
+            <a:ext cx="1508760" cy="868680"/>
+          </a:xfrm>
+          <a:prstGeom prst="rect">
+            <a:avLst/>
+          </a:prstGeom>
+          <a:noFill/>
+          <a:ln/>
+        </p:spPr>
+        <p:txBody>
+          <a:bodyPr wrap="square" lIns="0" tIns="0" rIns="0" bIns="0" rtlCol="0" anchor="t"/>
+          <a:lstStyle/>
+          <a:p>
+            <a:pPr indent="0" marL="0">
+              <a:buNone/>
+            </a:pPr>
+            <a:r>
+              <a:rPr lang="en-US" sz="1300" dirty="0">
+                <a:solidFill>
+                  <a:srgbClr val="2F3E4E"/>
+                </a:solidFill>
+                <a:latin typeface="Calibri" pitchFamily="34" charset="0"/>
+                <a:ea typeface="Calibri" pitchFamily="34" charset="-122"/>
+                <a:cs typeface="Calibri" pitchFamily="34" charset="-120"/>
+              </a:rPr>
+              <a:t>División con residuo, piso y techo.</a:t>
+            </a:r>
+            <a:endParaRPr lang="en-US" sz="1300" dirty="0"/>
+          </a:p>
+        </p:txBody>
+      </p:sp>
+      <p:sp>
+        <p:nvSpPr>
+          <p:cNvPr id="15" name="Shape 11"/>
+          <p:cNvSpPr/>
+          <p:nvPr/>
+        </p:nvSpPr>
+        <p:spPr>
+          <a:xfrm>
+            <a:off x="4663440" y="1645920"/>
+            <a:ext cx="1874520" cy="2377440"/>
+          </a:xfrm>
+          <a:prstGeom prst="roundRect">
+            <a:avLst>
+              <a:gd name="adj" fmla="val 5854"/>
+            </a:avLst>
+          </a:prstGeom>
+          <a:solidFill>
+            <a:srgbClr val="FBEADC"/>
+          </a:solidFill>
+          <a:ln w="12700">
+            <a:solidFill>
+              <a:srgbClr val="FBEADC"/>
+            </a:solidFill>
+            <a:prstDash val="solid"/>
+          </a:ln>
+        </p:spPr>
+      </p:sp>
+      <p:sp>
+        <p:nvSpPr>
+          <p:cNvPr id="16" name="Shape 12"/>
+          <p:cNvSpPr/>
+          <p:nvPr/>
+        </p:nvSpPr>
+        <p:spPr>
+          <a:xfrm>
+            <a:off x="4846320" y="1828800"/>
+            <a:ext cx="548640" cy="548640"/>
+          </a:xfrm>
+          <a:prstGeom prst="ellipse">
+            <a:avLst/>
+          </a:prstGeom>
+          <a:solidFill>
+            <a:srgbClr val="E39B6B"/>
+          </a:solidFill>
+          <a:ln w="12700">
+            <a:solidFill>
+              <a:srgbClr val="E39B6B"/>
+            </a:solidFill>
+            <a:prstDash val="solid"/>
+          </a:ln>
+        </p:spPr>
+      </p:sp>
+      <p:pic>
+        <p:nvPicPr>
+          <p:cNvPr id="17" name="Image 2" descr="preencoded.png">    </p:cNvPr>
+          <p:cNvPicPr>
+            <a:picLocks noChangeAspect="1"/>
+          </p:cNvPicPr>
+          <p:nvPr/>
+        </p:nvPicPr>
+        <p:blipFill>
+          <a:blip r:embed="rId3"/>
+          <a:stretch>
+            <a:fillRect/>
+          </a:stretch>
+        </p:blipFill>
+        <p:spPr>
+          <a:xfrm>
+            <a:off x="4994453" y="1976933"/>
+            <a:ext cx="252374" cy="252374"/>
+          </a:xfrm>
+          <a:prstGeom prst="rect">
+            <a:avLst/>
+          </a:prstGeom>
+        </p:spPr>
+      </p:pic>
+      <p:sp>
+        <p:nvSpPr>
+          <p:cNvPr id="18" name="Text 13"/>
+          <p:cNvSpPr txBox="1"/>
+          <p:nvPr/>
+        </p:nvSpPr>
+        <p:spPr>
+          <a:xfrm>
+            <a:off x="4846320" y="2514600"/>
+            <a:ext cx="1508760" cy="548640"/>
+          </a:xfrm>
+          <a:prstGeom prst="rect">
+            <a:avLst/>
+          </a:prstGeom>
+          <a:noFill/>
+          <a:ln/>
+        </p:spPr>
+        <p:txBody>
+          <a:bodyPr wrap="square" lIns="0" tIns="0" rIns="0" bIns="0" rtlCol="0" anchor="t"/>
+          <a:lstStyle/>
+          <a:p>
+            <a:pPr indent="0" marL="0">
+              <a:buNone/>
+            </a:pPr>
+            <a:r>
+              <a:rPr lang="en-US" sz="1600" b="1" dirty="0">
+                <a:solidFill>
+                  <a:srgbClr val="2F3E4E"/>
+                </a:solidFill>
+                <a:latin typeface="Calibri" pitchFamily="34" charset="0"/>
+                <a:ea typeface="Calibri" pitchFamily="34" charset="-122"/>
+                <a:cs typeface="Calibri" pitchFamily="34" charset="-120"/>
+              </a:rPr>
+              <a:t>Conteo</a:t>
+            </a:r>
+            <a:endParaRPr lang="en-US" sz="1600" dirty="0"/>
+          </a:p>
+        </p:txBody>
+      </p:sp>
+      <p:sp>
+        <p:nvSpPr>
+          <p:cNvPr id="19" name="Text 14"/>
+          <p:cNvSpPr txBox="1"/>
+          <p:nvPr/>
+        </p:nvSpPr>
+        <p:spPr>
+          <a:xfrm>
+            <a:off x="4846320" y="3108960"/>
+            <a:ext cx="1508760" cy="868680"/>
+          </a:xfrm>
+          <a:prstGeom prst="rect">
+            <a:avLst/>
+          </a:prstGeom>
+          <a:noFill/>
+          <a:ln/>
+        </p:spPr>
+        <p:txBody>
+          <a:bodyPr wrap="square" lIns="0" tIns="0" rIns="0" bIns="0" rtlCol="0" anchor="t"/>
+          <a:lstStyle/>
+          <a:p>
+            <a:pPr indent="0" marL="0">
+              <a:buNone/>
+            </a:pPr>
+            <a:r>
+              <a:rPr lang="en-US" sz="1300" dirty="0">
+                <a:solidFill>
+                  <a:srgbClr val="2F3E4E"/>
+                </a:solidFill>
+                <a:latin typeface="Calibri" pitchFamily="34" charset="0"/>
+                <a:ea typeface="Calibri" pitchFamily="34" charset="-122"/>
+                <a:cs typeface="Calibri" pitchFamily="34" charset="-120"/>
+              </a:rPr>
+              <a:t>Suma, producto y fórmulas cerradas.</a:t>
+            </a:r>
+            <a:endParaRPr lang="en-US" sz="1300" dirty="0"/>
+          </a:p>
+        </p:txBody>
+      </p:sp>
+      <p:sp>
+        <p:nvSpPr>
+          <p:cNvPr id="20" name="Shape 15"/>
+          <p:cNvSpPr/>
+          <p:nvPr/>
+        </p:nvSpPr>
+        <p:spPr>
+          <a:xfrm>
+            <a:off x="6720840" y="1645920"/>
+            <a:ext cx="1874520" cy="2377440"/>
+          </a:xfrm>
+          <a:prstGeom prst="roundRect">
+            <a:avLst>
+              <a:gd name="adj" fmla="val 5854"/>
+            </a:avLst>
+          </a:prstGeom>
+          <a:solidFill>
+            <a:srgbClr val="ECE8F6"/>
+          </a:solidFill>
+          <a:ln w="12700">
+            <a:solidFill>
+              <a:srgbClr val="ECE8F6"/>
+            </a:solidFill>
+            <a:prstDash val="solid"/>
+          </a:ln>
+        </p:spPr>
+      </p:sp>
+      <p:sp>
+        <p:nvSpPr>
+          <p:cNvPr id="21" name="Shape 16"/>
+          <p:cNvSpPr/>
+          <p:nvPr/>
+        </p:nvSpPr>
+        <p:spPr>
+          <a:xfrm>
+            <a:off x="6903720" y="1828800"/>
+            <a:ext cx="548640" cy="548640"/>
+          </a:xfrm>
+          <a:prstGeom prst="ellipse">
+            <a:avLst/>
+          </a:prstGeom>
+          <a:solidFill>
+            <a:srgbClr val="8E7FBF"/>
+          </a:solidFill>
+          <a:ln w="12700">
+            <a:solidFill>
+              <a:srgbClr val="8E7FBF"/>
+            </a:solidFill>
+            <a:prstDash val="solid"/>
+          </a:ln>
+        </p:spPr>
+      </p:sp>
+      <p:pic>
+        <p:nvPicPr>
+          <p:cNvPr id="22" name="Image 3" descr="preencoded.png">    </p:cNvPr>
+          <p:cNvPicPr>
+            <a:picLocks noChangeAspect="1"/>
+          </p:cNvPicPr>
+          <p:nvPr/>
+        </p:nvPicPr>
+        <p:blipFill>
+          <a:blip r:embed="rId4"/>
+          <a:stretch>
+            <a:fillRect/>
+          </a:stretch>
+        </p:blipFill>
+        <p:spPr>
+          <a:xfrm>
+            <a:off x="7051853" y="1976933"/>
+            <a:ext cx="252374" cy="252374"/>
+          </a:xfrm>
+          <a:prstGeom prst="rect">
+            <a:avLst/>
+          </a:prstGeom>
+        </p:spPr>
+      </p:pic>
+      <p:sp>
+        <p:nvSpPr>
+          <p:cNvPr id="23" name="Text 17"/>
+          <p:cNvSpPr txBox="1"/>
+          <p:nvPr/>
+        </p:nvSpPr>
+        <p:spPr>
+          <a:xfrm>
+            <a:off x="6903720" y="2514600"/>
+            <a:ext cx="1508760" cy="548640"/>
+          </a:xfrm>
+          <a:prstGeom prst="rect">
+            <a:avLst/>
+          </a:prstGeom>
+          <a:noFill/>
+          <a:ln/>
+        </p:spPr>
+        <p:txBody>
+          <a:bodyPr wrap="square" lIns="0" tIns="0" rIns="0" bIns="0" rtlCol="0" anchor="t"/>
+          <a:lstStyle/>
+          <a:p>
+            <a:pPr indent="0" marL="0">
+              <a:buNone/>
+            </a:pPr>
+            <a:r>
+              <a:rPr lang="en-US" sz="1600" b="1" dirty="0">
+                <a:solidFill>
+                  <a:srgbClr val="2F3E4E"/>
+                </a:solidFill>
+                <a:latin typeface="Calibri" pitchFamily="34" charset="0"/>
+                <a:ea typeface="Calibri" pitchFamily="34" charset="-122"/>
+                <a:cs typeface="Calibri" pitchFamily="34" charset="-120"/>
+              </a:rPr>
+              <a:t>Casos</a:t>
+            </a:r>
+            <a:endParaRPr lang="en-US" sz="1600" dirty="0"/>
+          </a:p>
+        </p:txBody>
+      </p:sp>
+      <p:sp>
+        <p:nvSpPr>
+          <p:cNvPr id="24" name="Text 18"/>
+          <p:cNvSpPr txBox="1"/>
+          <p:nvPr/>
+        </p:nvSpPr>
+        <p:spPr>
+          <a:xfrm>
+            <a:off x="6903720" y="3108960"/>
+            <a:ext cx="1508760" cy="868680"/>
+          </a:xfrm>
+          <a:prstGeom prst="rect">
+            <a:avLst/>
+          </a:prstGeom>
+          <a:noFill/>
+          <a:ln/>
+        </p:spPr>
+        <p:txBody>
+          <a:bodyPr wrap="square" lIns="0" tIns="0" rIns="0" bIns="0" rtlCol="0" anchor="t"/>
+          <a:lstStyle/>
+          <a:p>
+            <a:pPr indent="0" marL="0">
+              <a:buNone/>
+            </a:pPr>
+            <a:r>
+              <a:rPr lang="en-US" sz="1300" dirty="0">
+                <a:solidFill>
+                  <a:srgbClr val="2F3E4E"/>
+                </a:solidFill>
+                <a:latin typeface="Calibri" pitchFamily="34" charset="0"/>
+                <a:ea typeface="Calibri" pitchFamily="34" charset="-122"/>
+                <a:cs typeface="Calibri" pitchFamily="34" charset="-120"/>
+              </a:rPr>
+              <a:t>Inclusión-exclusión y simulación en papel.</a:t>
+            </a:r>
+            <a:endParaRPr lang="en-US" sz="1300" dirty="0"/>
+          </a:p>
+        </p:txBody>
+      </p:sp>
+    </p:spTree>
+  </p:cSld>
+  <p:clrMapOvr>
+    <a:masterClrMapping/>
+  </p:clrMapOvr>
+</p:sld>
+</file>
+
+<file path=ppt/slides/slide20.xml><?xml version="1.0" encoding="utf-8"?>
+<p:sld xmlns:a="http://schemas.openxmlformats.org/drawingml/2006/main" xmlns:r="http://schemas.openxmlformats.org/officeDocument/2006/relationships" xmlns:p="http://schemas.openxmlformats.org/presentationml/2006/main">
+  <p:cSld name="Slide 20">
+    <p:bg>
+      <p:bgPr>
+        <a:solidFill>
+          <a:srgbClr val="FFFFFF"/>
+        </a:solidFill>
+      </p:bgPr>
+    </p:bg>
+    <p:spTree>
+      <p:nvGrpSpPr>
+        <p:cNvPr id="1" name=""/>
+        <p:cNvGrpSpPr/>
+        <p:nvPr/>
+      </p:nvGrpSpPr>
+      <p:grpSpPr>
+        <a:xfrm>
+          <a:off x="0" y="0"/>
+          <a:ext cx="0" cy="0"/>
+          <a:chOff x="0" y="0"/>
+          <a:chExt cx="0" cy="0"/>
+        </a:xfrm>
+      </p:grpSpPr>
+      <p:sp>
+        <p:nvSpPr>
+          <p:cNvPr id="2" name="Text 0"/>
+          <p:cNvSpPr txBox="1"/>
+          <p:nvPr/>
+        </p:nvSpPr>
+        <p:spPr>
+          <a:xfrm>
+            <a:off x="548640" y="320040"/>
+            <a:ext cx="8046720" cy="640080"/>
+          </a:xfrm>
+          <a:prstGeom prst="rect">
+            <a:avLst/>
+          </a:prstGeom>
+          <a:noFill/>
+          <a:ln/>
+        </p:spPr>
+        <p:txBody>
+          <a:bodyPr wrap="square" lIns="0" tIns="0" rIns="0" bIns="0" rtlCol="0" anchor="ctr"/>
+          <a:lstStyle/>
+          <a:p>
+            <a:pPr indent="0" marL="0">
+              <a:buNone/>
+            </a:pPr>
+            <a:r>
+              <a:rPr lang="en-US" sz="3000" b="1" dirty="0">
+                <a:solidFill>
+                  <a:srgbClr val="2F3E4E"/>
+                </a:solidFill>
+                <a:latin typeface="Cambria" pitchFamily="34" charset="0"/>
+                <a:ea typeface="Cambria" pitchFamily="34" charset="-122"/>
+                <a:cs typeface="Cambria" pitchFamily="34" charset="-120"/>
+              </a:rPr>
+              <a:t>Máximo común divisor (mcd)</a:t>
+            </a:r>
+            <a:endParaRPr lang="en-US" sz="3000" dirty="0"/>
+          </a:p>
+        </p:txBody>
+      </p:sp>
+      <p:sp>
+        <p:nvSpPr>
+          <p:cNvPr id="3" name="Text 1"/>
+          <p:cNvSpPr txBox="1"/>
+          <p:nvPr/>
+        </p:nvSpPr>
+        <p:spPr>
+          <a:xfrm>
+            <a:off x="548640" y="960120"/>
+            <a:ext cx="8046720" cy="365760"/>
+          </a:xfrm>
+          <a:prstGeom prst="rect">
+            <a:avLst/>
+          </a:prstGeom>
+          <a:noFill/>
+          <a:ln/>
+        </p:spPr>
+        <p:txBody>
+          <a:bodyPr wrap="square" lIns="0" tIns="0" rIns="0" bIns="0" rtlCol="0" anchor="ctr"/>
+          <a:lstStyle/>
+          <a:p>
+            <a:pPr indent="0" marL="0">
+              <a:buNone/>
+            </a:pPr>
+            <a:r>
+              <a:rPr lang="en-US" sz="1600" dirty="0">
+                <a:solidFill>
+                  <a:srgbClr val="5F6E80"/>
+                </a:solidFill>
+                <a:latin typeface="Calibri" pitchFamily="34" charset="0"/>
+                <a:ea typeface="Calibri" pitchFamily="34" charset="-122"/>
+                <a:cs typeface="Calibri" pitchFamily="34" charset="-120"/>
+              </a:rPr>
+              <a:t>Primos comunes con su menor exponente</a:t>
+            </a:r>
+            <a:endParaRPr lang="en-US" sz="1600" dirty="0"/>
+          </a:p>
+        </p:txBody>
+      </p:sp>
+      <p:sp>
+        <p:nvSpPr>
+          <p:cNvPr id="4" name="Text 2"/>
+          <p:cNvSpPr txBox="1"/>
+          <p:nvPr/>
+        </p:nvSpPr>
+        <p:spPr>
+          <a:xfrm>
+            <a:off x="548640" y="4754880"/>
+            <a:ext cx="8046720" cy="228600"/>
+          </a:xfrm>
+          <a:prstGeom prst="rect">
+            <a:avLst/>
+          </a:prstGeom>
+          <a:noFill/>
+          <a:ln/>
+        </p:spPr>
+        <p:txBody>
+          <a:bodyPr wrap="square" lIns="0" tIns="0" rIns="0" bIns="0" rtlCol="0" anchor="ctr"/>
+          <a:lstStyle/>
+          <a:p>
+            <a:pPr indent="0" marL="0">
+              <a:buNone/>
+            </a:pPr>
+            <a:r>
+              <a:rPr lang="en-US" sz="1000" dirty="0">
+                <a:solidFill>
+                  <a:srgbClr val="8A98A8"/>
+                </a:solidFill>
+                <a:latin typeface="Calibri" pitchFamily="34" charset="0"/>
+                <a:ea typeface="Calibri" pitchFamily="34" charset="-122"/>
+                <a:cs typeface="Calibri" pitchFamily="34" charset="-120"/>
+              </a:rPr>
+              <a:t>Club de programación Competitiva - BugSquad 2026</a:t>
+            </a:r>
+            <a:endParaRPr lang="en-US" sz="1000" dirty="0"/>
+          </a:p>
+        </p:txBody>
+      </p:sp>
+      <p:sp>
+        <p:nvSpPr>
+          <p:cNvPr id="5" name="Shape 3"/>
+          <p:cNvSpPr/>
+          <p:nvPr/>
+        </p:nvSpPr>
+        <p:spPr>
+          <a:xfrm>
+            <a:off x="914400" y="1645920"/>
+            <a:ext cx="7315200" cy="914400"/>
+          </a:xfrm>
+          <a:prstGeom prst="roundRect">
+            <a:avLst>
+              <a:gd name="adj" fmla="val 12000"/>
+            </a:avLst>
+          </a:prstGeom>
+          <a:solidFill>
+            <a:srgbClr val="DDE8F3"/>
+          </a:solidFill>
+          <a:ln w="12700">
+            <a:solidFill>
+              <a:srgbClr val="DDE8F3"/>
+            </a:solidFill>
+            <a:prstDash val="solid"/>
+          </a:ln>
+        </p:spPr>
+      </p:sp>
+      <p:sp>
+        <p:nvSpPr>
+          <p:cNvPr id="6" name="Text 4"/>
+          <p:cNvSpPr txBox="1"/>
+          <p:nvPr/>
+        </p:nvSpPr>
+        <p:spPr>
+          <a:xfrm>
+            <a:off x="914400" y="1645920"/>
+            <a:ext cx="7315200" cy="914400"/>
+          </a:xfrm>
+          <a:prstGeom prst="rect">
+            <a:avLst/>
+          </a:prstGeom>
+          <a:noFill/>
+          <a:ln/>
+        </p:spPr>
+        <p:txBody>
+          <a:bodyPr wrap="square" lIns="0" tIns="0" rIns="0" bIns="0" rtlCol="0" anchor="ctr"/>
+          <a:lstStyle/>
+          <a:p>
+            <a:pPr algn="ctr" indent="0" marL="0">
+              <a:buNone/>
+            </a:pPr>
+            <a:r>
+              <a:rPr lang="en-US" sz="2200" b="1" dirty="0">
+                <a:solidFill>
+                  <a:srgbClr val="2F3E4E"/>
+                </a:solidFill>
+                <a:latin typeface="Calibri" pitchFamily="34" charset="0"/>
+                <a:ea typeface="Calibri" pitchFamily="34" charset="-122"/>
+                <a:cs typeface="Calibri" pitchFamily="34" charset="-120"/>
+              </a:rPr>
+              <a:t>mcd(360, 300) = 2² · 3 · 5 = 60</a:t>
+            </a:r>
+            <a:endParaRPr lang="en-US" sz="2200" dirty="0"/>
+          </a:p>
+        </p:txBody>
+      </p:sp>
+      <p:sp>
+        <p:nvSpPr>
+          <p:cNvPr id="7" name="Text 5"/>
+          <p:cNvSpPr txBox="1"/>
+          <p:nvPr/>
+        </p:nvSpPr>
+        <p:spPr>
+          <a:xfrm>
+            <a:off x="548640" y="2834640"/>
+            <a:ext cx="8046720" cy="1737360"/>
+          </a:xfrm>
+          <a:prstGeom prst="rect">
+            <a:avLst/>
+          </a:prstGeom>
+          <a:noFill/>
+          <a:ln/>
+        </p:spPr>
+        <p:txBody>
+          <a:bodyPr wrap="square" lIns="0" tIns="0" rIns="0" bIns="0" rtlCol="0" anchor="t"/>
+          <a:lstStyle/>
+          <a:p>
+            <a:pPr marL="342900" indent="-342900">
+              <a:spcAft>
+                <a:spcPts val="600"/>
+              </a:spcAft>
+              <a:buSzPct val="100000"/>
+              <a:buChar char="•"/>
+            </a:pPr>
+            <a:r>
+              <a:rPr lang="en-US" sz="1600" dirty="0">
+                <a:solidFill>
+                  <a:srgbClr val="2F3E4E"/>
+                </a:solidFill>
+                <a:latin typeface="Calibri" pitchFamily="34" charset="0"/>
+                <a:ea typeface="Calibri" pitchFamily="34" charset="-122"/>
+                <a:cs typeface="Calibri" pitchFamily="34" charset="-120"/>
+              </a:rPr>
+              <a:t>360 = 2³ · 3² · 5 y 300 = 2² · 3 · 5².</a:t>
+            </a:r>
+            <a:endParaRPr lang="en-US" sz="1600" dirty="0"/>
+          </a:p>
+          <a:p>
+            <a:pPr marL="342900" indent="-342900">
+              <a:spcAft>
+                <a:spcPts val="600"/>
+              </a:spcAft>
+              <a:buSzPct val="100000"/>
+              <a:buChar char="•"/>
+            </a:pPr>
+            <a:r>
+              <a:rPr lang="en-US" sz="1600" dirty="0">
+                <a:solidFill>
+                  <a:srgbClr val="2F3E4E"/>
+                </a:solidFill>
+                <a:latin typeface="Calibri" pitchFamily="34" charset="0"/>
+                <a:ea typeface="Calibri" pitchFamily="34" charset="-122"/>
+                <a:cs typeface="Calibri" pitchFamily="34" charset="-120"/>
+              </a:rPr>
+              <a:t>Algoritmo de Euclides: mcd(a, b) = mcd(b, a mod b).</a:t>
+            </a:r>
+            <a:endParaRPr lang="en-US" sz="1600" dirty="0"/>
+          </a:p>
+          <a:p>
+            <a:pPr marL="342900" indent="-342900">
+              <a:spcAft>
+                <a:spcPts val="600"/>
+              </a:spcAft>
+              <a:buSzPct val="100000"/>
+              <a:buChar char="•"/>
+            </a:pPr>
+            <a:r>
+              <a:rPr lang="en-US" sz="1600" dirty="0">
+                <a:solidFill>
+                  <a:srgbClr val="2F3E4E"/>
+                </a:solidFill>
+                <a:latin typeface="Calibri" pitchFamily="34" charset="0"/>
+                <a:ea typeface="Calibri" pitchFamily="34" charset="-122"/>
+                <a:cs typeface="Calibri" pitchFamily="34" charset="-120"/>
+              </a:rPr>
+              <a:t>Se repite hasta que el residuo sea cero; el último residuo distinto de cero es el mcd.</a:t>
+            </a:r>
+            <a:endParaRPr lang="en-US" sz="1600" dirty="0"/>
+          </a:p>
+        </p:txBody>
+      </p:sp>
+    </p:spTree>
+  </p:cSld>
+  <p:clrMapOvr>
+    <a:masterClrMapping/>
+  </p:clrMapOvr>
+</p:sld>
+</file>
+
+<file path=ppt/slides/slide21.xml><?xml version="1.0" encoding="utf-8"?>
+<p:sld xmlns:a="http://schemas.openxmlformats.org/drawingml/2006/main" xmlns:r="http://schemas.openxmlformats.org/officeDocument/2006/relationships" xmlns:p="http://schemas.openxmlformats.org/presentationml/2006/main">
+  <p:cSld name="Slide 21">
+    <p:bg>
+      <p:bgPr>
+        <a:solidFill>
+          <a:srgbClr val="FFFFFF"/>
+        </a:solidFill>
+      </p:bgPr>
+    </p:bg>
+    <p:spTree>
+      <p:nvGrpSpPr>
+        <p:cNvPr id="1" name=""/>
+        <p:cNvGrpSpPr/>
+        <p:nvPr/>
+      </p:nvGrpSpPr>
+      <p:grpSpPr>
+        <a:xfrm>
+          <a:off x="0" y="0"/>
+          <a:ext cx="0" cy="0"/>
+          <a:chOff x="0" y="0"/>
+          <a:chExt cx="0" cy="0"/>
+        </a:xfrm>
+      </p:grpSpPr>
+      <p:sp>
+        <p:nvSpPr>
+          <p:cNvPr id="2" name="Text 0"/>
+          <p:cNvSpPr txBox="1"/>
+          <p:nvPr/>
+        </p:nvSpPr>
+        <p:spPr>
+          <a:xfrm>
+            <a:off x="548640" y="320040"/>
+            <a:ext cx="8046720" cy="640080"/>
+          </a:xfrm>
+          <a:prstGeom prst="rect">
+            <a:avLst/>
+          </a:prstGeom>
+          <a:noFill/>
+          <a:ln/>
+        </p:spPr>
+        <p:txBody>
+          <a:bodyPr wrap="square" lIns="0" tIns="0" rIns="0" bIns="0" rtlCol="0" anchor="ctr"/>
+          <a:lstStyle/>
+          <a:p>
+            <a:pPr indent="0" marL="0">
+              <a:buNone/>
+            </a:pPr>
+            <a:r>
+              <a:rPr lang="en-US" sz="3000" b="1" dirty="0">
+                <a:solidFill>
+                  <a:srgbClr val="2F3E4E"/>
+                </a:solidFill>
+                <a:latin typeface="Cambria" pitchFamily="34" charset="0"/>
+                <a:ea typeface="Cambria" pitchFamily="34" charset="-122"/>
+                <a:cs typeface="Cambria" pitchFamily="34" charset="-120"/>
+              </a:rPr>
+              <a:t>Mínimo común múltiplo (mcm)</a:t>
+            </a:r>
+            <a:endParaRPr lang="en-US" sz="3000" dirty="0"/>
+          </a:p>
+        </p:txBody>
+      </p:sp>
+      <p:sp>
+        <p:nvSpPr>
+          <p:cNvPr id="3" name="Text 1"/>
+          <p:cNvSpPr txBox="1"/>
+          <p:nvPr/>
+        </p:nvSpPr>
+        <p:spPr>
+          <a:xfrm>
+            <a:off x="548640" y="960120"/>
+            <a:ext cx="8046720" cy="365760"/>
+          </a:xfrm>
+          <a:prstGeom prst="rect">
+            <a:avLst/>
+          </a:prstGeom>
+          <a:noFill/>
+          <a:ln/>
+        </p:spPr>
+        <p:txBody>
+          <a:bodyPr wrap="square" lIns="0" tIns="0" rIns="0" bIns="0" rtlCol="0" anchor="ctr"/>
+          <a:lstStyle/>
+          <a:p>
+            <a:pPr indent="0" marL="0">
+              <a:buNone/>
+            </a:pPr>
+            <a:r>
+              <a:rPr lang="en-US" sz="1600" dirty="0">
+                <a:solidFill>
+                  <a:srgbClr val="5F6E80"/>
+                </a:solidFill>
+                <a:latin typeface="Calibri" pitchFamily="34" charset="0"/>
+                <a:ea typeface="Calibri" pitchFamily="34" charset="-122"/>
+                <a:cs typeface="Calibri" pitchFamily="34" charset="-120"/>
+              </a:rPr>
+              <a:t>Todos los primos con su mayor exponente</a:t>
+            </a:r>
+            <a:endParaRPr lang="en-US" sz="1600" dirty="0"/>
+          </a:p>
+        </p:txBody>
+      </p:sp>
+      <p:sp>
+        <p:nvSpPr>
+          <p:cNvPr id="4" name="Text 2"/>
+          <p:cNvSpPr txBox="1"/>
+          <p:nvPr/>
+        </p:nvSpPr>
+        <p:spPr>
+          <a:xfrm>
+            <a:off x="548640" y="4754880"/>
+            <a:ext cx="8046720" cy="228600"/>
+          </a:xfrm>
+          <a:prstGeom prst="rect">
+            <a:avLst/>
+          </a:prstGeom>
+          <a:noFill/>
+          <a:ln/>
+        </p:spPr>
+        <p:txBody>
+          <a:bodyPr wrap="square" lIns="0" tIns="0" rIns="0" bIns="0" rtlCol="0" anchor="ctr"/>
+          <a:lstStyle/>
+          <a:p>
+            <a:pPr indent="0" marL="0">
+              <a:buNone/>
+            </a:pPr>
+            <a:r>
+              <a:rPr lang="en-US" sz="1000" dirty="0">
+                <a:solidFill>
+                  <a:srgbClr val="8A98A8"/>
+                </a:solidFill>
+                <a:latin typeface="Calibri" pitchFamily="34" charset="0"/>
+                <a:ea typeface="Calibri" pitchFamily="34" charset="-122"/>
+                <a:cs typeface="Calibri" pitchFamily="34" charset="-120"/>
+              </a:rPr>
+              <a:t>Club de programación Competitiva - BugSquad 2026</a:t>
+            </a:r>
+            <a:endParaRPr lang="en-US" sz="1000" dirty="0"/>
+          </a:p>
+        </p:txBody>
+      </p:sp>
+      <p:sp>
+        <p:nvSpPr>
+          <p:cNvPr id="5" name="Shape 3"/>
+          <p:cNvSpPr/>
+          <p:nvPr/>
+        </p:nvSpPr>
+        <p:spPr>
+          <a:xfrm>
+            <a:off x="914400" y="1645920"/>
+            <a:ext cx="7315200" cy="914400"/>
+          </a:xfrm>
+          <a:prstGeom prst="roundRect">
+            <a:avLst>
+              <a:gd name="adj" fmla="val 12000"/>
+            </a:avLst>
+          </a:prstGeom>
+          <a:solidFill>
+            <a:srgbClr val="E1F0E7"/>
+          </a:solidFill>
+          <a:ln w="12700">
+            <a:solidFill>
+              <a:srgbClr val="E1F0E7"/>
+            </a:solidFill>
+            <a:prstDash val="solid"/>
+          </a:ln>
+        </p:spPr>
+      </p:sp>
+      <p:sp>
+        <p:nvSpPr>
+          <p:cNvPr id="6" name="Text 4"/>
+          <p:cNvSpPr txBox="1"/>
+          <p:nvPr/>
+        </p:nvSpPr>
+        <p:spPr>
+          <a:xfrm>
+            <a:off x="914400" y="1645920"/>
+            <a:ext cx="7315200" cy="914400"/>
+          </a:xfrm>
+          <a:prstGeom prst="rect">
+            <a:avLst/>
+          </a:prstGeom>
+          <a:noFill/>
+          <a:ln/>
+        </p:spPr>
+        <p:txBody>
+          <a:bodyPr wrap="square" lIns="0" tIns="0" rIns="0" bIns="0" rtlCol="0" anchor="ctr"/>
+          <a:lstStyle/>
+          <a:p>
+            <a:pPr algn="ctr" indent="0" marL="0">
+              <a:buNone/>
+            </a:pPr>
+            <a:r>
+              <a:rPr lang="en-US" sz="2200" b="1" dirty="0">
+                <a:solidFill>
+                  <a:srgbClr val="2F3E4E"/>
+                </a:solidFill>
+                <a:latin typeface="Calibri" pitchFamily="34" charset="0"/>
+                <a:ea typeface="Calibri" pitchFamily="34" charset="-122"/>
+                <a:cs typeface="Calibri" pitchFamily="34" charset="-120"/>
+              </a:rPr>
+              <a:t>mcm(360, 300) = 2³ · 3² · 5² = 1800</a:t>
+            </a:r>
+            <a:endParaRPr lang="en-US" sz="2200" dirty="0"/>
+          </a:p>
+        </p:txBody>
+      </p:sp>
+      <p:sp>
+        <p:nvSpPr>
+          <p:cNvPr id="7" name="Text 5"/>
+          <p:cNvSpPr txBox="1"/>
+          <p:nvPr/>
+        </p:nvSpPr>
+        <p:spPr>
+          <a:xfrm>
+            <a:off x="548640" y="2834640"/>
+            <a:ext cx="8046720" cy="1737360"/>
+          </a:xfrm>
+          <a:prstGeom prst="rect">
+            <a:avLst/>
+          </a:prstGeom>
+          <a:noFill/>
+          <a:ln/>
+        </p:spPr>
+        <p:txBody>
+          <a:bodyPr wrap="square" lIns="0" tIns="0" rIns="0" bIns="0" rtlCol="0" anchor="t"/>
+          <a:lstStyle/>
+          <a:p>
+            <a:pPr marL="342900" indent="-342900">
+              <a:spcAft>
+                <a:spcPts val="600"/>
+              </a:spcAft>
+              <a:buSzPct val="100000"/>
+              <a:buChar char="•"/>
+            </a:pPr>
+            <a:r>
+              <a:rPr lang="en-US" sz="1600" dirty="0">
+                <a:solidFill>
+                  <a:srgbClr val="2F3E4E"/>
+                </a:solidFill>
+                <a:latin typeface="Calibri" pitchFamily="34" charset="0"/>
+                <a:ea typeface="Calibri" pitchFamily="34" charset="-122"/>
+                <a:cs typeface="Calibri" pitchFamily="34" charset="-120"/>
+              </a:rPr>
+              <a:t>Para dos números: mcd(a, b) · mcm(a, b) = a · b.</a:t>
+            </a:r>
+            <a:endParaRPr lang="en-US" sz="1600" dirty="0"/>
+          </a:p>
+          <a:p>
+            <a:pPr marL="342900" indent="-342900">
+              <a:spcAft>
+                <a:spcPts val="600"/>
+              </a:spcAft>
+              <a:buSzPct val="100000"/>
+              <a:buChar char="•"/>
+            </a:pPr>
+            <a:r>
+              <a:rPr lang="en-US" sz="1600" dirty="0">
+                <a:solidFill>
+                  <a:srgbClr val="2F3E4E"/>
+                </a:solidFill>
+                <a:latin typeface="Calibri" pitchFamily="34" charset="0"/>
+                <a:ea typeface="Calibri" pitchFamily="34" charset="-122"/>
+                <a:cs typeface="Calibri" pitchFamily="34" charset="-120"/>
+              </a:rPr>
+              <a:t>Por eso: mcm(a, b) = a · b / mcd(a, b).</a:t>
+            </a:r>
+            <a:endParaRPr lang="en-US" sz="1600" dirty="0"/>
+          </a:p>
+          <a:p>
+            <a:pPr marL="342900" indent="-342900">
+              <a:spcAft>
+                <a:spcPts val="600"/>
+              </a:spcAft>
+              <a:buSzPct val="100000"/>
+              <a:buChar char="•"/>
+            </a:pPr>
+            <a:r>
+              <a:rPr lang="en-US" sz="1600" dirty="0">
+                <a:solidFill>
+                  <a:srgbClr val="2F3E4E"/>
+                </a:solidFill>
+                <a:latin typeface="Calibri" pitchFamily="34" charset="0"/>
+                <a:ea typeface="Calibri" pitchFamily="34" charset="-122"/>
+                <a:cs typeface="Calibri" pitchFamily="34" charset="-120"/>
+              </a:rPr>
+              <a:t>Esta relación solo vale para dos números.</a:t>
+            </a:r>
+            <a:endParaRPr lang="en-US" sz="1600" dirty="0"/>
+          </a:p>
+        </p:txBody>
+      </p:sp>
+    </p:spTree>
+  </p:cSld>
+  <p:clrMapOvr>
+    <a:masterClrMapping/>
+  </p:clrMapOvr>
+</p:sld>
+</file>
+
+<file path=ppt/slides/slide22.xml><?xml version="1.0" encoding="utf-8"?>
+<p:sld xmlns:a="http://schemas.openxmlformats.org/drawingml/2006/main" xmlns:r="http://schemas.openxmlformats.org/officeDocument/2006/relationships" xmlns:p="http://schemas.openxmlformats.org/presentationml/2006/main">
+  <p:cSld name="Slide 22">
+    <p:bg>
+      <p:bgPr>
+        <a:solidFill>
+          <a:srgbClr val="FFFFFF"/>
+        </a:solidFill>
+      </p:bgPr>
+    </p:bg>
+    <p:spTree>
+      <p:nvGrpSpPr>
+        <p:cNvPr id="1" name=""/>
+        <p:cNvGrpSpPr/>
+        <p:nvPr/>
+      </p:nvGrpSpPr>
+      <p:grpSpPr>
+        <a:xfrm>
+          <a:off x="0" y="0"/>
+          <a:ext cx="0" cy="0"/>
+          <a:chOff x="0" y="0"/>
+          <a:chExt cx="0" cy="0"/>
+        </a:xfrm>
+      </p:grpSpPr>
+      <p:sp>
+        <p:nvSpPr>
+          <p:cNvPr id="2" name="Text 0"/>
+          <p:cNvSpPr txBox="1"/>
+          <p:nvPr/>
+        </p:nvSpPr>
+        <p:spPr>
+          <a:xfrm>
+            <a:off x="548640" y="320040"/>
+            <a:ext cx="8046720" cy="640080"/>
+          </a:xfrm>
+          <a:prstGeom prst="rect">
+            <a:avLst/>
+          </a:prstGeom>
+          <a:noFill/>
+          <a:ln/>
+        </p:spPr>
+        <p:txBody>
+          <a:bodyPr wrap="square" lIns="0" tIns="0" rIns="0" bIns="0" rtlCol="0" anchor="ctr"/>
+          <a:lstStyle/>
+          <a:p>
+            <a:pPr indent="0" marL="0">
+              <a:buNone/>
+            </a:pPr>
+            <a:r>
+              <a:rPr lang="en-US" sz="3000" b="1" dirty="0">
+                <a:solidFill>
+                  <a:srgbClr val="2F3E4E"/>
+                </a:solidFill>
+                <a:latin typeface="Cambria" pitchFamily="34" charset="0"/>
+                <a:ea typeface="Cambria" pitchFamily="34" charset="-122"/>
+                <a:cs typeface="Cambria" pitchFamily="34" charset="-120"/>
+              </a:rPr>
+              <a:t>Mcd o mcm: ¿cuál usar?</a:t>
+            </a:r>
+            <a:endParaRPr lang="en-US" sz="3000" dirty="0"/>
+          </a:p>
+        </p:txBody>
+      </p:sp>
+      <p:sp>
+        <p:nvSpPr>
+          <p:cNvPr id="3" name="Text 1"/>
+          <p:cNvSpPr txBox="1"/>
+          <p:nvPr/>
+        </p:nvSpPr>
+        <p:spPr>
+          <a:xfrm>
+            <a:off x="548640" y="960120"/>
+            <a:ext cx="8046720" cy="365760"/>
+          </a:xfrm>
+          <a:prstGeom prst="rect">
+            <a:avLst/>
+          </a:prstGeom>
+          <a:noFill/>
+          <a:ln/>
+        </p:spPr>
+        <p:txBody>
+          <a:bodyPr wrap="square" lIns="0" tIns="0" rIns="0" bIns="0" rtlCol="0" anchor="ctr"/>
+          <a:lstStyle/>
+          <a:p>
+            <a:pPr indent="0" marL="0">
+              <a:buNone/>
+            </a:pPr>
+            <a:r>
+              <a:rPr lang="en-US" sz="1600" dirty="0">
+                <a:solidFill>
+                  <a:srgbClr val="5F6E80"/>
+                </a:solidFill>
+                <a:latin typeface="Calibri" pitchFamily="34" charset="0"/>
+                <a:ea typeface="Calibri" pitchFamily="34" charset="-122"/>
+                <a:cs typeface="Calibri" pitchFamily="34" charset="-120"/>
+              </a:rPr>
+              <a:t>Palabras clave en el problema</a:t>
+            </a:r>
+            <a:endParaRPr lang="en-US" sz="1600" dirty="0"/>
+          </a:p>
+        </p:txBody>
+      </p:sp>
+      <p:sp>
+        <p:nvSpPr>
+          <p:cNvPr id="4" name="Text 2"/>
+          <p:cNvSpPr txBox="1"/>
+          <p:nvPr/>
+        </p:nvSpPr>
+        <p:spPr>
+          <a:xfrm>
+            <a:off x="548640" y="4754880"/>
+            <a:ext cx="8046720" cy="228600"/>
+          </a:xfrm>
+          <a:prstGeom prst="rect">
+            <a:avLst/>
+          </a:prstGeom>
+          <a:noFill/>
+          <a:ln/>
+        </p:spPr>
+        <p:txBody>
+          <a:bodyPr wrap="square" lIns="0" tIns="0" rIns="0" bIns="0" rtlCol="0" anchor="ctr"/>
+          <a:lstStyle/>
+          <a:p>
+            <a:pPr indent="0" marL="0">
+              <a:buNone/>
+            </a:pPr>
+            <a:r>
+              <a:rPr lang="en-US" sz="1000" dirty="0">
+                <a:solidFill>
+                  <a:srgbClr val="8A98A8"/>
+                </a:solidFill>
+                <a:latin typeface="Calibri" pitchFamily="34" charset="0"/>
+                <a:ea typeface="Calibri" pitchFamily="34" charset="-122"/>
+                <a:cs typeface="Calibri" pitchFamily="34" charset="-120"/>
+              </a:rPr>
+              <a:t>Club de programación Competitiva - BugSquad 2026</a:t>
+            </a:r>
+            <a:endParaRPr lang="en-US" sz="1000" dirty="0"/>
+          </a:p>
+        </p:txBody>
+      </p:sp>
+      <p:sp>
+        <p:nvSpPr>
+          <p:cNvPr id="5" name="Shape 3"/>
+          <p:cNvSpPr/>
+          <p:nvPr/>
+        </p:nvSpPr>
+        <p:spPr>
+          <a:xfrm>
+            <a:off x="548640" y="1645920"/>
+            <a:ext cx="3840480" cy="2468880"/>
+          </a:xfrm>
+          <a:prstGeom prst="roundRect">
+            <a:avLst>
+              <a:gd name="adj" fmla="val 4444"/>
+            </a:avLst>
+          </a:prstGeom>
+          <a:solidFill>
+            <a:srgbClr val="DDE8F3"/>
+          </a:solidFill>
+          <a:ln w="12700">
+            <a:solidFill>
+              <a:srgbClr val="DDE8F3"/>
+            </a:solidFill>
+            <a:prstDash val="solid"/>
+          </a:ln>
+        </p:spPr>
+      </p:sp>
+      <p:sp>
+        <p:nvSpPr>
+          <p:cNvPr id="6" name="Text 4"/>
+          <p:cNvSpPr txBox="1"/>
+          <p:nvPr/>
+        </p:nvSpPr>
+        <p:spPr>
+          <a:xfrm>
+            <a:off x="822960" y="1828800"/>
+            <a:ext cx="3291840" cy="411480"/>
+          </a:xfrm>
+          <a:prstGeom prst="rect">
+            <a:avLst/>
+          </a:prstGeom>
+          <a:noFill/>
+          <a:ln/>
+        </p:spPr>
+        <p:txBody>
+          <a:bodyPr wrap="square" lIns="0" tIns="0" rIns="0" bIns="0" rtlCol="0" anchor="t"/>
+          <a:lstStyle/>
+          <a:p>
+            <a:pPr indent="0" marL="0">
+              <a:buNone/>
+            </a:pPr>
+            <a:r>
+              <a:rPr lang="en-US" sz="1800" b="1" dirty="0">
+                <a:solidFill>
+                  <a:srgbClr val="4F7CAC"/>
+                </a:solidFill>
+                <a:latin typeface="Calibri" pitchFamily="34" charset="0"/>
+                <a:ea typeface="Calibri" pitchFamily="34" charset="-122"/>
+                <a:cs typeface="Calibri" pitchFamily="34" charset="-120"/>
+              </a:rPr>
+              <a:t>mcd: repartir</a:t>
+            </a:r>
+            <a:endParaRPr lang="en-US" sz="1800" dirty="0"/>
+          </a:p>
+        </p:txBody>
+      </p:sp>
+      <p:sp>
+        <p:nvSpPr>
+          <p:cNvPr id="7" name="Text 5"/>
+          <p:cNvSpPr txBox="1"/>
+          <p:nvPr/>
+        </p:nvSpPr>
+        <p:spPr>
+          <a:xfrm>
+            <a:off x="822960" y="2331720"/>
+            <a:ext cx="3291840" cy="1645920"/>
+          </a:xfrm>
+          <a:prstGeom prst="rect">
+            <a:avLst/>
+          </a:prstGeom>
+          <a:noFill/>
+          <a:ln/>
+        </p:spPr>
+        <p:txBody>
+          <a:bodyPr wrap="square" lIns="0" tIns="0" rIns="0" bIns="0" rtlCol="0" anchor="t"/>
+          <a:lstStyle/>
+          <a:p>
+            <a:pPr indent="0" marL="0">
+              <a:buNone/>
+            </a:pPr>
+            <a:r>
+              <a:rPr lang="en-US" sz="1500" dirty="0">
+                <a:solidFill>
+                  <a:srgbClr val="2F3E4E"/>
+                </a:solidFill>
+                <a:latin typeface="Calibri" pitchFamily="34" charset="0"/>
+                <a:ea typeface="Calibri" pitchFamily="34" charset="-122"/>
+                <a:cs typeface="Calibri" pitchFamily="34" charset="-120"/>
+              </a:rPr>
+              <a:t>Palabras clave: máximo, partes iguales, sin que sobre nada.</a:t>
+            </a:r>
+            <a:endParaRPr lang="en-US" sz="1500" dirty="0"/>
+          </a:p>
+          <a:p>
+            <a:pPr indent="0" marL="0">
+              <a:buNone/>
+            </a:pPr>
+            <a:endParaRPr lang="en-US" sz="1500" dirty="0"/>
+          </a:p>
+          <a:p>
+            <a:pPr indent="0" marL="0">
+              <a:buNone/>
+            </a:pPr>
+            <a:r>
+              <a:rPr lang="en-US" sz="1500" dirty="0">
+                <a:solidFill>
+                  <a:srgbClr val="2F3E4E"/>
+                </a:solidFill>
+                <a:latin typeface="Calibri" pitchFamily="34" charset="0"/>
+                <a:ea typeface="Calibri" pitchFamily="34" charset="-122"/>
+                <a:cs typeface="Calibri" pitchFamily="34" charset="-120"/>
+              </a:rPr>
+              <a:t>Ejemplo: tramos de madera del mayor largo posible.</a:t>
+            </a:r>
+            <a:endParaRPr lang="en-US" sz="1500" dirty="0"/>
+          </a:p>
+        </p:txBody>
+      </p:sp>
+      <p:sp>
+        <p:nvSpPr>
+          <p:cNvPr id="8" name="Shape 6"/>
+          <p:cNvSpPr/>
+          <p:nvPr/>
+        </p:nvSpPr>
+        <p:spPr>
+          <a:xfrm>
+            <a:off x="4754880" y="1645920"/>
+            <a:ext cx="3840480" cy="2468880"/>
+          </a:xfrm>
+          <a:prstGeom prst="roundRect">
+            <a:avLst>
+              <a:gd name="adj" fmla="val 4444"/>
+            </a:avLst>
+          </a:prstGeom>
+          <a:solidFill>
+            <a:srgbClr val="E1F0E7"/>
+          </a:solidFill>
+          <a:ln w="12700">
+            <a:solidFill>
+              <a:srgbClr val="E1F0E7"/>
+            </a:solidFill>
+            <a:prstDash val="solid"/>
+          </a:ln>
+        </p:spPr>
+      </p:sp>
+      <p:sp>
+        <p:nvSpPr>
+          <p:cNvPr id="9" name="Text 7"/>
+          <p:cNvSpPr txBox="1"/>
+          <p:nvPr/>
+        </p:nvSpPr>
+        <p:spPr>
+          <a:xfrm>
+            <a:off x="5029200" y="1828800"/>
+            <a:ext cx="3291840" cy="411480"/>
+          </a:xfrm>
+          <a:prstGeom prst="rect">
+            <a:avLst/>
+          </a:prstGeom>
+          <a:noFill/>
+          <a:ln/>
+        </p:spPr>
+        <p:txBody>
+          <a:bodyPr wrap="square" lIns="0" tIns="0" rIns="0" bIns="0" rtlCol="0" anchor="t"/>
+          <a:lstStyle/>
+          <a:p>
+            <a:pPr indent="0" marL="0">
+              <a:buNone/>
+            </a:pPr>
+            <a:r>
+              <a:rPr lang="en-US" sz="1800" b="1" dirty="0">
+                <a:solidFill>
+                  <a:srgbClr val="6FA287"/>
+                </a:solidFill>
+                <a:latin typeface="Calibri" pitchFamily="34" charset="0"/>
+                <a:ea typeface="Calibri" pitchFamily="34" charset="-122"/>
+                <a:cs typeface="Calibri" pitchFamily="34" charset="-120"/>
+              </a:rPr>
+              <a:t>mcm: coincidir</a:t>
+            </a:r>
+            <a:endParaRPr lang="en-US" sz="1800" dirty="0"/>
+          </a:p>
+        </p:txBody>
+      </p:sp>
+      <p:sp>
+        <p:nvSpPr>
+          <p:cNvPr id="10" name="Text 8"/>
+          <p:cNvSpPr txBox="1"/>
+          <p:nvPr/>
+        </p:nvSpPr>
+        <p:spPr>
+          <a:xfrm>
+            <a:off x="5029200" y="2331720"/>
+            <a:ext cx="3291840" cy="1645920"/>
+          </a:xfrm>
+          <a:prstGeom prst="rect">
+            <a:avLst/>
+          </a:prstGeom>
+          <a:noFill/>
+          <a:ln/>
+        </p:spPr>
+        <p:txBody>
+          <a:bodyPr wrap="square" lIns="0" tIns="0" rIns="0" bIns="0" rtlCol="0" anchor="t"/>
+          <a:lstStyle/>
+          <a:p>
+            <a:pPr indent="0" marL="0">
+              <a:buNone/>
+            </a:pPr>
+            <a:r>
+              <a:rPr lang="en-US" sz="1500" dirty="0">
+                <a:solidFill>
+                  <a:srgbClr val="2F3E4E"/>
+                </a:solidFill>
+                <a:latin typeface="Calibri" pitchFamily="34" charset="0"/>
+                <a:ea typeface="Calibri" pitchFamily="34" charset="-122"/>
+                <a:cs typeface="Calibri" pitchFamily="34" charset="-120"/>
+              </a:rPr>
+              <a:t>Palabras clave: coincidir, mínimo tiempo, simultáneamente.</a:t>
+            </a:r>
+            <a:endParaRPr lang="en-US" sz="1500" dirty="0"/>
+          </a:p>
+          <a:p>
+            <a:pPr indent="0" marL="0">
+              <a:buNone/>
+            </a:pPr>
+            <a:endParaRPr lang="en-US" sz="1500" dirty="0"/>
+          </a:p>
+          <a:p>
+            <a:pPr indent="0" marL="0">
+              <a:buNone/>
+            </a:pPr>
+            <a:r>
+              <a:rPr lang="en-US" sz="1500" dirty="0">
+                <a:solidFill>
+                  <a:srgbClr val="2F3E4E"/>
+                </a:solidFill>
+                <a:latin typeface="Calibri" pitchFamily="34" charset="0"/>
+                <a:ea typeface="Calibri" pitchFamily="34" charset="-122"/>
+                <a:cs typeface="Calibri" pitchFamily="34" charset="-120"/>
+              </a:rPr>
+              <a:t>Ejemplo: semáforos cada 12 y 18 s coinciden cada 36 s.</a:t>
+            </a:r>
+            <a:endParaRPr lang="en-US" sz="1500" dirty="0"/>
+          </a:p>
+        </p:txBody>
+      </p:sp>
+    </p:spTree>
+  </p:cSld>
+  <p:clrMapOvr>
+    <a:masterClrMapping/>
+  </p:clrMapOvr>
+</p:sld>
+</file>
+
+<file path=ppt/slides/slide23.xml><?xml version="1.0" encoding="utf-8"?>
+<p:sld xmlns:a="http://schemas.openxmlformats.org/drawingml/2006/main" xmlns:r="http://schemas.openxmlformats.org/officeDocument/2006/relationships" xmlns:p="http://schemas.openxmlformats.org/presentationml/2006/main">
+  <p:cSld name="Slide 23">
+    <p:bg>
+      <p:bgPr>
+        <a:solidFill>
+          <a:srgbClr val="FFFFFF"/>
+        </a:solidFill>
+      </p:bgPr>
+    </p:bg>
+    <p:spTree>
+      <p:nvGrpSpPr>
+        <p:cNvPr id="1" name=""/>
+        <p:cNvGrpSpPr/>
+        <p:nvPr/>
+      </p:nvGrpSpPr>
+      <p:grpSpPr>
+        <a:xfrm>
+          <a:off x="0" y="0"/>
+          <a:ext cx="0" cy="0"/>
+          <a:chOff x="0" y="0"/>
+          <a:chExt cx="0" cy="0"/>
+        </a:xfrm>
+      </p:grpSpPr>
+      <p:sp>
+        <p:nvSpPr>
+          <p:cNvPr id="2" name="Text 0"/>
+          <p:cNvSpPr txBox="1"/>
+          <p:nvPr/>
+        </p:nvSpPr>
+        <p:spPr>
+          <a:xfrm>
+            <a:off x="548640" y="320040"/>
+            <a:ext cx="8046720" cy="640080"/>
+          </a:xfrm>
+          <a:prstGeom prst="rect">
+            <a:avLst/>
+          </a:prstGeom>
+          <a:noFill/>
+          <a:ln/>
+        </p:spPr>
+        <p:txBody>
+          <a:bodyPr wrap="square" lIns="0" tIns="0" rIns="0" bIns="0" rtlCol="0" anchor="ctr"/>
+          <a:lstStyle/>
+          <a:p>
+            <a:pPr indent="0" marL="0">
+              <a:buNone/>
+            </a:pPr>
+            <a:r>
+              <a:rPr lang="en-US" sz="3000" b="1" dirty="0">
+                <a:solidFill>
+                  <a:srgbClr val="2F3E4E"/>
+                </a:solidFill>
+                <a:latin typeface="Cambria" pitchFamily="34" charset="0"/>
+                <a:ea typeface="Cambria" pitchFamily="34" charset="-122"/>
+                <a:cs typeface="Cambria" pitchFamily="34" charset="-120"/>
+              </a:rPr>
+              <a:t>Errores frecuentes</a:t>
+            </a:r>
+            <a:endParaRPr lang="en-US" sz="3000" dirty="0"/>
+          </a:p>
+        </p:txBody>
+      </p:sp>
+      <p:sp>
+        <p:nvSpPr>
+          <p:cNvPr id="3" name="Text 1"/>
+          <p:cNvSpPr txBox="1"/>
+          <p:nvPr/>
+        </p:nvSpPr>
+        <p:spPr>
+          <a:xfrm>
+            <a:off x="548640" y="960120"/>
+            <a:ext cx="8046720" cy="365760"/>
+          </a:xfrm>
+          <a:prstGeom prst="rect">
+            <a:avLst/>
+          </a:prstGeom>
+          <a:noFill/>
+          <a:ln/>
+        </p:spPr>
+        <p:txBody>
+          <a:bodyPr wrap="square" lIns="0" tIns="0" rIns="0" bIns="0" rtlCol="0" anchor="ctr"/>
+          <a:lstStyle/>
+          <a:p>
+            <a:pPr indent="0" marL="0">
+              <a:buNone/>
+            </a:pPr>
+            <a:r>
+              <a:rPr lang="en-US" sz="1600" dirty="0">
+                <a:solidFill>
+                  <a:srgbClr val="5F6E80"/>
+                </a:solidFill>
+                <a:latin typeface="Calibri" pitchFamily="34" charset="0"/>
+                <a:ea typeface="Calibri" pitchFamily="34" charset="-122"/>
+                <a:cs typeface="Calibri" pitchFamily="34" charset="-120"/>
+              </a:rPr>
+              <a:t>Revísalos antes del examen</a:t>
+            </a:r>
+            <a:endParaRPr lang="en-US" sz="1600" dirty="0"/>
+          </a:p>
+        </p:txBody>
+      </p:sp>
+      <p:sp>
+        <p:nvSpPr>
+          <p:cNvPr id="4" name="Text 2"/>
+          <p:cNvSpPr txBox="1"/>
+          <p:nvPr/>
+        </p:nvSpPr>
+        <p:spPr>
+          <a:xfrm>
+            <a:off x="548640" y="4754880"/>
+            <a:ext cx="8046720" cy="228600"/>
+          </a:xfrm>
+          <a:prstGeom prst="rect">
+            <a:avLst/>
+          </a:prstGeom>
+          <a:noFill/>
+          <a:ln/>
+        </p:spPr>
+        <p:txBody>
+          <a:bodyPr wrap="square" lIns="0" tIns="0" rIns="0" bIns="0" rtlCol="0" anchor="ctr"/>
+          <a:lstStyle/>
+          <a:p>
+            <a:pPr indent="0" marL="0">
+              <a:buNone/>
+            </a:pPr>
+            <a:r>
+              <a:rPr lang="en-US" sz="1000" dirty="0">
+                <a:solidFill>
+                  <a:srgbClr val="8A98A8"/>
+                </a:solidFill>
+                <a:latin typeface="Calibri" pitchFamily="34" charset="0"/>
+                <a:ea typeface="Calibri" pitchFamily="34" charset="-122"/>
+                <a:cs typeface="Calibri" pitchFamily="34" charset="-120"/>
+              </a:rPr>
+              <a:t>Club de programación Competitiva - BugSquad 2026</a:t>
+            </a:r>
+            <a:endParaRPr lang="en-US" sz="1000" dirty="0"/>
+          </a:p>
+        </p:txBody>
+      </p:sp>
+      <p:sp>
+        <p:nvSpPr>
+          <p:cNvPr id="5" name="Text 3"/>
+          <p:cNvSpPr txBox="1"/>
+          <p:nvPr/>
+        </p:nvSpPr>
+        <p:spPr>
+          <a:xfrm>
+            <a:off x="548640" y="1645920"/>
+            <a:ext cx="8046720" cy="2926080"/>
+          </a:xfrm>
+          <a:prstGeom prst="rect">
+            <a:avLst/>
+          </a:prstGeom>
+          <a:noFill/>
+          <a:ln/>
+        </p:spPr>
+        <p:txBody>
+          <a:bodyPr wrap="square" lIns="0" tIns="0" rIns="0" bIns="0" rtlCol="0" anchor="t"/>
+          <a:lstStyle/>
+          <a:p>
+            <a:pPr marL="342900" indent="-342900">
+              <a:spcAft>
+                <a:spcPts val="600"/>
+              </a:spcAft>
+              <a:buSzPct val="100000"/>
+              <a:buChar char="•"/>
+            </a:pPr>
+            <a:r>
+              <a:rPr lang="en-US" sz="1700" dirty="0">
+                <a:solidFill>
+                  <a:srgbClr val="2F3E4E"/>
+                </a:solidFill>
+                <a:latin typeface="Calibri" pitchFamily="34" charset="0"/>
+                <a:ea typeface="Calibri" pitchFamily="34" charset="-122"/>
+                <a:cs typeface="Calibri" pitchFamily="34" charset="-120"/>
+              </a:rPr>
+              <a:t>Usar la división real para contar paquetes completos: usa el piso ⌊a/b⌋.</a:t>
+            </a:r>
+            <a:endParaRPr lang="en-US" sz="1700" dirty="0"/>
+          </a:p>
+          <a:p>
+            <a:pPr marL="342900" indent="-342900">
+              <a:spcAft>
+                <a:spcPts val="600"/>
+              </a:spcAft>
+              <a:buSzPct val="100000"/>
+              <a:buChar char="•"/>
+            </a:pPr>
+            <a:r>
+              <a:rPr lang="en-US" sz="1700" dirty="0">
+                <a:solidFill>
+                  <a:srgbClr val="2F3E4E"/>
+                </a:solidFill>
+                <a:latin typeface="Calibri" pitchFamily="34" charset="0"/>
+                <a:ea typeface="Calibri" pitchFamily="34" charset="-122"/>
+                <a:cs typeface="Calibri" pitchFamily="34" charset="-120"/>
+              </a:rPr>
+              <a:t>Contar mal los elementos de [a, b]: son b − a + 1.</a:t>
+            </a:r>
+            <a:endParaRPr lang="en-US" sz="1700" dirty="0"/>
+          </a:p>
+          <a:p>
+            <a:pPr marL="342900" indent="-342900">
+              <a:spcAft>
+                <a:spcPts val="600"/>
+              </a:spcAft>
+              <a:buSzPct val="100000"/>
+              <a:buChar char="•"/>
+            </a:pPr>
+            <a:r>
+              <a:rPr lang="en-US" sz="1700" dirty="0">
+                <a:solidFill>
+                  <a:srgbClr val="2F3E4E"/>
+                </a:solidFill>
+                <a:latin typeface="Calibri" pitchFamily="34" charset="0"/>
+                <a:ea typeface="Calibri" pitchFamily="34" charset="-122"/>
+                <a:cs typeface="Calibri" pitchFamily="34" charset="-120"/>
+              </a:rPr>
+              <a:t>Olvidar restar la intersección en inclusión-exclusión.</a:t>
+            </a:r>
+            <a:endParaRPr lang="en-US" sz="1700" dirty="0"/>
+          </a:p>
+          <a:p>
+            <a:pPr marL="342900" indent="-342900">
+              <a:spcAft>
+                <a:spcPts val="600"/>
+              </a:spcAft>
+              <a:buSzPct val="100000"/>
+              <a:buChar char="•"/>
+            </a:pPr>
+            <a:r>
+              <a:rPr lang="en-US" sz="1700" dirty="0">
+                <a:solidFill>
+                  <a:srgbClr val="2F3E4E"/>
+                </a:solidFill>
+                <a:latin typeface="Calibri" pitchFamily="34" charset="0"/>
+                <a:ea typeface="Calibri" pitchFamily="34" charset="-122"/>
+                <a:cs typeface="Calibri" pitchFamily="34" charset="-120"/>
+              </a:rPr>
+              <a:t>Confundir el cardinal (total) con el ordinal (posición).</a:t>
+            </a:r>
+            <a:endParaRPr lang="en-US" sz="1700" dirty="0"/>
+          </a:p>
+          <a:p>
+            <a:pPr marL="342900" indent="-342900">
+              <a:spcAft>
+                <a:spcPts val="600"/>
+              </a:spcAft>
+              <a:buSzPct val="100000"/>
+              <a:buChar char="•"/>
+            </a:pPr>
+            <a:r>
+              <a:rPr lang="en-US" sz="1700" dirty="0">
+                <a:solidFill>
+                  <a:srgbClr val="2F3E4E"/>
+                </a:solidFill>
+                <a:latin typeface="Calibri" pitchFamily="34" charset="0"/>
+                <a:ea typeface="Calibri" pitchFamily="34" charset="-122"/>
+                <a:cs typeface="Calibri" pitchFamily="34" charset="-120"/>
+              </a:rPr>
+              <a:t>Aplicar el piso con negativos: ⌊−3.2⌋ = −4, no −3.</a:t>
+            </a:r>
+            <a:endParaRPr lang="en-US" sz="1700" dirty="0"/>
+          </a:p>
+        </p:txBody>
+      </p:sp>
+    </p:spTree>
+  </p:cSld>
+  <p:clrMapOvr>
+    <a:masterClrMapping/>
+  </p:clrMapOvr>
+</p:sld>
+</file>
+
+<file path=ppt/slides/slide24.xml><?xml version="1.0" encoding="utf-8"?>
+<p:sld xmlns:a="http://schemas.openxmlformats.org/drawingml/2006/main" xmlns:r="http://schemas.openxmlformats.org/officeDocument/2006/relationships" xmlns:p="http://schemas.openxmlformats.org/presentationml/2006/main">
+  <p:cSld name="Slide 24">
+    <p:bg>
+      <p:bgPr>
+        <a:solidFill>
+          <a:srgbClr val="FFFFFF"/>
+        </a:solidFill>
+      </p:bgPr>
+    </p:bg>
+    <p:spTree>
+      <p:nvGrpSpPr>
+        <p:cNvPr id="1" name=""/>
+        <p:cNvGrpSpPr/>
+        <p:nvPr/>
+      </p:nvGrpSpPr>
+      <p:grpSpPr>
+        <a:xfrm>
+          <a:off x="0" y="0"/>
+          <a:ext cx="0" cy="0"/>
+          <a:chOff x="0" y="0"/>
+          <a:chExt cx="0" cy="0"/>
+        </a:xfrm>
+      </p:grpSpPr>
+      <p:sp>
+        <p:nvSpPr>
+          <p:cNvPr id="2" name="Text 0"/>
+          <p:cNvSpPr txBox="1"/>
+          <p:nvPr/>
+        </p:nvSpPr>
+        <p:spPr>
+          <a:xfrm>
+            <a:off x="548640" y="320040"/>
+            <a:ext cx="8046720" cy="640080"/>
+          </a:xfrm>
+          <a:prstGeom prst="rect">
+            <a:avLst/>
+          </a:prstGeom>
+          <a:noFill/>
+          <a:ln/>
+        </p:spPr>
+        <p:txBody>
+          <a:bodyPr wrap="square" lIns="0" tIns="0" rIns="0" bIns="0" rtlCol="0" anchor="ctr"/>
+          <a:lstStyle/>
+          <a:p>
+            <a:pPr indent="0" marL="0">
+              <a:buNone/>
+            </a:pPr>
+            <a:r>
+              <a:rPr lang="en-US" sz="3000" b="1" dirty="0">
+                <a:solidFill>
+                  <a:srgbClr val="2F3E4E"/>
+                </a:solidFill>
+                <a:latin typeface="Cambria" pitchFamily="34" charset="0"/>
+                <a:ea typeface="Cambria" pitchFamily="34" charset="-122"/>
+                <a:cs typeface="Cambria" pitchFamily="34" charset="-120"/>
+              </a:rPr>
               <a:t>Resumen de la clase</a:t>
             </a:r>
             <a:endParaRPr lang="en-US" sz="3000" dirty="0"/>
@@ -6057,7 +11896,7 @@
       </p:sp>
       <p:graphicFrame>
         <p:nvGraphicFramePr>
-          <p:cNvPr id="15" name="Table 0"/>
+          <p:cNvPr id="25" name="Table 0"/>
           <p:cNvGraphicFramePr>
             <a:graphicFrameLocks noGrp="1"/>
           </p:cNvGraphicFramePr>
@@ -7112,6 +12951,418 @@
                   </a:tcPr>
                 </a:tc>
               </a:tr>
+              <a:tr h="411480">
+                <a:tc>
+                  <a:txBody>
+                    <a:bodyPr/>
+                    <a:lstStyle/>
+                    <a:p>
+                      <a:pPr algn="ctr" indent="0" marL="0">
+                        <a:buNone/>
+                      </a:pPr>
+                      <a:r>
+                        <a:rPr lang="en-US" sz="1400" dirty="0">
+                          <a:solidFill>
+                            <a:srgbClr val="2F3E4E"/>
+                          </a:solidFill>
+                          <a:latin typeface="Calibri" pitchFamily="34" charset="0"/>
+                          <a:ea typeface="Calibri" pitchFamily="34" charset="-122"/>
+                          <a:cs typeface="Calibri" pitchFamily="34" charset="-120"/>
+                        </a:rPr>
+                        <a:t>Aritmética modular</a:t>
+                      </a:r>
+                      <a:endParaRPr lang="en-US" sz="1400" dirty="0">
+                        <a:latin typeface="Calibri" charset="0"/>
+                        <a:ea typeface="Calibri" charset="0"/>
+                        <a:cs typeface="Calibri" charset="0"/>
+                      </a:endParaRPr>
+                    </a:p>
+                  </a:txBody>
+                  <a:tcPr marL="91440" marR="91440" marT="45720" marB="45720" anchor="ctr">
+                    <a:lnL w="9525" cap="flat" cmpd="sng" algn="ctr">
+                      <a:solidFill>
+                        <a:srgbClr val="C9D5E2"/>
+                      </a:solidFill>
+                      <a:prstDash val="solid"/>
+                      <a:round/>
+                      <a:headEnd type="none" w="med" len="med"/>
+                      <a:tailEnd type="none" w="med" len="med"/>
+                    </a:lnL>
+                    <a:lnR w="9525" cap="flat" cmpd="sng" algn="ctr">
+                      <a:solidFill>
+                        <a:srgbClr val="C9D5E2"/>
+                      </a:solidFill>
+                      <a:prstDash val="solid"/>
+                      <a:round/>
+                      <a:headEnd type="none" w="med" len="med"/>
+                      <a:tailEnd type="none" w="med" len="med"/>
+                    </a:lnR>
+                    <a:lnT w="9525" cap="flat" cmpd="sng" algn="ctr">
+                      <a:solidFill>
+                        <a:srgbClr val="C9D5E2"/>
+                      </a:solidFill>
+                      <a:prstDash val="solid"/>
+                      <a:round/>
+                      <a:headEnd type="none" w="med" len="med"/>
+                      <a:tailEnd type="none" w="med" len="med"/>
+                    </a:lnT>
+                    <a:lnB w="9525" cap="flat" cmpd="sng" algn="ctr">
+                      <a:solidFill>
+                        <a:srgbClr val="C9D5E2"/>
+                      </a:solidFill>
+                      <a:prstDash val="solid"/>
+                      <a:round/>
+                      <a:headEnd type="none" w="med" len="med"/>
+                      <a:tailEnd type="none" w="med" len="med"/>
+                    </a:lnB>
+                    <a:solidFill>
+                      <a:srgbClr val="FFFFFF"/>
+                    </a:solidFill>
+                  </a:tcPr>
+                </a:tc>
+                <a:tc>
+                  <a:txBody>
+                    <a:bodyPr/>
+                    <a:lstStyle/>
+                    <a:p>
+                      <a:pPr algn="ctr" indent="0" marL="0">
+                        <a:buNone/>
+                      </a:pPr>
+                      <a:r>
+                        <a:rPr lang="en-US" sz="1400" dirty="0">
+                          <a:solidFill>
+                            <a:srgbClr val="2F3E4E"/>
+                          </a:solidFill>
+                          <a:latin typeface="Calibri" pitchFamily="34" charset="0"/>
+                          <a:ea typeface="Calibri" pitchFamily="34" charset="-122"/>
+                          <a:cs typeface="Calibri" pitchFamily="34" charset="-120"/>
+                        </a:rPr>
+                        <a:t>a ≡ b (mod m) con mismo residuo</a:t>
+                      </a:r>
+                      <a:endParaRPr lang="en-US" sz="1400" dirty="0">
+                        <a:latin typeface="Calibri" charset="0"/>
+                        <a:ea typeface="Calibri" charset="0"/>
+                        <a:cs typeface="Calibri" charset="0"/>
+                      </a:endParaRPr>
+                    </a:p>
+                  </a:txBody>
+                  <a:tcPr marL="91440" marR="91440" marT="45720" marB="45720" anchor="ctr">
+                    <a:lnL w="9525" cap="flat" cmpd="sng" algn="ctr">
+                      <a:solidFill>
+                        <a:srgbClr val="C9D5E2"/>
+                      </a:solidFill>
+                      <a:prstDash val="solid"/>
+                      <a:round/>
+                      <a:headEnd type="none" w="med" len="med"/>
+                      <a:tailEnd type="none" w="med" len="med"/>
+                    </a:lnL>
+                    <a:lnR w="9525" cap="flat" cmpd="sng" algn="ctr">
+                      <a:solidFill>
+                        <a:srgbClr val="C9D5E2"/>
+                      </a:solidFill>
+                      <a:prstDash val="solid"/>
+                      <a:round/>
+                      <a:headEnd type="none" w="med" len="med"/>
+                      <a:tailEnd type="none" w="med" len="med"/>
+                    </a:lnR>
+                    <a:lnT w="9525" cap="flat" cmpd="sng" algn="ctr">
+                      <a:solidFill>
+                        <a:srgbClr val="C9D5E2"/>
+                      </a:solidFill>
+                      <a:prstDash val="solid"/>
+                      <a:round/>
+                      <a:headEnd type="none" w="med" len="med"/>
+                      <a:tailEnd type="none" w="med" len="med"/>
+                    </a:lnT>
+                    <a:lnB w="9525" cap="flat" cmpd="sng" algn="ctr">
+                      <a:solidFill>
+                        <a:srgbClr val="C9D5E2"/>
+                      </a:solidFill>
+                      <a:prstDash val="solid"/>
+                      <a:round/>
+                      <a:headEnd type="none" w="med" len="med"/>
+                      <a:tailEnd type="none" w="med" len="med"/>
+                    </a:lnB>
+                    <a:solidFill>
+                      <a:srgbClr val="FFFFFF"/>
+                    </a:solidFill>
+                  </a:tcPr>
+                </a:tc>
+                <a:tc>
+                  <a:txBody>
+                    <a:bodyPr/>
+                    <a:lstStyle/>
+                    <a:p>
+                      <a:pPr algn="ctr" indent="0" marL="0">
+                        <a:buNone/>
+                      </a:pPr>
+                      <a:r>
+                        <a:rPr lang="en-US" sz="1400" dirty="0">
+                          <a:solidFill>
+                            <a:srgbClr val="2F3E4E"/>
+                          </a:solidFill>
+                          <a:latin typeface="Calibri" pitchFamily="34" charset="0"/>
+                          <a:ea typeface="Calibri" pitchFamily="34" charset="-122"/>
+                          <a:cs typeface="Calibri" pitchFamily="34" charset="-120"/>
+                        </a:rPr>
+                        <a:t>Ciclos y residuos</a:t>
+                      </a:r>
+                      <a:endParaRPr lang="en-US" sz="1400" dirty="0">
+                        <a:latin typeface="Calibri" charset="0"/>
+                        <a:ea typeface="Calibri" charset="0"/>
+                        <a:cs typeface="Calibri" charset="0"/>
+                      </a:endParaRPr>
+                    </a:p>
+                  </a:txBody>
+                  <a:tcPr marL="91440" marR="91440" marT="45720" marB="45720" anchor="ctr">
+                    <a:lnL w="9525" cap="flat" cmpd="sng" algn="ctr">
+                      <a:solidFill>
+                        <a:srgbClr val="C9D5E2"/>
+                      </a:solidFill>
+                      <a:prstDash val="solid"/>
+                      <a:round/>
+                      <a:headEnd type="none" w="med" len="med"/>
+                      <a:tailEnd type="none" w="med" len="med"/>
+                    </a:lnL>
+                    <a:lnR w="9525" cap="flat" cmpd="sng" algn="ctr">
+                      <a:solidFill>
+                        <a:srgbClr val="C9D5E2"/>
+                      </a:solidFill>
+                      <a:prstDash val="solid"/>
+                      <a:round/>
+                      <a:headEnd type="none" w="med" len="med"/>
+                      <a:tailEnd type="none" w="med" len="med"/>
+                    </a:lnR>
+                    <a:lnT w="9525" cap="flat" cmpd="sng" algn="ctr">
+                      <a:solidFill>
+                        <a:srgbClr val="C9D5E2"/>
+                      </a:solidFill>
+                      <a:prstDash val="solid"/>
+                      <a:round/>
+                      <a:headEnd type="none" w="med" len="med"/>
+                      <a:tailEnd type="none" w="med" len="med"/>
+                    </a:lnT>
+                    <a:lnB w="9525" cap="flat" cmpd="sng" algn="ctr">
+                      <a:solidFill>
+                        <a:srgbClr val="C9D5E2"/>
+                      </a:solidFill>
+                      <a:prstDash val="solid"/>
+                      <a:round/>
+                      <a:headEnd type="none" w="med" len="med"/>
+                      <a:tailEnd type="none" w="med" len="med"/>
+                    </a:lnB>
+                    <a:solidFill>
+                      <a:srgbClr val="FFFFFF"/>
+                    </a:solidFill>
+                  </a:tcPr>
+                </a:tc>
+              </a:tr>
+              <a:tr h="411480">
+                <a:tc>
+                  <a:txBody>
+                    <a:bodyPr/>
+                    <a:lstStyle/>
+                    <a:p>
+                      <a:pPr algn="ctr" indent="0" marL="0">
+                        <a:buNone/>
+                      </a:pPr>
+                      <a:r>
+                        <a:rPr lang="en-US" sz="1400" dirty="0">
+                          <a:solidFill>
+                            <a:srgbClr val="2F3E4E"/>
+                          </a:solidFill>
+                          <a:latin typeface="Calibri" pitchFamily="34" charset="0"/>
+                          <a:ea typeface="Calibri" pitchFamily="34" charset="-122"/>
+                          <a:cs typeface="Calibri" pitchFamily="34" charset="-120"/>
+                        </a:rPr>
+                        <a:t>Mcd y mcm</a:t>
+                      </a:r>
+                      <a:endParaRPr lang="en-US" sz="1400" dirty="0">
+                        <a:latin typeface="Calibri" charset="0"/>
+                        <a:ea typeface="Calibri" charset="0"/>
+                        <a:cs typeface="Calibri" charset="0"/>
+                      </a:endParaRPr>
+                    </a:p>
+                  </a:txBody>
+                  <a:tcPr marL="91440" marR="91440" marT="45720" marB="45720" anchor="ctr">
+                    <a:lnL w="9525" cap="flat" cmpd="sng" algn="ctr">
+                      <a:solidFill>
+                        <a:srgbClr val="C9D5E2"/>
+                      </a:solidFill>
+                      <a:prstDash val="solid"/>
+                      <a:round/>
+                      <a:headEnd type="none" w="med" len="med"/>
+                      <a:tailEnd type="none" w="med" len="med"/>
+                    </a:lnL>
+                    <a:lnR w="9525" cap="flat" cmpd="sng" algn="ctr">
+                      <a:solidFill>
+                        <a:srgbClr val="C9D5E2"/>
+                      </a:solidFill>
+                      <a:prstDash val="solid"/>
+                      <a:round/>
+                      <a:headEnd type="none" w="med" len="med"/>
+                      <a:tailEnd type="none" w="med" len="med"/>
+                    </a:lnR>
+                    <a:lnT w="9525" cap="flat" cmpd="sng" algn="ctr">
+                      <a:solidFill>
+                        <a:srgbClr val="C9D5E2"/>
+                      </a:solidFill>
+                      <a:prstDash val="solid"/>
+                      <a:round/>
+                      <a:headEnd type="none" w="med" len="med"/>
+                      <a:tailEnd type="none" w="med" len="med"/>
+                    </a:lnT>
+                    <a:lnB w="9525" cap="flat" cmpd="sng" algn="ctr">
+                      <a:solidFill>
+                        <a:srgbClr val="C9D5E2"/>
+                      </a:solidFill>
+                      <a:prstDash val="solid"/>
+                      <a:round/>
+                      <a:headEnd type="none" w="med" len="med"/>
+                      <a:tailEnd type="none" w="med" len="med"/>
+                    </a:lnB>
+                    <a:solidFill>
+                      <a:srgbClr val="EEF3F8"/>
+                    </a:solidFill>
+                  </a:tcPr>
+                </a:tc>
+                <a:tc>
+                  <a:txBody>
+                    <a:bodyPr/>
+                    <a:lstStyle/>
+                    <a:p>
+                      <a:pPr algn="ctr" indent="0" marL="0">
+                        <a:buNone/>
+                      </a:pPr>
+                      <a:r>
+                        <a:rPr lang="en-US" sz="1400" dirty="0">
+                          <a:solidFill>
+                            <a:srgbClr val="2F3E4E"/>
+                          </a:solidFill>
+                          <a:latin typeface="Calibri" pitchFamily="34" charset="0"/>
+                          <a:ea typeface="Calibri" pitchFamily="34" charset="-122"/>
+                          <a:cs typeface="Calibri" pitchFamily="34" charset="-120"/>
+                        </a:rPr>
+                        <a:t>mcd(a, b) · mcm(a, b) = a · b</a:t>
+                      </a:r>
+                      <a:endParaRPr lang="en-US" sz="1400" dirty="0">
+                        <a:latin typeface="Calibri" charset="0"/>
+                        <a:ea typeface="Calibri" charset="0"/>
+                        <a:cs typeface="Calibri" charset="0"/>
+                      </a:endParaRPr>
+                    </a:p>
+                  </a:txBody>
+                  <a:tcPr marL="91440" marR="91440" marT="45720" marB="45720" anchor="ctr">
+                    <a:lnL w="9525" cap="flat" cmpd="sng" algn="ctr">
+                      <a:solidFill>
+                        <a:srgbClr val="C9D5E2"/>
+                      </a:solidFill>
+                      <a:prstDash val="solid"/>
+                      <a:round/>
+                      <a:headEnd type="none" w="med" len="med"/>
+                      <a:tailEnd type="none" w="med" len="med"/>
+                    </a:lnL>
+                    <a:lnR w="9525" cap="flat" cmpd="sng" algn="ctr">
+                      <a:solidFill>
+                        <a:srgbClr val="C9D5E2"/>
+                      </a:solidFill>
+                      <a:prstDash val="solid"/>
+                      <a:round/>
+                      <a:headEnd type="none" w="med" len="med"/>
+                      <a:tailEnd type="none" w="med" len="med"/>
+                    </a:lnR>
+                    <a:lnT w="9525" cap="flat" cmpd="sng" algn="ctr">
+                      <a:solidFill>
+                        <a:srgbClr val="C9D5E2"/>
+                      </a:solidFill>
+                      <a:prstDash val="solid"/>
+                      <a:round/>
+                      <a:headEnd type="none" w="med" len="med"/>
+                      <a:tailEnd type="none" w="med" len="med"/>
+                    </a:lnT>
+                    <a:lnB w="9525" cap="flat" cmpd="sng" algn="ctr">
+                      <a:solidFill>
+                        <a:srgbClr val="C9D5E2"/>
+                      </a:solidFill>
+                      <a:prstDash val="solid"/>
+                      <a:round/>
+                      <a:headEnd type="none" w="med" len="med"/>
+                      <a:tailEnd type="none" w="med" len="med"/>
+                    </a:lnB>
+                    <a:solidFill>
+                      <a:srgbClr val="EEF3F8"/>
+                    </a:solidFill>
+                  </a:tcPr>
+                </a:tc>
+                <a:tc>
+                  <a:txBody>
+                    <a:bodyPr/>
+                    <a:lstStyle/>
+                    <a:p>
+                      <a:pPr algn="ctr" indent="0" marL="0">
+                        <a:buNone/>
+                      </a:pPr>
+                      <a:r>
+                        <a:rPr lang="en-US" sz="1400" dirty="0">
+                          <a:solidFill>
+                            <a:srgbClr val="2F3E4E"/>
+                          </a:solidFill>
+                          <a:latin typeface="Calibri" pitchFamily="34" charset="0"/>
+                          <a:ea typeface="Calibri" pitchFamily="34" charset="-122"/>
+                          <a:cs typeface="Calibri" pitchFamily="34" charset="-120"/>
+                        </a:rPr>
+                        <a:t>Repartir o coincidir</a:t>
+                      </a:r>
+                      <a:endParaRPr lang="en-US" sz="1400" dirty="0">
+                        <a:latin typeface="Calibri" charset="0"/>
+                        <a:ea typeface="Calibri" charset="0"/>
+                        <a:cs typeface="Calibri" charset="0"/>
+                      </a:endParaRPr>
+                    </a:p>
+                  </a:txBody>
+                  <a:tcPr marL="91440" marR="91440" marT="45720" marB="45720" anchor="ctr">
+                    <a:lnL w="9525" cap="flat" cmpd="sng" algn="ctr">
+                      <a:solidFill>
+                        <a:srgbClr val="C9D5E2"/>
+                      </a:solidFill>
+                      <a:prstDash val="solid"/>
+                      <a:round/>
+                      <a:headEnd type="none" w="med" len="med"/>
+                      <a:tailEnd type="none" w="med" len="med"/>
+                    </a:lnL>
+                    <a:lnR w="9525" cap="flat" cmpd="sng" algn="ctr">
+                      <a:solidFill>
+                        <a:srgbClr val="C9D5E2"/>
+                      </a:solidFill>
+                      <a:prstDash val="solid"/>
+                      <a:round/>
+                      <a:headEnd type="none" w="med" len="med"/>
+                      <a:tailEnd type="none" w="med" len="med"/>
+                    </a:lnR>
+                    <a:lnT w="9525" cap="flat" cmpd="sng" algn="ctr">
+                      <a:solidFill>
+                        <a:srgbClr val="C9D5E2"/>
+                      </a:solidFill>
+                      <a:prstDash val="solid"/>
+                      <a:round/>
+                      <a:headEnd type="none" w="med" len="med"/>
+                      <a:tailEnd type="none" w="med" len="med"/>
+                    </a:lnT>
+                    <a:lnB w="9525" cap="flat" cmpd="sng" algn="ctr">
+                      <a:solidFill>
+                        <a:srgbClr val="C9D5E2"/>
+                      </a:solidFill>
+                      <a:prstDash val="solid"/>
+                      <a:round/>
+                      <a:headEnd type="none" w="med" len="med"/>
+                      <a:tailEnd type="none" w="med" len="med"/>
+                    </a:lnB>
+                    <a:solidFill>
+                      <a:srgbClr val="EEF3F8"/>
+                    </a:solidFill>
+                  </a:tcPr>
+                </a:tc>
+              </a:tr>
             </a:tbl>
           </a:graphicData>
         </a:graphic>
@@ -7124,9 +13375,9 @@
 </p:sld>
 </file>
 
-<file path=ppt/slides/slide15.xml><?xml version="1.0" encoding="utf-8"?>
+<file path=ppt/slides/slide25.xml><?xml version="1.0" encoding="utf-8"?>
 <p:sld xmlns:a="http://schemas.openxmlformats.org/drawingml/2006/main" xmlns:r="http://schemas.openxmlformats.org/officeDocument/2006/relationships" xmlns:p="http://schemas.openxmlformats.org/presentationml/2006/main">
-  <p:cSld name="Slide 15">
+  <p:cSld name="Slide 25">
     <p:bg>
       <p:bgPr>
         <a:solidFill>
@@ -7302,7 +13553,7 @@
                 <a:ea typeface="Calibri" pitchFamily="34" charset="-122"/>
                 <a:cs typeface="Calibri" pitchFamily="34" charset="-120"/>
               </a:rPr>
-              <a:t>Ejercicios guiados: del 1 al 5, con procedimiento.</a:t>
+              <a:t>Ejercicios guiados: del 1 al 5 y del 12 al 15.</a:t>
             </a:r>
             <a:endParaRPr lang="en-US" sz="1800" dirty="0"/>
           </a:p>
@@ -7323,7 +13574,7 @@
                 <a:ea typeface="Calibri" pitchFamily="34" charset="-122"/>
                 <a:cs typeface="Calibri" pitchFamily="34" charset="-120"/>
               </a:rPr>
-              <a:t>Ejercicios independientes: del 6 al 11.</a:t>
+              <a:t>Ejercicios independientes: del 6 al 11 y del 16 al 19.</a:t>
             </a:r>
             <a:endParaRPr lang="en-US" sz="1800" dirty="0"/>
           </a:p>
@@ -7344,7 +13595,7 @@
                 <a:ea typeface="Calibri" pitchFamily="34" charset="-122"/>
                 <a:cs typeface="Calibri" pitchFamily="34" charset="-120"/>
               </a:rPr>
-              <a:t>Quiz: 8 preguntas. Se aprueba con 6 o más aciertos.</a:t>
+              <a:t>Quiz: 12 preguntas. Se aprueba con 6 o más aciertos.</a:t>
             </a:r>
             <a:endParaRPr lang="en-US" sz="1800" dirty="0"/>
           </a:p>
@@ -7365,774 +13616,9 @@
                 <a:ea typeface="Calibri" pitchFamily="34" charset="-122"/>
                 <a:cs typeface="Calibri" pitchFamily="34" charset="-120"/>
               </a:rPr>
-              <a:t>Tarea del bloque: 15 ejercicios; los ejercicios 6 a 10 son de este tema.</a:t>
+              <a:t>Tarea del bloque: 20 ejercicios, con los temas nuevos al final.</a:t>
             </a:r>
             <a:endParaRPr lang="en-US" sz="1800" dirty="0"/>
-          </a:p>
-        </p:txBody>
-      </p:sp>
-    </p:spTree>
-  </p:cSld>
-  <p:clrMapOvr>
-    <a:masterClrMapping/>
-  </p:clrMapOvr>
-</p:sld>
-</file>
-
-<file path=ppt/slides/slide2.xml><?xml version="1.0" encoding="utf-8"?>
-<p:sld xmlns:a="http://schemas.openxmlformats.org/drawingml/2006/main" xmlns:r="http://schemas.openxmlformats.org/officeDocument/2006/relationships" xmlns:p="http://schemas.openxmlformats.org/presentationml/2006/main">
-  <p:cSld name="Slide 2">
-    <p:bg>
-      <p:bgPr>
-        <a:solidFill>
-          <a:srgbClr val="FFFFFF"/>
-        </a:solidFill>
-      </p:bgPr>
-    </p:bg>
-    <p:spTree>
-      <p:nvGrpSpPr>
-        <p:cNvPr id="1" name=""/>
-        <p:cNvGrpSpPr/>
-        <p:nvPr/>
-      </p:nvGrpSpPr>
-      <p:grpSpPr>
-        <a:xfrm>
-          <a:off x="0" y="0"/>
-          <a:ext cx="0" cy="0"/>
-          <a:chOff x="0" y="0"/>
-          <a:chExt cx="0" cy="0"/>
-        </a:xfrm>
-      </p:grpSpPr>
-      <p:sp>
-        <p:nvSpPr>
-          <p:cNvPr id="2" name="Text 0"/>
-          <p:cNvSpPr txBox="1"/>
-          <p:nvPr/>
-        </p:nvSpPr>
-        <p:spPr>
-          <a:xfrm>
-            <a:off x="548640" y="320040"/>
-            <a:ext cx="8046720" cy="640080"/>
-          </a:xfrm>
-          <a:prstGeom prst="rect">
-            <a:avLst/>
-          </a:prstGeom>
-          <a:noFill/>
-          <a:ln/>
-        </p:spPr>
-        <p:txBody>
-          <a:bodyPr wrap="square" lIns="0" tIns="0" rIns="0" bIns="0" rtlCol="0" anchor="ctr"/>
-          <a:lstStyle/>
-          <a:p>
-            <a:pPr indent="0" marL="0">
-              <a:buNone/>
-            </a:pPr>
-            <a:r>
-              <a:rPr lang="en-US" sz="3000" b="1" dirty="0">
-                <a:solidFill>
-                  <a:srgbClr val="2F3E4E"/>
-                </a:solidFill>
-                <a:latin typeface="Cambria" pitchFamily="34" charset="0"/>
-                <a:ea typeface="Cambria" pitchFamily="34" charset="-122"/>
-                <a:cs typeface="Cambria" pitchFamily="34" charset="-120"/>
-              </a:rPr>
-              <a:t>Modelar con números enteros</a:t>
-            </a:r>
-            <a:endParaRPr lang="en-US" sz="3000" dirty="0"/>
-          </a:p>
-        </p:txBody>
-      </p:sp>
-      <p:sp>
-        <p:nvSpPr>
-          <p:cNvPr id="3" name="Text 1"/>
-          <p:cNvSpPr txBox="1"/>
-          <p:nvPr/>
-        </p:nvSpPr>
-        <p:spPr>
-          <a:xfrm>
-            <a:off x="548640" y="960120"/>
-            <a:ext cx="8046720" cy="365760"/>
-          </a:xfrm>
-          <a:prstGeom prst="rect">
-            <a:avLst/>
-          </a:prstGeom>
-          <a:noFill/>
-          <a:ln/>
-        </p:spPr>
-        <p:txBody>
-          <a:bodyPr wrap="square" lIns="0" tIns="0" rIns="0" bIns="0" rtlCol="0" anchor="ctr"/>
-          <a:lstStyle/>
-          <a:p>
-            <a:pPr indent="0" marL="0">
-              <a:buNone/>
-            </a:pPr>
-            <a:r>
-              <a:rPr lang="en-US" sz="1600" dirty="0">
-                <a:solidFill>
-                  <a:srgbClr val="5F6E80"/>
-                </a:solidFill>
-                <a:latin typeface="Calibri" pitchFamily="34" charset="0"/>
-                <a:ea typeface="Calibri" pitchFamily="34" charset="-122"/>
-                <a:cs typeface="Calibri" pitchFamily="34" charset="-120"/>
-              </a:rPr>
-              <a:t>Aritmética elemental, conteo ordenado y análisis por casos</a:t>
-            </a:r>
-            <a:endParaRPr lang="en-US" sz="1600" dirty="0"/>
-          </a:p>
-        </p:txBody>
-      </p:sp>
-      <p:sp>
-        <p:nvSpPr>
-          <p:cNvPr id="4" name="Text 2"/>
-          <p:cNvSpPr txBox="1"/>
-          <p:nvPr/>
-        </p:nvSpPr>
-        <p:spPr>
-          <a:xfrm>
-            <a:off x="548640" y="4754880"/>
-            <a:ext cx="8046720" cy="228600"/>
-          </a:xfrm>
-          <a:prstGeom prst="rect">
-            <a:avLst/>
-          </a:prstGeom>
-          <a:noFill/>
-          <a:ln/>
-        </p:spPr>
-        <p:txBody>
-          <a:bodyPr wrap="square" lIns="0" tIns="0" rIns="0" bIns="0" rtlCol="0" anchor="ctr"/>
-          <a:lstStyle/>
-          <a:p>
-            <a:pPr indent="0" marL="0">
-              <a:buNone/>
-            </a:pPr>
-            <a:r>
-              <a:rPr lang="en-US" sz="1000" dirty="0">
-                <a:solidFill>
-                  <a:srgbClr val="8A98A8"/>
-                </a:solidFill>
-                <a:latin typeface="Calibri" pitchFamily="34" charset="0"/>
-                <a:ea typeface="Calibri" pitchFamily="34" charset="-122"/>
-                <a:cs typeface="Calibri" pitchFamily="34" charset="-120"/>
-              </a:rPr>
-              <a:t>Club de programación Competitiva - BugSquad 2026</a:t>
-            </a:r>
-            <a:endParaRPr lang="en-US" sz="1000" dirty="0"/>
-          </a:p>
-        </p:txBody>
-      </p:sp>
-      <p:sp>
-        <p:nvSpPr>
-          <p:cNvPr id="5" name="Shape 3"/>
-          <p:cNvSpPr/>
-          <p:nvPr/>
-        </p:nvSpPr>
-        <p:spPr>
-          <a:xfrm>
-            <a:off x="548640" y="1645920"/>
-            <a:ext cx="1874520" cy="2377440"/>
-          </a:xfrm>
-          <a:prstGeom prst="roundRect">
-            <a:avLst>
-              <a:gd name="adj" fmla="val 5854"/>
-            </a:avLst>
-          </a:prstGeom>
-          <a:solidFill>
-            <a:srgbClr val="DDE8F3"/>
-          </a:solidFill>
-          <a:ln w="12700">
-            <a:solidFill>
-              <a:srgbClr val="DDE8F3"/>
-            </a:solidFill>
-            <a:prstDash val="solid"/>
-          </a:ln>
-        </p:spPr>
-      </p:sp>
-      <p:sp>
-        <p:nvSpPr>
-          <p:cNvPr id="6" name="Shape 4"/>
-          <p:cNvSpPr/>
-          <p:nvPr/>
-        </p:nvSpPr>
-        <p:spPr>
-          <a:xfrm>
-            <a:off x="731520" y="1828800"/>
-            <a:ext cx="548640" cy="548640"/>
-          </a:xfrm>
-          <a:prstGeom prst="ellipse">
-            <a:avLst/>
-          </a:prstGeom>
-          <a:solidFill>
-            <a:srgbClr val="4F7CAC"/>
-          </a:solidFill>
-          <a:ln w="12700">
-            <a:solidFill>
-              <a:srgbClr val="4F7CAC"/>
-            </a:solidFill>
-            <a:prstDash val="solid"/>
-          </a:ln>
-        </p:spPr>
-      </p:sp>
-      <p:pic>
-        <p:nvPicPr>
-          <p:cNvPr id="7" name="Image 0" descr="preencoded.png">    </p:cNvPr>
-          <p:cNvPicPr>
-            <a:picLocks noChangeAspect="1"/>
-          </p:cNvPicPr>
-          <p:nvPr/>
-        </p:nvPicPr>
-        <p:blipFill>
-          <a:blip r:embed="rId1"/>
-          <a:stretch>
-            <a:fillRect/>
-          </a:stretch>
-        </p:blipFill>
-        <p:spPr>
-          <a:xfrm>
-            <a:off x="879653" y="1976933"/>
-            <a:ext cx="252374" cy="252374"/>
-          </a:xfrm>
-          <a:prstGeom prst="rect">
-            <a:avLst/>
-          </a:prstGeom>
-        </p:spPr>
-      </p:pic>
-      <p:sp>
-        <p:nvSpPr>
-          <p:cNvPr id="8" name="Text 5"/>
-          <p:cNvSpPr txBox="1"/>
-          <p:nvPr/>
-        </p:nvSpPr>
-        <p:spPr>
-          <a:xfrm>
-            <a:off x="731520" y="2514600"/>
-            <a:ext cx="1508760" cy="548640"/>
-          </a:xfrm>
-          <a:prstGeom prst="rect">
-            <a:avLst/>
-          </a:prstGeom>
-          <a:noFill/>
-          <a:ln/>
-        </p:spPr>
-        <p:txBody>
-          <a:bodyPr wrap="square" lIns="0" tIns="0" rIns="0" bIns="0" rtlCol="0" anchor="t"/>
-          <a:lstStyle/>
-          <a:p>
-            <a:pPr indent="0" marL="0">
-              <a:buNone/>
-            </a:pPr>
-            <a:r>
-              <a:rPr lang="en-US" sz="1600" b="1" dirty="0">
-                <a:solidFill>
-                  <a:srgbClr val="2F3E4E"/>
-                </a:solidFill>
-                <a:latin typeface="Calibri" pitchFamily="34" charset="0"/>
-                <a:ea typeface="Calibri" pitchFamily="34" charset="-122"/>
-                <a:cs typeface="Calibri" pitchFamily="34" charset="-120"/>
-              </a:rPr>
-              <a:t>Paridad</a:t>
-            </a:r>
-            <a:endParaRPr lang="en-US" sz="1600" dirty="0"/>
-          </a:p>
-        </p:txBody>
-      </p:sp>
-      <p:sp>
-        <p:nvSpPr>
-          <p:cNvPr id="9" name="Text 6"/>
-          <p:cNvSpPr txBox="1"/>
-          <p:nvPr/>
-        </p:nvSpPr>
-        <p:spPr>
-          <a:xfrm>
-            <a:off x="731520" y="3108960"/>
-            <a:ext cx="1508760" cy="868680"/>
-          </a:xfrm>
-          <a:prstGeom prst="rect">
-            <a:avLst/>
-          </a:prstGeom>
-          <a:noFill/>
-          <a:ln/>
-        </p:spPr>
-        <p:txBody>
-          <a:bodyPr wrap="square" lIns="0" tIns="0" rIns="0" bIns="0" rtlCol="0" anchor="t"/>
-          <a:lstStyle/>
-          <a:p>
-            <a:pPr indent="0" marL="0">
-              <a:buNone/>
-            </a:pPr>
-            <a:r>
-              <a:rPr lang="en-US" sz="1300" dirty="0">
-                <a:solidFill>
-                  <a:srgbClr val="2F3E4E"/>
-                </a:solidFill>
-                <a:latin typeface="Calibri" pitchFamily="34" charset="0"/>
-                <a:ea typeface="Calibri" pitchFamily="34" charset="-122"/>
-                <a:cs typeface="Calibri" pitchFamily="34" charset="-120"/>
-              </a:rPr>
-              <a:t>Pares e impares, divisibilidad e invariantes.</a:t>
-            </a:r>
-            <a:endParaRPr lang="en-US" sz="1300" dirty="0"/>
-          </a:p>
-        </p:txBody>
-      </p:sp>
-      <p:sp>
-        <p:nvSpPr>
-          <p:cNvPr id="10" name="Shape 7"/>
-          <p:cNvSpPr/>
-          <p:nvPr/>
-        </p:nvSpPr>
-        <p:spPr>
-          <a:xfrm>
-            <a:off x="2606040" y="1645920"/>
-            <a:ext cx="1874520" cy="2377440"/>
-          </a:xfrm>
-          <a:prstGeom prst="roundRect">
-            <a:avLst>
-              <a:gd name="adj" fmla="val 5854"/>
-            </a:avLst>
-          </a:prstGeom>
-          <a:solidFill>
-            <a:srgbClr val="E1F0E7"/>
-          </a:solidFill>
-          <a:ln w="12700">
-            <a:solidFill>
-              <a:srgbClr val="E1F0E7"/>
-            </a:solidFill>
-            <a:prstDash val="solid"/>
-          </a:ln>
-        </p:spPr>
-      </p:sp>
-      <p:sp>
-        <p:nvSpPr>
-          <p:cNvPr id="11" name="Shape 8"/>
-          <p:cNvSpPr/>
-          <p:nvPr/>
-        </p:nvSpPr>
-        <p:spPr>
-          <a:xfrm>
-            <a:off x="2788920" y="1828800"/>
-            <a:ext cx="548640" cy="548640"/>
-          </a:xfrm>
-          <a:prstGeom prst="ellipse">
-            <a:avLst/>
-          </a:prstGeom>
-          <a:solidFill>
-            <a:srgbClr val="6FA287"/>
-          </a:solidFill>
-          <a:ln w="12700">
-            <a:solidFill>
-              <a:srgbClr val="6FA287"/>
-            </a:solidFill>
-            <a:prstDash val="solid"/>
-          </a:ln>
-        </p:spPr>
-      </p:sp>
-      <p:pic>
-        <p:nvPicPr>
-          <p:cNvPr id="12" name="Image 1" descr="preencoded.png">    </p:cNvPr>
-          <p:cNvPicPr>
-            <a:picLocks noChangeAspect="1"/>
-          </p:cNvPicPr>
-          <p:nvPr/>
-        </p:nvPicPr>
-        <p:blipFill>
-          <a:blip r:embed="rId2"/>
-          <a:stretch>
-            <a:fillRect/>
-          </a:stretch>
-        </p:blipFill>
-        <p:spPr>
-          <a:xfrm>
-            <a:off x="2937053" y="1976933"/>
-            <a:ext cx="252374" cy="252374"/>
-          </a:xfrm>
-          <a:prstGeom prst="rect">
-            <a:avLst/>
-          </a:prstGeom>
-        </p:spPr>
-      </p:pic>
-      <p:sp>
-        <p:nvSpPr>
-          <p:cNvPr id="13" name="Text 9"/>
-          <p:cNvSpPr txBox="1"/>
-          <p:nvPr/>
-        </p:nvSpPr>
-        <p:spPr>
-          <a:xfrm>
-            <a:off x="2788920" y="2514600"/>
-            <a:ext cx="1508760" cy="548640"/>
-          </a:xfrm>
-          <a:prstGeom prst="rect">
-            <a:avLst/>
-          </a:prstGeom>
-          <a:noFill/>
-          <a:ln/>
-        </p:spPr>
-        <p:txBody>
-          <a:bodyPr wrap="square" lIns="0" tIns="0" rIns="0" bIns="0" rtlCol="0" anchor="t"/>
-          <a:lstStyle/>
-          <a:p>
-            <a:pPr indent="0" marL="0">
-              <a:buNone/>
-            </a:pPr>
-            <a:r>
-              <a:rPr lang="en-US" sz="1600" b="1" dirty="0">
-                <a:solidFill>
-                  <a:srgbClr val="2F3E4E"/>
-                </a:solidFill>
-                <a:latin typeface="Calibri" pitchFamily="34" charset="0"/>
-                <a:ea typeface="Calibri" pitchFamily="34" charset="-122"/>
-                <a:cs typeface="Calibri" pitchFamily="34" charset="-120"/>
-              </a:rPr>
-              <a:t>Aritmética</a:t>
-            </a:r>
-            <a:endParaRPr lang="en-US" sz="1600" dirty="0"/>
-          </a:p>
-        </p:txBody>
-      </p:sp>
-      <p:sp>
-        <p:nvSpPr>
-          <p:cNvPr id="14" name="Text 10"/>
-          <p:cNvSpPr txBox="1"/>
-          <p:nvPr/>
-        </p:nvSpPr>
-        <p:spPr>
-          <a:xfrm>
-            <a:off x="2788920" y="3108960"/>
-            <a:ext cx="1508760" cy="868680"/>
-          </a:xfrm>
-          <a:prstGeom prst="rect">
-            <a:avLst/>
-          </a:prstGeom>
-          <a:noFill/>
-          <a:ln/>
-        </p:spPr>
-        <p:txBody>
-          <a:bodyPr wrap="square" lIns="0" tIns="0" rIns="0" bIns="0" rtlCol="0" anchor="t"/>
-          <a:lstStyle/>
-          <a:p>
-            <a:pPr indent="0" marL="0">
-              <a:buNone/>
-            </a:pPr>
-            <a:r>
-              <a:rPr lang="en-US" sz="1300" dirty="0">
-                <a:solidFill>
-                  <a:srgbClr val="2F3E4E"/>
-                </a:solidFill>
-                <a:latin typeface="Calibri" pitchFamily="34" charset="0"/>
-                <a:ea typeface="Calibri" pitchFamily="34" charset="-122"/>
-                <a:cs typeface="Calibri" pitchFamily="34" charset="-120"/>
-              </a:rPr>
-              <a:t>División con residuo, piso y techo.</a:t>
-            </a:r>
-            <a:endParaRPr lang="en-US" sz="1300" dirty="0"/>
-          </a:p>
-        </p:txBody>
-      </p:sp>
-      <p:sp>
-        <p:nvSpPr>
-          <p:cNvPr id="15" name="Shape 11"/>
-          <p:cNvSpPr/>
-          <p:nvPr/>
-        </p:nvSpPr>
-        <p:spPr>
-          <a:xfrm>
-            <a:off x="4663440" y="1645920"/>
-            <a:ext cx="1874520" cy="2377440"/>
-          </a:xfrm>
-          <a:prstGeom prst="roundRect">
-            <a:avLst>
-              <a:gd name="adj" fmla="val 5854"/>
-            </a:avLst>
-          </a:prstGeom>
-          <a:solidFill>
-            <a:srgbClr val="FBEADC"/>
-          </a:solidFill>
-          <a:ln w="12700">
-            <a:solidFill>
-              <a:srgbClr val="FBEADC"/>
-            </a:solidFill>
-            <a:prstDash val="solid"/>
-          </a:ln>
-        </p:spPr>
-      </p:sp>
-      <p:sp>
-        <p:nvSpPr>
-          <p:cNvPr id="16" name="Shape 12"/>
-          <p:cNvSpPr/>
-          <p:nvPr/>
-        </p:nvSpPr>
-        <p:spPr>
-          <a:xfrm>
-            <a:off x="4846320" y="1828800"/>
-            <a:ext cx="548640" cy="548640"/>
-          </a:xfrm>
-          <a:prstGeom prst="ellipse">
-            <a:avLst/>
-          </a:prstGeom>
-          <a:solidFill>
-            <a:srgbClr val="E39B6B"/>
-          </a:solidFill>
-          <a:ln w="12700">
-            <a:solidFill>
-              <a:srgbClr val="E39B6B"/>
-            </a:solidFill>
-            <a:prstDash val="solid"/>
-          </a:ln>
-        </p:spPr>
-      </p:sp>
-      <p:pic>
-        <p:nvPicPr>
-          <p:cNvPr id="17" name="Image 2" descr="preencoded.png">    </p:cNvPr>
-          <p:cNvPicPr>
-            <a:picLocks noChangeAspect="1"/>
-          </p:cNvPicPr>
-          <p:nvPr/>
-        </p:nvPicPr>
-        <p:blipFill>
-          <a:blip r:embed="rId3"/>
-          <a:stretch>
-            <a:fillRect/>
-          </a:stretch>
-        </p:blipFill>
-        <p:spPr>
-          <a:xfrm>
-            <a:off x="4994453" y="1976933"/>
-            <a:ext cx="252374" cy="252374"/>
-          </a:xfrm>
-          <a:prstGeom prst="rect">
-            <a:avLst/>
-          </a:prstGeom>
-        </p:spPr>
-      </p:pic>
-      <p:sp>
-        <p:nvSpPr>
-          <p:cNvPr id="18" name="Text 13"/>
-          <p:cNvSpPr txBox="1"/>
-          <p:nvPr/>
-        </p:nvSpPr>
-        <p:spPr>
-          <a:xfrm>
-            <a:off x="4846320" y="2514600"/>
-            <a:ext cx="1508760" cy="548640"/>
-          </a:xfrm>
-          <a:prstGeom prst="rect">
-            <a:avLst/>
-          </a:prstGeom>
-          <a:noFill/>
-          <a:ln/>
-        </p:spPr>
-        <p:txBody>
-          <a:bodyPr wrap="square" lIns="0" tIns="0" rIns="0" bIns="0" rtlCol="0" anchor="t"/>
-          <a:lstStyle/>
-          <a:p>
-            <a:pPr indent="0" marL="0">
-              <a:buNone/>
-            </a:pPr>
-            <a:r>
-              <a:rPr lang="en-US" sz="1600" b="1" dirty="0">
-                <a:solidFill>
-                  <a:srgbClr val="2F3E4E"/>
-                </a:solidFill>
-                <a:latin typeface="Calibri" pitchFamily="34" charset="0"/>
-                <a:ea typeface="Calibri" pitchFamily="34" charset="-122"/>
-                <a:cs typeface="Calibri" pitchFamily="34" charset="-120"/>
-              </a:rPr>
-              <a:t>Conteo</a:t>
-            </a:r>
-            <a:endParaRPr lang="en-US" sz="1600" dirty="0"/>
-          </a:p>
-        </p:txBody>
-      </p:sp>
-      <p:sp>
-        <p:nvSpPr>
-          <p:cNvPr id="19" name="Text 14"/>
-          <p:cNvSpPr txBox="1"/>
-          <p:nvPr/>
-        </p:nvSpPr>
-        <p:spPr>
-          <a:xfrm>
-            <a:off x="4846320" y="3108960"/>
-            <a:ext cx="1508760" cy="868680"/>
-          </a:xfrm>
-          <a:prstGeom prst="rect">
-            <a:avLst/>
-          </a:prstGeom>
-          <a:noFill/>
-          <a:ln/>
-        </p:spPr>
-        <p:txBody>
-          <a:bodyPr wrap="square" lIns="0" tIns="0" rIns="0" bIns="0" rtlCol="0" anchor="t"/>
-          <a:lstStyle/>
-          <a:p>
-            <a:pPr indent="0" marL="0">
-              <a:buNone/>
-            </a:pPr>
-            <a:r>
-              <a:rPr lang="en-US" sz="1300" dirty="0">
-                <a:solidFill>
-                  <a:srgbClr val="2F3E4E"/>
-                </a:solidFill>
-                <a:latin typeface="Calibri" pitchFamily="34" charset="0"/>
-                <a:ea typeface="Calibri" pitchFamily="34" charset="-122"/>
-                <a:cs typeface="Calibri" pitchFamily="34" charset="-120"/>
-              </a:rPr>
-              <a:t>Suma, producto y fórmulas cerradas.</a:t>
-            </a:r>
-            <a:endParaRPr lang="en-US" sz="1300" dirty="0"/>
-          </a:p>
-        </p:txBody>
-      </p:sp>
-      <p:sp>
-        <p:nvSpPr>
-          <p:cNvPr id="20" name="Shape 15"/>
-          <p:cNvSpPr/>
-          <p:nvPr/>
-        </p:nvSpPr>
-        <p:spPr>
-          <a:xfrm>
-            <a:off x="6720840" y="1645920"/>
-            <a:ext cx="1874520" cy="2377440"/>
-          </a:xfrm>
-          <a:prstGeom prst="roundRect">
-            <a:avLst>
-              <a:gd name="adj" fmla="val 5854"/>
-            </a:avLst>
-          </a:prstGeom>
-          <a:solidFill>
-            <a:srgbClr val="ECE8F6"/>
-          </a:solidFill>
-          <a:ln w="12700">
-            <a:solidFill>
-              <a:srgbClr val="ECE8F6"/>
-            </a:solidFill>
-            <a:prstDash val="solid"/>
-          </a:ln>
-        </p:spPr>
-      </p:sp>
-      <p:sp>
-        <p:nvSpPr>
-          <p:cNvPr id="21" name="Shape 16"/>
-          <p:cNvSpPr/>
-          <p:nvPr/>
-        </p:nvSpPr>
-        <p:spPr>
-          <a:xfrm>
-            <a:off x="6903720" y="1828800"/>
-            <a:ext cx="548640" cy="548640"/>
-          </a:xfrm>
-          <a:prstGeom prst="ellipse">
-            <a:avLst/>
-          </a:prstGeom>
-          <a:solidFill>
-            <a:srgbClr val="8E7FBF"/>
-          </a:solidFill>
-          <a:ln w="12700">
-            <a:solidFill>
-              <a:srgbClr val="8E7FBF"/>
-            </a:solidFill>
-            <a:prstDash val="solid"/>
-          </a:ln>
-        </p:spPr>
-      </p:sp>
-      <p:pic>
-        <p:nvPicPr>
-          <p:cNvPr id="22" name="Image 3" descr="preencoded.png">    </p:cNvPr>
-          <p:cNvPicPr>
-            <a:picLocks noChangeAspect="1"/>
-          </p:cNvPicPr>
-          <p:nvPr/>
-        </p:nvPicPr>
-        <p:blipFill>
-          <a:blip r:embed="rId4"/>
-          <a:stretch>
-            <a:fillRect/>
-          </a:stretch>
-        </p:blipFill>
-        <p:spPr>
-          <a:xfrm>
-            <a:off x="7051853" y="1976933"/>
-            <a:ext cx="252374" cy="252374"/>
-          </a:xfrm>
-          <a:prstGeom prst="rect">
-            <a:avLst/>
-          </a:prstGeom>
-        </p:spPr>
-      </p:pic>
-      <p:sp>
-        <p:nvSpPr>
-          <p:cNvPr id="23" name="Text 17"/>
-          <p:cNvSpPr txBox="1"/>
-          <p:nvPr/>
-        </p:nvSpPr>
-        <p:spPr>
-          <a:xfrm>
-            <a:off x="6903720" y="2514600"/>
-            <a:ext cx="1508760" cy="548640"/>
-          </a:xfrm>
-          <a:prstGeom prst="rect">
-            <a:avLst/>
-          </a:prstGeom>
-          <a:noFill/>
-          <a:ln/>
-        </p:spPr>
-        <p:txBody>
-          <a:bodyPr wrap="square" lIns="0" tIns="0" rIns="0" bIns="0" rtlCol="0" anchor="t"/>
-          <a:lstStyle/>
-          <a:p>
-            <a:pPr indent="0" marL="0">
-              <a:buNone/>
-            </a:pPr>
-            <a:r>
-              <a:rPr lang="en-US" sz="1600" b="1" dirty="0">
-                <a:solidFill>
-                  <a:srgbClr val="2F3E4E"/>
-                </a:solidFill>
-                <a:latin typeface="Calibri" pitchFamily="34" charset="0"/>
-                <a:ea typeface="Calibri" pitchFamily="34" charset="-122"/>
-                <a:cs typeface="Calibri" pitchFamily="34" charset="-120"/>
-              </a:rPr>
-              <a:t>Casos</a:t>
-            </a:r>
-            <a:endParaRPr lang="en-US" sz="1600" dirty="0"/>
-          </a:p>
-        </p:txBody>
-      </p:sp>
-      <p:sp>
-        <p:nvSpPr>
-          <p:cNvPr id="24" name="Text 18"/>
-          <p:cNvSpPr txBox="1"/>
-          <p:nvPr/>
-        </p:nvSpPr>
-        <p:spPr>
-          <a:xfrm>
-            <a:off x="6903720" y="3108960"/>
-            <a:ext cx="1508760" cy="868680"/>
-          </a:xfrm>
-          <a:prstGeom prst="rect">
-            <a:avLst/>
-          </a:prstGeom>
-          <a:noFill/>
-          <a:ln/>
-        </p:spPr>
-        <p:txBody>
-          <a:bodyPr wrap="square" lIns="0" tIns="0" rIns="0" bIns="0" rtlCol="0" anchor="t"/>
-          <a:lstStyle/>
-          <a:p>
-            <a:pPr indent="0" marL="0">
-              <a:buNone/>
-            </a:pPr>
-            <a:r>
-              <a:rPr lang="en-US" sz="1300" dirty="0">
-                <a:solidFill>
-                  <a:srgbClr val="2F3E4E"/>
-                </a:solidFill>
-                <a:latin typeface="Calibri" pitchFamily="34" charset="0"/>
-                <a:ea typeface="Calibri" pitchFamily="34" charset="-122"/>
-                <a:cs typeface="Calibri" pitchFamily="34" charset="-120"/>
-              </a:rPr>
-              <a:t>Inclusión-exclusión y simulación en papel.</a:t>
-            </a:r>
-            <a:endParaRPr lang="en-US" sz="1300" dirty="0"/>
           </a:p>
         </p:txBody>
       </p:sp>
